--- a/documentation/Presentation Coach - Kiro implementation_2.pptx
+++ b/documentation/Presentation Coach - Kiro implementation_2.pptx
@@ -5,7 +5,7 @@
     <p:sldMasterId id="2147483648" r:id="rId1"/>
   </p:sldMasterIdLst>
   <p:notesMasterIdLst>
-    <p:notesMasterId r:id="rId12"/>
+    <p:notesMasterId r:id="rId18"/>
   </p:notesMasterIdLst>
   <p:sldIdLst>
     <p:sldId id="256" r:id="rId2"/>
@@ -15,9 +15,15 @@
     <p:sldId id="265" r:id="rId6"/>
     <p:sldId id="266" r:id="rId7"/>
     <p:sldId id="268" r:id="rId8"/>
-    <p:sldId id="267" r:id="rId9"/>
-    <p:sldId id="269" r:id="rId10"/>
-    <p:sldId id="270" r:id="rId11"/>
+    <p:sldId id="2147482006" r:id="rId9"/>
+    <p:sldId id="267" r:id="rId10"/>
+    <p:sldId id="269" r:id="rId11"/>
+    <p:sldId id="257" r:id="rId12"/>
+    <p:sldId id="2147482002" r:id="rId13"/>
+    <p:sldId id="2147482003" r:id="rId14"/>
+    <p:sldId id="2147482004" r:id="rId15"/>
+    <p:sldId id="2147482005" r:id="rId16"/>
+    <p:sldId id="270" r:id="rId17"/>
   </p:sldIdLst>
   <p:sldSz cx="12192000" cy="6858000"/>
   <p:notesSz cx="6858000" cy="9144000"/>
@@ -116,6 +122,11 @@
       </a:defRPr>
     </a:lvl9pPr>
   </p:defaultTextStyle>
+  <p:extLst>
+    <p:ext uri="{EFAFB233-063F-42B5-8137-9DF3F51BA10A}">
+      <p15:sldGuideLst xmlns:p15="http://schemas.microsoft.com/office/powerpoint/2012/main"/>
+    </p:ext>
+  </p:extLst>
 </p:presentation>
 </file>
 
@@ -201,7 +212,7 @@
           <a:p>
             <a:fld id="{26CF327C-EC24-4AA1-954C-A019E52BB2A0}" type="datetimeFigureOut">
               <a:rPr lang="en-US" smtClean="0"/>
-              <a:t>6/19/2026</a:t>
+              <a:t>6/20/2026</a:t>
             </a:fld>
             <a:endParaRPr lang="en-US"/>
           </a:p>
@@ -710,7 +721,7 @@
           <a:p>
             <a:fld id="{00EA0966-F43C-4C57-A8FE-BF7156766ADA}" type="datetimeFigureOut">
               <a:rPr lang="en-US" smtClean="0"/>
-              <a:t>6/19/2026</a:t>
+              <a:t>6/20/2026</a:t>
             </a:fld>
             <a:endParaRPr lang="en-US"/>
           </a:p>
@@ -1022,7 +1033,7 @@
           <a:p>
             <a:fld id="{00EA0966-F43C-4C57-A8FE-BF7156766ADA}" type="datetimeFigureOut">
               <a:rPr lang="en-US" smtClean="0"/>
-              <a:t>6/19/2026</a:t>
+              <a:t>6/20/2026</a:t>
             </a:fld>
             <a:endParaRPr lang="en-US"/>
           </a:p>
@@ -1244,7 +1255,7 @@
           <a:p>
             <a:fld id="{00EA0966-F43C-4C57-A8FE-BF7156766ADA}" type="datetimeFigureOut">
               <a:rPr lang="en-US" smtClean="0"/>
-              <a:t>6/19/2026</a:t>
+              <a:t>6/20/2026</a:t>
             </a:fld>
             <a:endParaRPr lang="en-US"/>
           </a:p>
@@ -1476,7 +1487,7 @@
           <a:p>
             <a:fld id="{00EA0966-F43C-4C57-A8FE-BF7156766ADA}" type="datetimeFigureOut">
               <a:rPr lang="en-US" smtClean="0"/>
-              <a:t>6/19/2026</a:t>
+              <a:t>6/20/2026</a:t>
             </a:fld>
             <a:endParaRPr lang="en-US"/>
           </a:p>
@@ -1698,7 +1709,7 @@
           <a:p>
             <a:fld id="{00EA0966-F43C-4C57-A8FE-BF7156766ADA}" type="datetimeFigureOut">
               <a:rPr lang="en-US" smtClean="0"/>
-              <a:t>6/19/2026</a:t>
+              <a:t>6/20/2026</a:t>
             </a:fld>
             <a:endParaRPr lang="en-US"/>
           </a:p>
@@ -1997,7 +2008,7 @@
           <a:p>
             <a:fld id="{00EA0966-F43C-4C57-A8FE-BF7156766ADA}" type="datetimeFigureOut">
               <a:rPr lang="en-US" smtClean="0"/>
-              <a:t>6/19/2026</a:t>
+              <a:t>6/20/2026</a:t>
             </a:fld>
             <a:endParaRPr lang="en-US"/>
           </a:p>
@@ -2286,7 +2297,7 @@
           <a:p>
             <a:fld id="{00EA0966-F43C-4C57-A8FE-BF7156766ADA}" type="datetimeFigureOut">
               <a:rPr lang="en-US" smtClean="0"/>
-              <a:t>6/19/2026</a:t>
+              <a:t>6/20/2026</a:t>
             </a:fld>
             <a:endParaRPr lang="en-US"/>
           </a:p>
@@ -2722,7 +2733,7 @@
           <a:p>
             <a:fld id="{00EA0966-F43C-4C57-A8FE-BF7156766ADA}" type="datetimeFigureOut">
               <a:rPr lang="en-US" smtClean="0"/>
-              <a:t>6/19/2026</a:t>
+              <a:t>6/20/2026</a:t>
             </a:fld>
             <a:endParaRPr lang="en-US"/>
           </a:p>
@@ -2887,7 +2898,7 @@
           <a:p>
             <a:fld id="{00EA0966-F43C-4C57-A8FE-BF7156766ADA}" type="datetimeFigureOut">
               <a:rPr lang="en-US" smtClean="0"/>
-              <a:t>6/19/2026</a:t>
+              <a:t>6/20/2026</a:t>
             </a:fld>
             <a:endParaRPr lang="en-US"/>
           </a:p>
@@ -3364,7 +3375,7 @@
           <a:p>
             <a:fld id="{00EA0966-F43C-4C57-A8FE-BF7156766ADA}" type="datetimeFigureOut">
               <a:rPr lang="en-US" smtClean="0"/>
-              <a:t>6/19/2026</a:t>
+              <a:t>6/20/2026</a:t>
             </a:fld>
             <a:endParaRPr lang="en-US"/>
           </a:p>
@@ -3985,6 +3996,5802 @@
     </p:spTree>
     <p:extLst>
       <p:ext uri="{BB962C8B-B14F-4D97-AF65-F5344CB8AC3E}">
+        <p14:creationId xmlns:p14="http://schemas.microsoft.com/office/powerpoint/2010/main" val="2904816320"/>
+      </p:ext>
+    </p:extLst>
+  </p:cSld>
+  <p:clrMapOvr>
+    <a:masterClrMapping/>
+  </p:clrMapOvr>
+</p:sld>
+</file>
+
+<file path=ppt/slides/slide11.xml><?xml version="1.0" encoding="utf-8"?>
+<p:sld xmlns:a="http://schemas.openxmlformats.org/drawingml/2006/main" xmlns:r="http://schemas.openxmlformats.org/officeDocument/2006/relationships" xmlns:p="http://schemas.openxmlformats.org/presentationml/2006/main">
+  <p:cSld>
+    <p:bg>
+      <p:bgPr>
+        <a:solidFill>
+          <a:schemeClr val="tx1"/>
+        </a:solidFill>
+        <a:effectLst/>
+      </p:bgPr>
+    </p:bg>
+    <p:spTree>
+      <p:nvGrpSpPr>
+        <p:cNvPr id="1" name=""/>
+        <p:cNvGrpSpPr/>
+        <p:nvPr/>
+      </p:nvGrpSpPr>
+      <p:grpSpPr>
+        <a:xfrm>
+          <a:off x="0" y="0"/>
+          <a:ext cx="0" cy="0"/>
+          <a:chOff x="0" y="0"/>
+          <a:chExt cx="0" cy="0"/>
+        </a:xfrm>
+      </p:grpSpPr>
+      <p:grpSp>
+        <p:nvGrpSpPr>
+          <p:cNvPr id="4" name="aGrouping" descr="Example of AWS Cloud group, represented as a rectangle with AWS logo at the top left, and AWS Cloud as a title.">
+            <a:extLst>
+              <a:ext uri="{FF2B5EF4-FFF2-40B4-BE49-F238E27FC236}">
+                <a16:creationId xmlns:a16="http://schemas.microsoft.com/office/drawing/2014/main" id="{61567C16-7274-4D13-AD53-504B84DFF26B}"/>
+              </a:ext>
+            </a:extLst>
+          </p:cNvPr>
+          <p:cNvGrpSpPr/>
+          <p:nvPr/>
+        </p:nvGrpSpPr>
+        <p:grpSpPr>
+          <a:xfrm>
+            <a:off x="1873575" y="831451"/>
+            <a:ext cx="6567106" cy="4504059"/>
+            <a:chOff x="1126114" y="1236252"/>
+            <a:chExt cx="1845487" cy="718165"/>
+          </a:xfrm>
+        </p:grpSpPr>
+        <p:sp>
+          <p:nvSpPr>
+            <p:cNvPr id="5" name="Rectangle 4">
+              <a:extLst>
+                <a:ext uri="{FF2B5EF4-FFF2-40B4-BE49-F238E27FC236}">
+                  <a16:creationId xmlns:a16="http://schemas.microsoft.com/office/drawing/2014/main" id="{9567CA43-52DD-A7AF-C246-5EF7AD6E2BC1}"/>
+                </a:ext>
+              </a:extLst>
+            </p:cNvPr>
+            <p:cNvSpPr/>
+            <p:nvPr/>
+          </p:nvSpPr>
+          <p:spPr>
+            <a:xfrm>
+              <a:off x="1126926" y="1236252"/>
+              <a:ext cx="1844675" cy="718165"/>
+            </a:xfrm>
+            <a:prstGeom prst="rect">
+              <a:avLst/>
+            </a:prstGeom>
+            <a:noFill/>
+            <a:ln w="15875">
+              <a:solidFill>
+                <a:schemeClr val="bg1"/>
+              </a:solidFill>
+            </a:ln>
+          </p:spPr>
+          <p:style>
+            <a:lnRef idx="2">
+              <a:schemeClr val="accent1">
+                <a:shade val="50000"/>
+              </a:schemeClr>
+            </a:lnRef>
+            <a:fillRef idx="1">
+              <a:schemeClr val="accent1"/>
+            </a:fillRef>
+            <a:effectRef idx="0">
+              <a:schemeClr val="accent1"/>
+            </a:effectRef>
+            <a:fontRef idx="minor">
+              <a:schemeClr val="lt1"/>
+            </a:fontRef>
+          </p:style>
+          <p:txBody>
+            <a:bodyPr lIns="502920" tIns="91440"/>
+            <a:lstStyle/>
+            <a:p>
+              <a:pPr marL="0" marR="0" lvl="0" indent="0" algn="l" defTabSz="914400" rtl="0" eaLnBrk="1" fontAlgn="auto" latinLnBrk="0" hangingPunct="1">
+                <a:lnSpc>
+                  <a:spcPct val="100000"/>
+                </a:lnSpc>
+                <a:spcBef>
+                  <a:spcPts val="0"/>
+                </a:spcBef>
+                <a:spcAft>
+                  <a:spcPts val="0"/>
+                </a:spcAft>
+                <a:buClrTx/>
+                <a:buSzTx/>
+                <a:buFontTx/>
+                <a:buNone/>
+                <a:tabLst/>
+                <a:defRPr/>
+              </a:pPr>
+              <a:endParaRPr kumimoji="0" lang="en-US" sz="700" b="0" i="0" u="none" strike="noStrike" kern="1200" cap="none" spc="0" normalizeH="0" baseline="0" noProof="0" dirty="0">
+                <a:ln>
+                  <a:noFill/>
+                </a:ln>
+                <a:solidFill>
+                  <a:prstClr val="black"/>
+                </a:solidFill>
+                <a:effectLst/>
+                <a:uLnTx/>
+                <a:uFillTx/>
+                <a:latin typeface="Arial" panose="020B0604020202020204" pitchFamily="34" charset="0"/>
+                <a:ea typeface="+mn-ea"/>
+                <a:cs typeface="Arial" panose="020B0604020202020204" pitchFamily="34" charset="0"/>
+              </a:endParaRPr>
+            </a:p>
+          </p:txBody>
+        </p:sp>
+        <p:pic>
+          <p:nvPicPr>
+            <p:cNvPr id="6" name="Graphic 5">
+              <a:extLst>
+                <a:ext uri="{FF2B5EF4-FFF2-40B4-BE49-F238E27FC236}">
+                  <a16:creationId xmlns:a16="http://schemas.microsoft.com/office/drawing/2014/main" id="{016D9BF9-F262-2C96-A133-0A7278005EF2}"/>
+                </a:ext>
+                <a:ext uri="{C183D7F6-B498-43B3-948B-1728B52AA6E4}">
+                  <adec:decorative xmlns:adec="http://schemas.microsoft.com/office/drawing/2017/decorative" val="1"/>
+                </a:ext>
+              </a:extLst>
+            </p:cNvPr>
+            <p:cNvPicPr>
+              <a:picLocks noChangeAspect="1"/>
+            </p:cNvPicPr>
+            <p:nvPr/>
+          </p:nvPicPr>
+          <p:blipFill>
+            <a:blip>
+              <a:extLst>
+                <a:ext uri="{96DAC541-7B7A-43D3-8B79-37D633B846F1}">
+                  <asvg:svgBlip xmlns:asvg="http://schemas.microsoft.com/office/drawing/2016/SVG/main" r:embed="rId2"/>
+                </a:ext>
+              </a:extLst>
+            </a:blip>
+            <a:srcRect/>
+            <a:stretch/>
+          </p:blipFill>
+          <p:spPr>
+            <a:xfrm>
+              <a:off x="1126114" y="1237248"/>
+              <a:ext cx="85898" cy="53777"/>
+            </a:xfrm>
+            <a:prstGeom prst="rect">
+              <a:avLst/>
+            </a:prstGeom>
+          </p:spPr>
+        </p:pic>
+      </p:grpSp>
+      <p:grpSp>
+        <p:nvGrpSpPr>
+          <p:cNvPr id="7" name="AZGroup" descr="Group for availability zone, inside the AWS Cloud grouping.">
+            <a:extLst>
+              <a:ext uri="{FF2B5EF4-FFF2-40B4-BE49-F238E27FC236}">
+                <a16:creationId xmlns:a16="http://schemas.microsoft.com/office/drawing/2014/main" id="{DDDCD767-7EE5-2EF6-3C53-8177AD72E864}"/>
+              </a:ext>
+            </a:extLst>
+          </p:cNvPr>
+          <p:cNvGrpSpPr/>
+          <p:nvPr/>
+        </p:nvGrpSpPr>
+        <p:grpSpPr>
+          <a:xfrm>
+            <a:off x="2749960" y="919952"/>
+            <a:ext cx="5621460" cy="3635232"/>
+            <a:chOff x="4188315" y="1576361"/>
+            <a:chExt cx="5496603" cy="2349832"/>
+          </a:xfrm>
+        </p:grpSpPr>
+        <p:sp>
+          <p:nvSpPr>
+            <p:cNvPr id="8" name="Rectangle 7" descr="AZ group border">
+              <a:extLst>
+                <a:ext uri="{FF2B5EF4-FFF2-40B4-BE49-F238E27FC236}">
+                  <a16:creationId xmlns:a16="http://schemas.microsoft.com/office/drawing/2014/main" id="{587AE4C8-A897-101D-BD52-4FA421F8EE03}"/>
+                </a:ext>
+              </a:extLst>
+            </p:cNvPr>
+            <p:cNvSpPr/>
+            <p:nvPr/>
+          </p:nvSpPr>
+          <p:spPr>
+            <a:xfrm>
+              <a:off x="4188315" y="1576361"/>
+              <a:ext cx="5496603" cy="2349832"/>
+            </a:xfrm>
+            <a:prstGeom prst="rect">
+              <a:avLst/>
+            </a:prstGeom>
+            <a:noFill/>
+            <a:ln w="15875">
+              <a:solidFill>
+                <a:srgbClr val="00A4A6"/>
+              </a:solidFill>
+              <a:prstDash val="dash"/>
+            </a:ln>
+          </p:spPr>
+          <p:style>
+            <a:lnRef idx="2">
+              <a:schemeClr val="accent1">
+                <a:shade val="50000"/>
+              </a:schemeClr>
+            </a:lnRef>
+            <a:fillRef idx="1">
+              <a:schemeClr val="accent1"/>
+            </a:fillRef>
+            <a:effectRef idx="0">
+              <a:schemeClr val="accent1"/>
+            </a:effectRef>
+            <a:fontRef idx="minor">
+              <a:schemeClr val="lt1"/>
+            </a:fontRef>
+          </p:style>
+          <p:txBody>
+            <a:bodyPr tIns="91440"/>
+            <a:lstStyle/>
+            <a:p>
+              <a:pPr marL="0" marR="0" lvl="0" indent="0" algn="ctr" defTabSz="914400" rtl="0" eaLnBrk="1" fontAlgn="auto" latinLnBrk="0" hangingPunct="1">
+                <a:lnSpc>
+                  <a:spcPct val="100000"/>
+                </a:lnSpc>
+                <a:spcBef>
+                  <a:spcPts val="0"/>
+                </a:spcBef>
+                <a:spcAft>
+                  <a:spcPts val="0"/>
+                </a:spcAft>
+                <a:buClrTx/>
+                <a:buSzTx/>
+                <a:buFontTx/>
+                <a:buNone/>
+                <a:tabLst/>
+                <a:defRPr/>
+              </a:pPr>
+              <a:endParaRPr kumimoji="0" lang="en-US" sz="1200" b="0" i="0" u="none" strike="noStrike" kern="1200" cap="none" spc="0" normalizeH="0" baseline="0" noProof="0">
+                <a:ln>
+                  <a:noFill/>
+                </a:ln>
+                <a:solidFill>
+                  <a:srgbClr val="A5A5A5"/>
+                </a:solidFill>
+                <a:effectLst/>
+                <a:uLnTx/>
+                <a:uFillTx/>
+                <a:latin typeface="Calibri" panose="020F0502020204030204"/>
+                <a:ea typeface="+mn-ea"/>
+                <a:cs typeface="+mn-cs"/>
+              </a:endParaRPr>
+            </a:p>
+          </p:txBody>
+        </p:sp>
+        <p:sp>
+          <p:nvSpPr>
+            <p:cNvPr id="9" name="Rectangle 37">
+              <a:extLst>
+                <a:ext uri="{FF2B5EF4-FFF2-40B4-BE49-F238E27FC236}">
+                  <a16:creationId xmlns:a16="http://schemas.microsoft.com/office/drawing/2014/main" id="{BA6F1E90-6FAF-A0AC-9B75-FAECF6B70127}"/>
+                </a:ext>
+              </a:extLst>
+            </p:cNvPr>
+            <p:cNvSpPr>
+              <a:spLocks noChangeArrowheads="1"/>
+            </p:cNvSpPr>
+            <p:nvPr/>
+          </p:nvSpPr>
+          <p:spPr bwMode="auto">
+            <a:xfrm>
+              <a:off x="4328036" y="1576639"/>
+              <a:ext cx="591223" cy="156426"/>
+            </a:xfrm>
+            <a:prstGeom prst="rect">
+              <a:avLst/>
+            </a:prstGeom>
+            <a:noFill/>
+            <a:ln>
+              <a:noFill/>
+            </a:ln>
+            <a:extLst>
+              <a:ext uri="{909E8E84-426E-40DD-AFC4-6F175D3DCCD1}">
+                <a14:hiddenFill xmlns:a14="http://schemas.microsoft.com/office/drawing/2010/main">
+                  <a:solidFill>
+                    <a:srgbClr val="FFFFFF"/>
+                  </a:solidFill>
+                </a14:hiddenFill>
+              </a:ext>
+              <a:ext uri="{91240B29-F687-4F45-9708-019B960494DF}">
+                <a14:hiddenLine xmlns:a14="http://schemas.microsoft.com/office/drawing/2010/main" w="9525">
+                  <a:solidFill>
+                    <a:srgbClr val="000000"/>
+                  </a:solidFill>
+                  <a:miter lim="800000"/>
+                  <a:headEnd/>
+                  <a:tailEnd/>
+                </a14:hiddenLine>
+              </a:ext>
+            </a:extLst>
+          </p:spPr>
+          <p:txBody>
+            <a:bodyPr wrap="none">
+              <a:spAutoFit/>
+            </a:bodyPr>
+            <a:lstStyle>
+              <a:lvl1pPr>
+                <a:defRPr>
+                  <a:solidFill>
+                    <a:schemeClr val="tx1"/>
+                  </a:solidFill>
+                  <a:latin typeface="Calibri" panose="020F0502020204030204" pitchFamily="34" charset="0"/>
+                </a:defRPr>
+              </a:lvl1pPr>
+              <a:lvl2pPr marL="742950" indent="-285750">
+                <a:defRPr>
+                  <a:solidFill>
+                    <a:schemeClr val="tx1"/>
+                  </a:solidFill>
+                  <a:latin typeface="Calibri" panose="020F0502020204030204" pitchFamily="34" charset="0"/>
+                </a:defRPr>
+              </a:lvl2pPr>
+              <a:lvl3pPr marL="1143000" indent="-228600">
+                <a:defRPr>
+                  <a:solidFill>
+                    <a:schemeClr val="tx1"/>
+                  </a:solidFill>
+                  <a:latin typeface="Calibri" panose="020F0502020204030204" pitchFamily="34" charset="0"/>
+                </a:defRPr>
+              </a:lvl3pPr>
+              <a:lvl4pPr marL="1600200" indent="-228600">
+                <a:defRPr>
+                  <a:solidFill>
+                    <a:schemeClr val="tx1"/>
+                  </a:solidFill>
+                  <a:latin typeface="Calibri" panose="020F0502020204030204" pitchFamily="34" charset="0"/>
+                </a:defRPr>
+              </a:lvl4pPr>
+              <a:lvl5pPr marL="2057400" indent="-228600">
+                <a:defRPr>
+                  <a:solidFill>
+                    <a:schemeClr val="tx1"/>
+                  </a:solidFill>
+                  <a:latin typeface="Calibri" panose="020F0502020204030204" pitchFamily="34" charset="0"/>
+                </a:defRPr>
+              </a:lvl5pPr>
+              <a:lvl6pPr marL="2514600" indent="-228600" eaLnBrk="0" fontAlgn="base" hangingPunct="0">
+                <a:spcBef>
+                  <a:spcPct val="0"/>
+                </a:spcBef>
+                <a:spcAft>
+                  <a:spcPct val="0"/>
+                </a:spcAft>
+                <a:defRPr>
+                  <a:solidFill>
+                    <a:schemeClr val="tx1"/>
+                  </a:solidFill>
+                  <a:latin typeface="Calibri" panose="020F0502020204030204" pitchFamily="34" charset="0"/>
+                </a:defRPr>
+              </a:lvl6pPr>
+              <a:lvl7pPr marL="2971800" indent="-228600" eaLnBrk="0" fontAlgn="base" hangingPunct="0">
+                <a:spcBef>
+                  <a:spcPct val="0"/>
+                </a:spcBef>
+                <a:spcAft>
+                  <a:spcPct val="0"/>
+                </a:spcAft>
+                <a:defRPr>
+                  <a:solidFill>
+                    <a:schemeClr val="tx1"/>
+                  </a:solidFill>
+                  <a:latin typeface="Calibri" panose="020F0502020204030204" pitchFamily="34" charset="0"/>
+                </a:defRPr>
+              </a:lvl7pPr>
+              <a:lvl8pPr marL="3429000" indent="-228600" eaLnBrk="0" fontAlgn="base" hangingPunct="0">
+                <a:spcBef>
+                  <a:spcPct val="0"/>
+                </a:spcBef>
+                <a:spcAft>
+                  <a:spcPct val="0"/>
+                </a:spcAft>
+                <a:defRPr>
+                  <a:solidFill>
+                    <a:schemeClr val="tx1"/>
+                  </a:solidFill>
+                  <a:latin typeface="Calibri" panose="020F0502020204030204" pitchFamily="34" charset="0"/>
+                </a:defRPr>
+              </a:lvl8pPr>
+              <a:lvl9pPr marL="3886200" indent="-228600" eaLnBrk="0" fontAlgn="base" hangingPunct="0">
+                <a:spcBef>
+                  <a:spcPct val="0"/>
+                </a:spcBef>
+                <a:spcAft>
+                  <a:spcPct val="0"/>
+                </a:spcAft>
+                <a:defRPr>
+                  <a:solidFill>
+                    <a:schemeClr val="tx1"/>
+                  </a:solidFill>
+                  <a:latin typeface="Calibri" panose="020F0502020204030204" pitchFamily="34" charset="0"/>
+                </a:defRPr>
+              </a:lvl9pPr>
+            </a:lstStyle>
+            <a:p>
+              <a:pPr marL="0" marR="0" lvl="0" indent="0" algn="l" defTabSz="914400" rtl="0" eaLnBrk="1" fontAlgn="auto" latinLnBrk="0" hangingPunct="1">
+                <a:lnSpc>
+                  <a:spcPct val="100000"/>
+                </a:lnSpc>
+                <a:spcBef>
+                  <a:spcPts val="0"/>
+                </a:spcBef>
+                <a:spcAft>
+                  <a:spcPts val="0"/>
+                </a:spcAft>
+                <a:buClrTx/>
+                <a:buSzTx/>
+                <a:buFontTx/>
+                <a:buNone/>
+                <a:tabLst/>
+                <a:defRPr/>
+              </a:pPr>
+              <a:r>
+                <a:rPr kumimoji="0" lang="en-US" altLang="en-US" sz="700" b="1" i="0" u="none" strike="noStrike" kern="1200" cap="none" spc="0" normalizeH="0" baseline="0" noProof="0" dirty="0">
+                  <a:ln>
+                    <a:noFill/>
+                  </a:ln>
+                  <a:solidFill>
+                    <a:srgbClr val="00A4A6"/>
+                  </a:solidFill>
+                  <a:effectLst/>
+                  <a:uLnTx/>
+                  <a:uFillTx/>
+                  <a:latin typeface="Arial" panose="020B0604020202020204" pitchFamily="34" charset="0"/>
+                  <a:ea typeface="+mn-ea"/>
+                  <a:cs typeface="Arial" panose="020B0604020202020204" pitchFamily="34" charset="0"/>
+                </a:rPr>
+                <a:t>us-east-1 </a:t>
+              </a:r>
+            </a:p>
+          </p:txBody>
+        </p:sp>
+      </p:grpSp>
+      <p:pic>
+        <p:nvPicPr>
+          <p:cNvPr id="10" name="Graphic 9" descr="Region group icon.">
+            <a:extLst>
+              <a:ext uri="{FF2B5EF4-FFF2-40B4-BE49-F238E27FC236}">
+                <a16:creationId xmlns:a16="http://schemas.microsoft.com/office/drawing/2014/main" id="{7AAD2918-F301-2660-3E7A-691B0AFAA237}"/>
+              </a:ext>
+            </a:extLst>
+          </p:cNvPr>
+          <p:cNvPicPr>
+            <a:picLocks noChangeAspect="1"/>
+          </p:cNvPicPr>
+          <p:nvPr/>
+        </p:nvPicPr>
+        <p:blipFill>
+          <a:blip>
+            <a:extLst>
+              <a:ext uri="{96DAC541-7B7A-43D3-8B79-37D633B846F1}">
+                <asvg:svgBlip xmlns:asvg="http://schemas.microsoft.com/office/drawing/2016/SVG/main" r:embed="rId3"/>
+              </a:ext>
+            </a:extLst>
+          </a:blip>
+          <a:srcRect/>
+          <a:stretch/>
+        </p:blipFill>
+        <p:spPr>
+          <a:xfrm>
+            <a:off x="2759516" y="915579"/>
+            <a:ext cx="181666" cy="181666"/>
+          </a:xfrm>
+          <a:prstGeom prst="rect">
+            <a:avLst/>
+          </a:prstGeom>
+        </p:spPr>
+      </p:pic>
+      <p:sp>
+        <p:nvSpPr>
+          <p:cNvPr id="11" name="Rectangle 10">
+            <a:extLst>
+              <a:ext uri="{FF2B5EF4-FFF2-40B4-BE49-F238E27FC236}">
+                <a16:creationId xmlns:a16="http://schemas.microsoft.com/office/drawing/2014/main" id="{A484AB68-6BB5-069A-D4B6-EF05D871951A}"/>
+              </a:ext>
+              <a:ext uri="{C183D7F6-B498-43B3-948B-1728B52AA6E4}">
+                <adec:decorative xmlns:adec="http://schemas.microsoft.com/office/drawing/2017/decorative" val="1"/>
+              </a:ext>
+            </a:extLst>
+          </p:cNvPr>
+          <p:cNvSpPr/>
+          <p:nvPr/>
+        </p:nvSpPr>
+        <p:spPr bwMode="auto">
+          <a:xfrm>
+            <a:off x="3445587" y="1020727"/>
+            <a:ext cx="4751560" cy="3410142"/>
+          </a:xfrm>
+          <a:prstGeom prst="rect">
+            <a:avLst/>
+          </a:prstGeom>
+          <a:noFill/>
+          <a:ln w="15875">
+            <a:solidFill>
+              <a:srgbClr val="8C4FFF"/>
+            </a:solidFill>
+          </a:ln>
+        </p:spPr>
+        <p:style>
+          <a:lnRef idx="2">
+            <a:schemeClr val="accent1">
+              <a:shade val="50000"/>
+            </a:schemeClr>
+          </a:lnRef>
+          <a:fillRef idx="1">
+            <a:schemeClr val="accent1"/>
+          </a:fillRef>
+          <a:effectRef idx="0">
+            <a:schemeClr val="accent1"/>
+          </a:effectRef>
+          <a:fontRef idx="minor">
+            <a:schemeClr val="lt1"/>
+          </a:fontRef>
+        </p:style>
+        <p:txBody>
+          <a:bodyPr lIns="502920" tIns="91440"/>
+          <a:lstStyle/>
+          <a:p>
+            <a:pPr marL="0" marR="0" lvl="0" indent="0" algn="l" defTabSz="914400" rtl="0" eaLnBrk="1" fontAlgn="auto" latinLnBrk="0" hangingPunct="1">
+              <a:lnSpc>
+                <a:spcPct val="100000"/>
+              </a:lnSpc>
+              <a:spcBef>
+                <a:spcPts val="0"/>
+              </a:spcBef>
+              <a:spcAft>
+                <a:spcPts val="0"/>
+              </a:spcAft>
+              <a:buClrTx/>
+              <a:buSzTx/>
+              <a:buFontTx/>
+              <a:buNone/>
+              <a:tabLst/>
+              <a:defRPr/>
+            </a:pPr>
+            <a:endParaRPr kumimoji="0" lang="en-US" sz="900" b="0" i="0" u="none" strike="noStrike" kern="1200" cap="none" spc="0" normalizeH="0" baseline="0" noProof="0">
+              <a:ln w="0"/>
+              <a:solidFill>
+                <a:prstClr val="black"/>
+              </a:solidFill>
+              <a:effectLst/>
+              <a:uLnTx/>
+              <a:uFillTx/>
+              <a:latin typeface="Arial" panose="020B0604020202020204" pitchFamily="34" charset="0"/>
+              <a:ea typeface="+mn-ea"/>
+              <a:cs typeface="Arial" panose="020B0604020202020204" pitchFamily="34" charset="0"/>
+            </a:endParaRPr>
+          </a:p>
+        </p:txBody>
+      </p:sp>
+      <p:pic>
+        <p:nvPicPr>
+          <p:cNvPr id="12" name="Graphic 11" descr="VPC group icon.">
+            <a:extLst>
+              <a:ext uri="{FF2B5EF4-FFF2-40B4-BE49-F238E27FC236}">
+                <a16:creationId xmlns:a16="http://schemas.microsoft.com/office/drawing/2014/main" id="{34D4EEAC-ED93-68C5-B3D1-65ADEE3AFD1F}"/>
+              </a:ext>
+            </a:extLst>
+          </p:cNvPr>
+          <p:cNvPicPr>
+            <a:picLocks noChangeAspect="1"/>
+          </p:cNvPicPr>
+          <p:nvPr/>
+        </p:nvPicPr>
+        <p:blipFill>
+          <a:blip>
+            <a:extLst>
+              <a:ext uri="{96DAC541-7B7A-43D3-8B79-37D633B846F1}">
+                <asvg:svgBlip xmlns:asvg="http://schemas.microsoft.com/office/drawing/2016/SVG/main" r:embed="rId4"/>
+              </a:ext>
+            </a:extLst>
+          </a:blip>
+          <a:srcRect/>
+          <a:stretch/>
+        </p:blipFill>
+        <p:spPr>
+          <a:xfrm>
+            <a:off x="3449672" y="1028241"/>
+            <a:ext cx="159014" cy="159014"/>
+          </a:xfrm>
+          <a:prstGeom prst="rect">
+            <a:avLst/>
+          </a:prstGeom>
+        </p:spPr>
+      </p:pic>
+      <p:sp>
+        <p:nvSpPr>
+          <p:cNvPr id="13" name="Rectangle 37">
+            <a:extLst>
+              <a:ext uri="{FF2B5EF4-FFF2-40B4-BE49-F238E27FC236}">
+                <a16:creationId xmlns:a16="http://schemas.microsoft.com/office/drawing/2014/main" id="{98767A63-F76D-C4E4-5E95-F2599A2C4576}"/>
+              </a:ext>
+            </a:extLst>
+          </p:cNvPr>
+          <p:cNvSpPr>
+            <a:spLocks noChangeArrowheads="1"/>
+          </p:cNvSpPr>
+          <p:nvPr/>
+        </p:nvSpPr>
+        <p:spPr bwMode="auto">
+          <a:xfrm>
+            <a:off x="3548707" y="1008918"/>
+            <a:ext cx="367409" cy="200055"/>
+          </a:xfrm>
+          <a:prstGeom prst="rect">
+            <a:avLst/>
+          </a:prstGeom>
+          <a:noFill/>
+          <a:ln>
+            <a:noFill/>
+          </a:ln>
+          <a:extLst>
+            <a:ext uri="{909E8E84-426E-40DD-AFC4-6F175D3DCCD1}">
+              <a14:hiddenFill xmlns:a14="http://schemas.microsoft.com/office/drawing/2010/main">
+                <a:solidFill>
+                  <a:srgbClr val="FFFFFF"/>
+                </a:solidFill>
+              </a14:hiddenFill>
+            </a:ext>
+            <a:ext uri="{91240B29-F687-4F45-9708-019B960494DF}">
+              <a14:hiddenLine xmlns:a14="http://schemas.microsoft.com/office/drawing/2010/main" w="9525">
+                <a:solidFill>
+                  <a:srgbClr val="000000"/>
+                </a:solidFill>
+                <a:miter lim="800000"/>
+                <a:headEnd/>
+                <a:tailEnd/>
+              </a14:hiddenLine>
+            </a:ext>
+          </a:extLst>
+        </p:spPr>
+        <p:txBody>
+          <a:bodyPr wrap="none">
+            <a:spAutoFit/>
+          </a:bodyPr>
+          <a:lstStyle>
+            <a:lvl1pPr>
+              <a:defRPr>
+                <a:solidFill>
+                  <a:schemeClr val="tx1"/>
+                </a:solidFill>
+                <a:latin typeface="Calibri" panose="020F0502020204030204" pitchFamily="34" charset="0"/>
+              </a:defRPr>
+            </a:lvl1pPr>
+            <a:lvl2pPr marL="742950" indent="-285750">
+              <a:defRPr>
+                <a:solidFill>
+                  <a:schemeClr val="tx1"/>
+                </a:solidFill>
+                <a:latin typeface="Calibri" panose="020F0502020204030204" pitchFamily="34" charset="0"/>
+              </a:defRPr>
+            </a:lvl2pPr>
+            <a:lvl3pPr marL="1143000" indent="-228600">
+              <a:defRPr>
+                <a:solidFill>
+                  <a:schemeClr val="tx1"/>
+                </a:solidFill>
+                <a:latin typeface="Calibri" panose="020F0502020204030204" pitchFamily="34" charset="0"/>
+              </a:defRPr>
+            </a:lvl3pPr>
+            <a:lvl4pPr marL="1600200" indent="-228600">
+              <a:defRPr>
+                <a:solidFill>
+                  <a:schemeClr val="tx1"/>
+                </a:solidFill>
+                <a:latin typeface="Calibri" panose="020F0502020204030204" pitchFamily="34" charset="0"/>
+              </a:defRPr>
+            </a:lvl4pPr>
+            <a:lvl5pPr marL="2057400" indent="-228600">
+              <a:defRPr>
+                <a:solidFill>
+                  <a:schemeClr val="tx1"/>
+                </a:solidFill>
+                <a:latin typeface="Calibri" panose="020F0502020204030204" pitchFamily="34" charset="0"/>
+              </a:defRPr>
+            </a:lvl5pPr>
+            <a:lvl6pPr marL="2514600" indent="-228600" eaLnBrk="0" fontAlgn="base" hangingPunct="0">
+              <a:spcBef>
+                <a:spcPct val="0"/>
+              </a:spcBef>
+              <a:spcAft>
+                <a:spcPct val="0"/>
+              </a:spcAft>
+              <a:defRPr>
+                <a:solidFill>
+                  <a:schemeClr val="tx1"/>
+                </a:solidFill>
+                <a:latin typeface="Calibri" panose="020F0502020204030204" pitchFamily="34" charset="0"/>
+              </a:defRPr>
+            </a:lvl6pPr>
+            <a:lvl7pPr marL="2971800" indent="-228600" eaLnBrk="0" fontAlgn="base" hangingPunct="0">
+              <a:spcBef>
+                <a:spcPct val="0"/>
+              </a:spcBef>
+              <a:spcAft>
+                <a:spcPct val="0"/>
+              </a:spcAft>
+              <a:defRPr>
+                <a:solidFill>
+                  <a:schemeClr val="tx1"/>
+                </a:solidFill>
+                <a:latin typeface="Calibri" panose="020F0502020204030204" pitchFamily="34" charset="0"/>
+              </a:defRPr>
+            </a:lvl7pPr>
+            <a:lvl8pPr marL="3429000" indent="-228600" eaLnBrk="0" fontAlgn="base" hangingPunct="0">
+              <a:spcBef>
+                <a:spcPct val="0"/>
+              </a:spcBef>
+              <a:spcAft>
+                <a:spcPct val="0"/>
+              </a:spcAft>
+              <a:defRPr>
+                <a:solidFill>
+                  <a:schemeClr val="tx1"/>
+                </a:solidFill>
+                <a:latin typeface="Calibri" panose="020F0502020204030204" pitchFamily="34" charset="0"/>
+              </a:defRPr>
+            </a:lvl8pPr>
+            <a:lvl9pPr marL="3886200" indent="-228600" eaLnBrk="0" fontAlgn="base" hangingPunct="0">
+              <a:spcBef>
+                <a:spcPct val="0"/>
+              </a:spcBef>
+              <a:spcAft>
+                <a:spcPct val="0"/>
+              </a:spcAft>
+              <a:defRPr>
+                <a:solidFill>
+                  <a:schemeClr val="tx1"/>
+                </a:solidFill>
+                <a:latin typeface="Calibri" panose="020F0502020204030204" pitchFamily="34" charset="0"/>
+              </a:defRPr>
+            </a:lvl9pPr>
+          </a:lstStyle>
+          <a:p>
+            <a:pPr marL="0" marR="0" lvl="0" indent="0" algn="l" defTabSz="914400" rtl="0" eaLnBrk="1" fontAlgn="auto" latinLnBrk="0" hangingPunct="1">
+              <a:lnSpc>
+                <a:spcPct val="100000"/>
+              </a:lnSpc>
+              <a:spcBef>
+                <a:spcPts val="0"/>
+              </a:spcBef>
+              <a:spcAft>
+                <a:spcPts val="0"/>
+              </a:spcAft>
+              <a:buClrTx/>
+              <a:buSzTx/>
+              <a:buFontTx/>
+              <a:buNone/>
+              <a:tabLst/>
+              <a:defRPr/>
+            </a:pPr>
+            <a:r>
+              <a:rPr kumimoji="0" lang="en-US" altLang="en-US" sz="700" b="1" i="0" u="none" strike="noStrike" kern="1200" cap="none" spc="0" normalizeH="0" baseline="0" noProof="0" dirty="0">
+                <a:ln>
+                  <a:noFill/>
+                </a:ln>
+                <a:solidFill>
+                  <a:srgbClr val="8C4FFF"/>
+                </a:solidFill>
+                <a:effectLst/>
+                <a:uLnTx/>
+                <a:uFillTx/>
+                <a:latin typeface="Arial" panose="020B0604020202020204" pitchFamily="34" charset="0"/>
+                <a:ea typeface="+mn-ea"/>
+                <a:cs typeface="Arial" panose="020B0604020202020204" pitchFamily="34" charset="0"/>
+              </a:rPr>
+              <a:t>VPC</a:t>
+            </a:r>
+          </a:p>
+        </p:txBody>
+      </p:sp>
+      <p:cxnSp>
+        <p:nvCxnSpPr>
+          <p:cNvPr id="14" name="Straight Arrow Connector 13">
+            <a:extLst>
+              <a:ext uri="{FF2B5EF4-FFF2-40B4-BE49-F238E27FC236}">
+                <a16:creationId xmlns:a16="http://schemas.microsoft.com/office/drawing/2014/main" id="{257D1D52-085C-F883-2719-AD61FD633074}"/>
+              </a:ext>
+            </a:extLst>
+          </p:cNvPr>
+          <p:cNvCxnSpPr>
+            <a:cxnSpLocks/>
+            <a:stCxn id="29" idx="3"/>
+            <a:endCxn id="26" idx="1"/>
+          </p:cNvCxnSpPr>
+          <p:nvPr/>
+        </p:nvCxnSpPr>
+        <p:spPr>
+          <a:xfrm flipV="1">
+            <a:off x="3202073" y="3899331"/>
+            <a:ext cx="295531" cy="3124"/>
+          </a:xfrm>
+          <a:prstGeom prst="straightConnector1">
+            <a:avLst/>
+          </a:prstGeom>
+          <a:ln w="28575">
+            <a:solidFill>
+              <a:schemeClr val="accent1"/>
+            </a:solidFill>
+            <a:tailEnd type="triangle"/>
+          </a:ln>
+        </p:spPr>
+        <p:style>
+          <a:lnRef idx="1">
+            <a:schemeClr val="accent2"/>
+          </a:lnRef>
+          <a:fillRef idx="0">
+            <a:schemeClr val="accent2"/>
+          </a:fillRef>
+          <a:effectRef idx="0">
+            <a:schemeClr val="accent2"/>
+          </a:effectRef>
+          <a:fontRef idx="minor">
+            <a:schemeClr val="tx1"/>
+          </a:fontRef>
+        </p:style>
+      </p:cxnSp>
+      <p:cxnSp>
+        <p:nvCxnSpPr>
+          <p:cNvPr id="15" name="Straight Arrow Connector 14">
+            <a:extLst>
+              <a:ext uri="{FF2B5EF4-FFF2-40B4-BE49-F238E27FC236}">
+                <a16:creationId xmlns:a16="http://schemas.microsoft.com/office/drawing/2014/main" id="{DC4027A9-9A7F-8957-5FEE-89C8A15F36C9}"/>
+              </a:ext>
+            </a:extLst>
+          </p:cNvPr>
+          <p:cNvCxnSpPr>
+            <a:cxnSpLocks/>
+            <a:stCxn id="26" idx="3"/>
+            <a:endCxn id="68" idx="1"/>
+          </p:cNvCxnSpPr>
+          <p:nvPr/>
+        </p:nvCxnSpPr>
+        <p:spPr>
+          <a:xfrm flipV="1">
+            <a:off x="3771924" y="3891145"/>
+            <a:ext cx="864209" cy="8186"/>
+          </a:xfrm>
+          <a:prstGeom prst="straightConnector1">
+            <a:avLst/>
+          </a:prstGeom>
+          <a:ln w="28575">
+            <a:solidFill>
+              <a:schemeClr val="accent1"/>
+            </a:solidFill>
+            <a:tailEnd type="triangle"/>
+          </a:ln>
+        </p:spPr>
+        <p:style>
+          <a:lnRef idx="1">
+            <a:schemeClr val="accent2"/>
+          </a:lnRef>
+          <a:fillRef idx="0">
+            <a:schemeClr val="accent2"/>
+          </a:fillRef>
+          <a:effectRef idx="0">
+            <a:schemeClr val="accent2"/>
+          </a:effectRef>
+          <a:fontRef idx="minor">
+            <a:schemeClr val="tx1"/>
+          </a:fontRef>
+        </p:style>
+      </p:cxnSp>
+      <p:sp>
+        <p:nvSpPr>
+          <p:cNvPr id="17" name="TextBox 16">
+            <a:extLst>
+              <a:ext uri="{FF2B5EF4-FFF2-40B4-BE49-F238E27FC236}">
+                <a16:creationId xmlns:a16="http://schemas.microsoft.com/office/drawing/2014/main" id="{979590DE-189C-3407-85E1-C942BA756FC3}"/>
+              </a:ext>
+            </a:extLst>
+          </p:cNvPr>
+          <p:cNvSpPr txBox="1"/>
+          <p:nvPr/>
+        </p:nvSpPr>
+        <p:spPr>
+          <a:xfrm>
+            <a:off x="558538" y="3932828"/>
+            <a:ext cx="729687" cy="400110"/>
+          </a:xfrm>
+          <a:prstGeom prst="rect">
+            <a:avLst/>
+          </a:prstGeom>
+          <a:noFill/>
+        </p:spPr>
+        <p:txBody>
+          <a:bodyPr wrap="none" rtlCol="0">
+            <a:spAutoFit/>
+          </a:bodyPr>
+          <a:lstStyle/>
+          <a:p>
+            <a:pPr marL="0" marR="0" lvl="0" indent="0" algn="ctr" defTabSz="914400" rtl="0" eaLnBrk="1" fontAlgn="auto" latinLnBrk="0" hangingPunct="1">
+              <a:lnSpc>
+                <a:spcPct val="100000"/>
+              </a:lnSpc>
+              <a:spcBef>
+                <a:spcPts val="0"/>
+              </a:spcBef>
+              <a:spcAft>
+                <a:spcPts val="0"/>
+              </a:spcAft>
+              <a:buClrTx/>
+              <a:buSzTx/>
+              <a:buFontTx/>
+              <a:buNone/>
+              <a:tabLst/>
+              <a:defRPr/>
+            </a:pPr>
+            <a:r>
+              <a:rPr kumimoji="0" lang="en-US" sz="1000" b="1" i="0" u="none" strike="noStrike" kern="1200" cap="none" spc="0" normalizeH="0" baseline="0" noProof="0" dirty="0">
+                <a:ln>
+                  <a:noFill/>
+                </a:ln>
+                <a:solidFill>
+                  <a:schemeClr val="bg1"/>
+                </a:solidFill>
+                <a:effectLst/>
+                <a:uLnTx/>
+                <a:uFillTx/>
+                <a:latin typeface="Aptos" panose="02110004020202020204"/>
+                <a:ea typeface="+mn-ea"/>
+                <a:cs typeface="+mn-cs"/>
+              </a:rPr>
+              <a:t>HTTP API </a:t>
+            </a:r>
+          </a:p>
+          <a:p>
+            <a:pPr marL="0" marR="0" lvl="0" indent="0" algn="ctr" defTabSz="914400" rtl="0" eaLnBrk="1" fontAlgn="auto" latinLnBrk="0" hangingPunct="1">
+              <a:lnSpc>
+                <a:spcPct val="100000"/>
+              </a:lnSpc>
+              <a:spcBef>
+                <a:spcPts val="0"/>
+              </a:spcBef>
+              <a:spcAft>
+                <a:spcPts val="0"/>
+              </a:spcAft>
+              <a:buClrTx/>
+              <a:buSzTx/>
+              <a:buFontTx/>
+              <a:buNone/>
+              <a:tabLst/>
+              <a:defRPr/>
+            </a:pPr>
+            <a:r>
+              <a:rPr kumimoji="0" lang="en-US" sz="1000" b="1" i="0" u="none" strike="noStrike" kern="1200" cap="none" spc="0" normalizeH="0" baseline="0" noProof="0" dirty="0">
+                <a:ln>
+                  <a:noFill/>
+                </a:ln>
+                <a:solidFill>
+                  <a:schemeClr val="bg1"/>
+                </a:solidFill>
+                <a:effectLst/>
+                <a:uLnTx/>
+                <a:uFillTx/>
+                <a:latin typeface="Aptos" panose="02110004020202020204"/>
+                <a:ea typeface="+mn-ea"/>
+                <a:cs typeface="+mn-cs"/>
+              </a:rPr>
+              <a:t>Traffic</a:t>
+            </a:r>
+          </a:p>
+        </p:txBody>
+      </p:sp>
+      <p:cxnSp>
+        <p:nvCxnSpPr>
+          <p:cNvPr id="18" name="Straight Arrow Connector 17">
+            <a:extLst>
+              <a:ext uri="{FF2B5EF4-FFF2-40B4-BE49-F238E27FC236}">
+                <a16:creationId xmlns:a16="http://schemas.microsoft.com/office/drawing/2014/main" id="{BB0A0E34-D8ED-9A50-781E-B0F9FEA86059}"/>
+              </a:ext>
+            </a:extLst>
+          </p:cNvPr>
+          <p:cNvCxnSpPr>
+            <a:cxnSpLocks/>
+            <a:stCxn id="23" idx="3"/>
+            <a:endCxn id="21" idx="1"/>
+          </p:cNvCxnSpPr>
+          <p:nvPr/>
+        </p:nvCxnSpPr>
+        <p:spPr>
+          <a:xfrm flipV="1">
+            <a:off x="1289427" y="4854173"/>
+            <a:ext cx="865888" cy="13729"/>
+          </a:xfrm>
+          <a:prstGeom prst="straightConnector1">
+            <a:avLst/>
+          </a:prstGeom>
+          <a:ln>
+            <a:tailEnd type="triangle"/>
+          </a:ln>
+        </p:spPr>
+        <p:style>
+          <a:lnRef idx="2">
+            <a:schemeClr val="accent2"/>
+          </a:lnRef>
+          <a:fillRef idx="0">
+            <a:schemeClr val="accent2"/>
+          </a:fillRef>
+          <a:effectRef idx="1">
+            <a:schemeClr val="accent2"/>
+          </a:effectRef>
+          <a:fontRef idx="minor">
+            <a:schemeClr val="tx1"/>
+          </a:fontRef>
+        </p:style>
+      </p:cxnSp>
+      <p:grpSp>
+        <p:nvGrpSpPr>
+          <p:cNvPr id="19" name="Group 18">
+            <a:extLst>
+              <a:ext uri="{FF2B5EF4-FFF2-40B4-BE49-F238E27FC236}">
+                <a16:creationId xmlns:a16="http://schemas.microsoft.com/office/drawing/2014/main" id="{ED39C901-2B9C-C1EF-5645-E1526255320F}"/>
+              </a:ext>
+            </a:extLst>
+          </p:cNvPr>
+          <p:cNvGrpSpPr/>
+          <p:nvPr/>
+        </p:nvGrpSpPr>
+        <p:grpSpPr>
+          <a:xfrm>
+            <a:off x="2114065" y="4404685"/>
+            <a:ext cx="330849" cy="637914"/>
+            <a:chOff x="2021255" y="5606297"/>
+            <a:chExt cx="330849" cy="637914"/>
+          </a:xfrm>
+        </p:grpSpPr>
+        <p:pic>
+          <p:nvPicPr>
+            <p:cNvPr id="20" name="Graphic 8" descr="AWS WAF service icon.">
+              <a:extLst>
+                <a:ext uri="{FF2B5EF4-FFF2-40B4-BE49-F238E27FC236}">
+                  <a16:creationId xmlns:a16="http://schemas.microsoft.com/office/drawing/2014/main" id="{6A3CA96B-B516-820A-4324-4D3ECB9F90E3}"/>
+                </a:ext>
+              </a:extLst>
+            </p:cNvPr>
+            <p:cNvPicPr>
+              <a:picLocks noChangeAspect="1" noChangeArrowheads="1"/>
+            </p:cNvPicPr>
+            <p:nvPr/>
+          </p:nvPicPr>
+          <p:blipFill>
+            <a:blip>
+              <a:extLst>
+                <a:ext uri="{96DAC541-7B7A-43D3-8B79-37D633B846F1}">
+                  <asvg:svgBlip xmlns:asvg="http://schemas.microsoft.com/office/drawing/2016/SVG/main" r:embed="rId5"/>
+                </a:ext>
+              </a:extLst>
+            </a:blip>
+            <a:srcRect/>
+            <a:stretch/>
+          </p:blipFill>
+          <p:spPr bwMode="auto">
+            <a:xfrm>
+              <a:off x="2061331" y="5633576"/>
+              <a:ext cx="274320" cy="274320"/>
+            </a:xfrm>
+            <a:prstGeom prst="rect">
+              <a:avLst/>
+            </a:prstGeom>
+            <a:noFill/>
+            <a:ln>
+              <a:noFill/>
+            </a:ln>
+            <a:extLst>
+              <a:ext uri="{909E8E84-426E-40DD-AFC4-6F175D3DCCD1}">
+                <a14:hiddenFill xmlns:a14="http://schemas.microsoft.com/office/drawing/2010/main">
+                  <a:solidFill>
+                    <a:srgbClr val="FFFFFF"/>
+                  </a:solidFill>
+                </a14:hiddenFill>
+              </a:ext>
+              <a:ext uri="{91240B29-F687-4F45-9708-019B960494DF}">
+                <a14:hiddenLine xmlns:a14="http://schemas.microsoft.com/office/drawing/2010/main" w="9525">
+                  <a:solidFill>
+                    <a:srgbClr val="000000"/>
+                  </a:solidFill>
+                  <a:miter lim="800000"/>
+                  <a:headEnd/>
+                  <a:tailEnd/>
+                </a14:hiddenLine>
+              </a:ext>
+            </a:extLst>
+          </p:spPr>
+        </p:pic>
+        <p:pic>
+          <p:nvPicPr>
+            <p:cNvPr id="21" name="Graphic 19" descr="Amazon CloudFront service icon.">
+              <a:extLst>
+                <a:ext uri="{FF2B5EF4-FFF2-40B4-BE49-F238E27FC236}">
+                  <a16:creationId xmlns:a16="http://schemas.microsoft.com/office/drawing/2014/main" id="{F135F3F4-8FAD-FCC7-0E9D-ADAC7B9A7ED7}"/>
+                </a:ext>
+              </a:extLst>
+            </p:cNvPr>
+            <p:cNvPicPr>
+              <a:picLocks noChangeAspect="1" noChangeArrowheads="1"/>
+            </p:cNvPicPr>
+            <p:nvPr/>
+          </p:nvPicPr>
+          <p:blipFill>
+            <a:blip>
+              <a:extLst>
+                <a:ext uri="{96DAC541-7B7A-43D3-8B79-37D633B846F1}">
+                  <asvg:svgBlip xmlns:asvg="http://schemas.microsoft.com/office/drawing/2016/SVG/main" r:embed="rId6"/>
+                </a:ext>
+              </a:extLst>
+            </a:blip>
+            <a:srcRect/>
+            <a:stretch/>
+          </p:blipFill>
+          <p:spPr bwMode="auto">
+            <a:xfrm>
+              <a:off x="2062505" y="5918625"/>
+              <a:ext cx="274320" cy="274320"/>
+            </a:xfrm>
+            <a:prstGeom prst="rect">
+              <a:avLst/>
+            </a:prstGeom>
+            <a:noFill/>
+            <a:ln>
+              <a:noFill/>
+            </a:ln>
+            <a:extLst>
+              <a:ext uri="{909E8E84-426E-40DD-AFC4-6F175D3DCCD1}">
+                <a14:hiddenFill xmlns:a14="http://schemas.microsoft.com/office/drawing/2010/main">
+                  <a:solidFill>
+                    <a:srgbClr val="FFFFFF"/>
+                  </a:solidFill>
+                </a14:hiddenFill>
+              </a:ext>
+              <a:ext uri="{91240B29-F687-4F45-9708-019B960494DF}">
+                <a14:hiddenLine xmlns:a14="http://schemas.microsoft.com/office/drawing/2010/main" w="9525">
+                  <a:solidFill>
+                    <a:srgbClr val="000000"/>
+                  </a:solidFill>
+                  <a:miter lim="800000"/>
+                  <a:headEnd/>
+                  <a:tailEnd/>
+                </a14:hiddenLine>
+              </a:ext>
+            </a:extLst>
+          </p:spPr>
+        </p:pic>
+        <p:sp>
+          <p:nvSpPr>
+            <p:cNvPr id="22" name="Rectangle 21" descr="Availability Zone group.">
+              <a:extLst>
+                <a:ext uri="{FF2B5EF4-FFF2-40B4-BE49-F238E27FC236}">
+                  <a16:creationId xmlns:a16="http://schemas.microsoft.com/office/drawing/2014/main" id="{C2B92891-DF67-A296-3F47-1BD5D08D61FC}"/>
+                </a:ext>
+              </a:extLst>
+            </p:cNvPr>
+            <p:cNvSpPr/>
+            <p:nvPr/>
+          </p:nvSpPr>
+          <p:spPr>
+            <a:xfrm>
+              <a:off x="2021255" y="5606297"/>
+              <a:ext cx="330849" cy="637914"/>
+            </a:xfrm>
+            <a:prstGeom prst="rect">
+              <a:avLst/>
+            </a:prstGeom>
+            <a:noFill/>
+            <a:ln w="15875" cap="flat" cmpd="sng" algn="ctr">
+              <a:solidFill>
+                <a:schemeClr val="tx1"/>
+              </a:solidFill>
+              <a:prstDash val="dash"/>
+              <a:miter lim="800000"/>
+            </a:ln>
+            <a:effectLst/>
+          </p:spPr>
+          <p:txBody>
+            <a:bodyPr tIns="91440"/>
+            <a:lstStyle/>
+            <a:p>
+              <a:pPr marL="0" marR="0" lvl="0" indent="0" algn="ctr" defTabSz="914400" rtl="0" eaLnBrk="1" fontAlgn="auto" latinLnBrk="0" hangingPunct="1">
+                <a:lnSpc>
+                  <a:spcPct val="100000"/>
+                </a:lnSpc>
+                <a:spcBef>
+                  <a:spcPts val="0"/>
+                </a:spcBef>
+                <a:spcAft>
+                  <a:spcPts val="0"/>
+                </a:spcAft>
+                <a:buClrTx/>
+                <a:buSzTx/>
+                <a:buFontTx/>
+                <a:buNone/>
+                <a:tabLst/>
+                <a:defRPr/>
+              </a:pPr>
+              <a:endParaRPr kumimoji="0" lang="en-US" sz="1200" b="0" i="0" u="none" strike="noStrike" kern="0" cap="none" spc="0" normalizeH="0" baseline="0" noProof="0">
+                <a:ln>
+                  <a:noFill/>
+                </a:ln>
+                <a:solidFill>
+                  <a:srgbClr val="FFFFFF"/>
+                </a:solidFill>
+                <a:effectLst/>
+                <a:uLnTx/>
+                <a:uFillTx/>
+                <a:latin typeface="Arial" panose="020B0604020202020204" pitchFamily="34" charset="0"/>
+                <a:ea typeface="+mn-ea"/>
+                <a:cs typeface="Arial" panose="020B0604020202020204" pitchFamily="34" charset="0"/>
+              </a:endParaRPr>
+            </a:p>
+          </p:txBody>
+        </p:sp>
+      </p:grpSp>
+      <p:sp>
+        <p:nvSpPr>
+          <p:cNvPr id="23" name="TextBox 22">
+            <a:extLst>
+              <a:ext uri="{FF2B5EF4-FFF2-40B4-BE49-F238E27FC236}">
+                <a16:creationId xmlns:a16="http://schemas.microsoft.com/office/drawing/2014/main" id="{A4E94B1A-468E-278E-192A-54E9A8086DFF}"/>
+              </a:ext>
+            </a:extLst>
+          </p:cNvPr>
+          <p:cNvSpPr txBox="1"/>
+          <p:nvPr/>
+        </p:nvSpPr>
+        <p:spPr>
+          <a:xfrm>
+            <a:off x="553328" y="4667847"/>
+            <a:ext cx="736099" cy="400110"/>
+          </a:xfrm>
+          <a:prstGeom prst="rect">
+            <a:avLst/>
+          </a:prstGeom>
+          <a:noFill/>
+        </p:spPr>
+        <p:txBody>
+          <a:bodyPr wrap="none" rtlCol="0">
+            <a:spAutoFit/>
+          </a:bodyPr>
+          <a:lstStyle/>
+          <a:p>
+            <a:pPr marL="0" marR="0" lvl="0" indent="0" algn="ctr" defTabSz="914400" rtl="0" eaLnBrk="1" fontAlgn="auto" latinLnBrk="0" hangingPunct="1">
+              <a:lnSpc>
+                <a:spcPct val="100000"/>
+              </a:lnSpc>
+              <a:spcBef>
+                <a:spcPts val="0"/>
+              </a:spcBef>
+              <a:spcAft>
+                <a:spcPts val="0"/>
+              </a:spcAft>
+              <a:buClrTx/>
+              <a:buSzTx/>
+              <a:buFontTx/>
+              <a:buNone/>
+              <a:tabLst/>
+              <a:defRPr/>
+            </a:pPr>
+            <a:r>
+              <a:rPr kumimoji="0" lang="en-US" sz="1000" b="1" i="0" u="none" strike="noStrike" kern="1200" cap="none" spc="0" normalizeH="0" baseline="0" noProof="0" dirty="0">
+                <a:ln>
+                  <a:noFill/>
+                </a:ln>
+                <a:solidFill>
+                  <a:schemeClr val="bg1"/>
+                </a:solidFill>
+                <a:effectLst/>
+                <a:uLnTx/>
+                <a:uFillTx/>
+                <a:latin typeface="Aptos" panose="02110004020202020204"/>
+                <a:ea typeface="+mn-ea"/>
+                <a:cs typeface="+mn-cs"/>
+              </a:rPr>
+              <a:t>SPA Web </a:t>
+            </a:r>
+          </a:p>
+          <a:p>
+            <a:pPr marL="0" marR="0" lvl="0" indent="0" algn="ctr" defTabSz="914400" rtl="0" eaLnBrk="1" fontAlgn="auto" latinLnBrk="0" hangingPunct="1">
+              <a:lnSpc>
+                <a:spcPct val="100000"/>
+              </a:lnSpc>
+              <a:spcBef>
+                <a:spcPts val="0"/>
+              </a:spcBef>
+              <a:spcAft>
+                <a:spcPts val="0"/>
+              </a:spcAft>
+              <a:buClrTx/>
+              <a:buSzTx/>
+              <a:buFontTx/>
+              <a:buNone/>
+              <a:tabLst/>
+              <a:defRPr/>
+            </a:pPr>
+            <a:r>
+              <a:rPr kumimoji="0" lang="en-US" sz="1000" b="1" i="0" u="none" strike="noStrike" kern="1200" cap="none" spc="0" normalizeH="0" baseline="0" noProof="0" dirty="0">
+                <a:ln>
+                  <a:noFill/>
+                </a:ln>
+                <a:solidFill>
+                  <a:schemeClr val="bg1"/>
+                </a:solidFill>
+                <a:effectLst/>
+                <a:uLnTx/>
+                <a:uFillTx/>
+                <a:latin typeface="Aptos" panose="02110004020202020204"/>
+                <a:ea typeface="+mn-ea"/>
+                <a:cs typeface="+mn-cs"/>
+              </a:rPr>
+              <a:t>Traffic</a:t>
+            </a:r>
+          </a:p>
+        </p:txBody>
+      </p:sp>
+      <p:pic>
+        <p:nvPicPr>
+          <p:cNvPr id="24" name="Graphic 8" descr="Amazon Simple Storage Service (Amazon S3) service icon.">
+            <a:extLst>
+              <a:ext uri="{FF2B5EF4-FFF2-40B4-BE49-F238E27FC236}">
+                <a16:creationId xmlns:a16="http://schemas.microsoft.com/office/drawing/2014/main" id="{F9155B1B-4C06-7A36-249B-C360BADAC322}"/>
+              </a:ext>
+            </a:extLst>
+          </p:cNvPr>
+          <p:cNvPicPr>
+            <a:picLocks noChangeAspect="1" noChangeArrowheads="1"/>
+          </p:cNvPicPr>
+          <p:nvPr/>
+        </p:nvPicPr>
+        <p:blipFill>
+          <a:blip>
+            <a:extLst>
+              <a:ext uri="{96DAC541-7B7A-43D3-8B79-37D633B846F1}">
+                <asvg:svgBlip xmlns:asvg="http://schemas.microsoft.com/office/drawing/2016/SVG/main" r:embed="rId7"/>
+              </a:ext>
+            </a:extLst>
+          </a:blip>
+          <a:srcRect/>
+          <a:stretch/>
+        </p:blipFill>
+        <p:spPr bwMode="auto">
+          <a:xfrm>
+            <a:off x="3043974" y="4718104"/>
+            <a:ext cx="274320" cy="274320"/>
+          </a:xfrm>
+          <a:prstGeom prst="rect">
+            <a:avLst/>
+          </a:prstGeom>
+          <a:noFill/>
+          <a:ln>
+            <a:noFill/>
+          </a:ln>
+          <a:extLst>
+            <a:ext uri="{909E8E84-426E-40DD-AFC4-6F175D3DCCD1}">
+              <a14:hiddenFill xmlns:a14="http://schemas.microsoft.com/office/drawing/2010/main">
+                <a:solidFill>
+                  <a:srgbClr val="FFFFFF"/>
+                </a:solidFill>
+              </a14:hiddenFill>
+            </a:ext>
+            <a:ext uri="{91240B29-F687-4F45-9708-019B960494DF}">
+              <a14:hiddenLine xmlns:a14="http://schemas.microsoft.com/office/drawing/2010/main" w="9525">
+                <a:solidFill>
+                  <a:srgbClr val="000000"/>
+                </a:solidFill>
+                <a:miter lim="800000"/>
+                <a:headEnd/>
+                <a:tailEnd/>
+              </a14:hiddenLine>
+            </a:ext>
+          </a:extLst>
+        </p:spPr>
+      </p:pic>
+      <p:cxnSp>
+        <p:nvCxnSpPr>
+          <p:cNvPr id="25" name="Connector: Elbow 24">
+            <a:extLst>
+              <a:ext uri="{FF2B5EF4-FFF2-40B4-BE49-F238E27FC236}">
+                <a16:creationId xmlns:a16="http://schemas.microsoft.com/office/drawing/2014/main" id="{27089E16-E5DB-5059-A819-D917934D8077}"/>
+              </a:ext>
+            </a:extLst>
+          </p:cNvPr>
+          <p:cNvCxnSpPr>
+            <a:cxnSpLocks/>
+            <a:stCxn id="21" idx="3"/>
+            <a:endCxn id="24" idx="1"/>
+          </p:cNvCxnSpPr>
+          <p:nvPr/>
+        </p:nvCxnSpPr>
+        <p:spPr>
+          <a:xfrm>
+            <a:off x="2429635" y="4854173"/>
+            <a:ext cx="614339" cy="1091"/>
+          </a:xfrm>
+          <a:prstGeom prst="bentConnector3">
+            <a:avLst>
+              <a:gd name="adj1" fmla="val 50000"/>
+            </a:avLst>
+          </a:prstGeom>
+          <a:ln>
+            <a:headEnd type="triangle" w="med" len="med"/>
+            <a:tailEnd type="none" w="med" len="med"/>
+          </a:ln>
+        </p:spPr>
+        <p:style>
+          <a:lnRef idx="2">
+            <a:schemeClr val="accent2"/>
+          </a:lnRef>
+          <a:fillRef idx="0">
+            <a:schemeClr val="accent2"/>
+          </a:fillRef>
+          <a:effectRef idx="1">
+            <a:schemeClr val="accent2"/>
+          </a:effectRef>
+          <a:fontRef idx="minor">
+            <a:schemeClr val="tx1"/>
+          </a:fontRef>
+        </p:style>
+      </p:cxnSp>
+      <p:pic>
+        <p:nvPicPr>
+          <p:cNvPr id="26" name="Graphic 25" descr="Endpoints resource icon for the Amazon VPC service.&#10;">
+            <a:extLst>
+              <a:ext uri="{FF2B5EF4-FFF2-40B4-BE49-F238E27FC236}">
+                <a16:creationId xmlns:a16="http://schemas.microsoft.com/office/drawing/2014/main" id="{7230F14D-4298-5253-1609-D619BB4D6E6C}"/>
+              </a:ext>
+            </a:extLst>
+          </p:cNvPr>
+          <p:cNvPicPr>
+            <a:picLocks noChangeAspect="1"/>
+          </p:cNvPicPr>
+          <p:nvPr/>
+        </p:nvPicPr>
+        <p:blipFill>
+          <a:blip>
+            <a:extLst>
+              <a:ext uri="{96DAC541-7B7A-43D3-8B79-37D633B846F1}">
+                <asvg:svgBlip xmlns:asvg="http://schemas.microsoft.com/office/drawing/2016/SVG/main" r:embed="rId8"/>
+              </a:ext>
+            </a:extLst>
+          </a:blip>
+          <a:stretch>
+            <a:fillRect/>
+          </a:stretch>
+        </p:blipFill>
+        <p:spPr>
+          <a:xfrm>
+            <a:off x="3497604" y="3762171"/>
+            <a:ext cx="274320" cy="274320"/>
+          </a:xfrm>
+          <a:prstGeom prst="rect">
+            <a:avLst/>
+          </a:prstGeom>
+        </p:spPr>
+      </p:pic>
+      <p:pic>
+        <p:nvPicPr>
+          <p:cNvPr id="27" name="Graphic 21" descr="Amazon Route 53 service icon.">
+            <a:extLst>
+              <a:ext uri="{FF2B5EF4-FFF2-40B4-BE49-F238E27FC236}">
+                <a16:creationId xmlns:a16="http://schemas.microsoft.com/office/drawing/2014/main" id="{C49B01D7-DBE7-19D3-8E48-3D6D48980A2B}"/>
+              </a:ext>
+            </a:extLst>
+          </p:cNvPr>
+          <p:cNvPicPr>
+            <a:picLocks noChangeAspect="1" noChangeArrowheads="1"/>
+          </p:cNvPicPr>
+          <p:nvPr/>
+        </p:nvPicPr>
+        <p:blipFill>
+          <a:blip>
+            <a:extLst>
+              <a:ext uri="{96DAC541-7B7A-43D3-8B79-37D633B846F1}">
+                <asvg:svgBlip xmlns:asvg="http://schemas.microsoft.com/office/drawing/2016/SVG/main" r:embed="rId9"/>
+              </a:ext>
+            </a:extLst>
+          </a:blip>
+          <a:srcRect/>
+          <a:stretch/>
+        </p:blipFill>
+        <p:spPr bwMode="auto">
+          <a:xfrm>
+            <a:off x="2009336" y="1268423"/>
+            <a:ext cx="365760" cy="355772"/>
+          </a:xfrm>
+          <a:prstGeom prst="rect">
+            <a:avLst/>
+          </a:prstGeom>
+          <a:noFill/>
+          <a:ln>
+            <a:noFill/>
+          </a:ln>
+          <a:extLst>
+            <a:ext uri="{909E8E84-426E-40DD-AFC4-6F175D3DCCD1}">
+              <a14:hiddenFill xmlns:a14="http://schemas.microsoft.com/office/drawing/2010/main">
+                <a:solidFill>
+                  <a:srgbClr val="FFFFFF"/>
+                </a:solidFill>
+              </a14:hiddenFill>
+            </a:ext>
+            <a:ext uri="{91240B29-F687-4F45-9708-019B960494DF}">
+              <a14:hiddenLine xmlns:a14="http://schemas.microsoft.com/office/drawing/2010/main" w="9525">
+                <a:solidFill>
+                  <a:srgbClr val="000000"/>
+                </a:solidFill>
+                <a:miter lim="800000"/>
+                <a:headEnd/>
+                <a:tailEnd/>
+              </a14:hiddenLine>
+            </a:ext>
+          </a:extLst>
+        </p:spPr>
+      </p:pic>
+      <p:pic>
+        <p:nvPicPr>
+          <p:cNvPr id="29" name="Graphic 7" descr="Amazon API Gateway service icon.">
+            <a:extLst>
+              <a:ext uri="{FF2B5EF4-FFF2-40B4-BE49-F238E27FC236}">
+                <a16:creationId xmlns:a16="http://schemas.microsoft.com/office/drawing/2014/main" id="{4EC78354-9E12-4532-6178-709CDDB07FD9}"/>
+              </a:ext>
+            </a:extLst>
+          </p:cNvPr>
+          <p:cNvPicPr>
+            <a:picLocks noChangeAspect="1" noChangeArrowheads="1"/>
+          </p:cNvPicPr>
+          <p:nvPr/>
+        </p:nvPicPr>
+        <p:blipFill>
+          <a:blip>
+            <a:extLst>
+              <a:ext uri="{96DAC541-7B7A-43D3-8B79-37D633B846F1}">
+                <asvg:svgBlip xmlns:asvg="http://schemas.microsoft.com/office/drawing/2016/SVG/main" r:embed="rId10"/>
+              </a:ext>
+            </a:extLst>
+          </a:blip>
+          <a:srcRect/>
+          <a:stretch/>
+        </p:blipFill>
+        <p:spPr bwMode="auto">
+          <a:xfrm>
+            <a:off x="2927753" y="3765295"/>
+            <a:ext cx="274320" cy="274320"/>
+          </a:xfrm>
+          <a:prstGeom prst="rect">
+            <a:avLst/>
+          </a:prstGeom>
+          <a:noFill/>
+          <a:ln>
+            <a:noFill/>
+          </a:ln>
+          <a:extLst>
+            <a:ext uri="{909E8E84-426E-40DD-AFC4-6F175D3DCCD1}">
+              <a14:hiddenFill xmlns:a14="http://schemas.microsoft.com/office/drawing/2010/main">
+                <a:solidFill>
+                  <a:srgbClr val="FFFFFF"/>
+                </a:solidFill>
+              </a14:hiddenFill>
+            </a:ext>
+            <a:ext uri="{91240B29-F687-4F45-9708-019B960494DF}">
+              <a14:hiddenLine xmlns:a14="http://schemas.microsoft.com/office/drawing/2010/main" w="9525">
+                <a:solidFill>
+                  <a:srgbClr val="000000"/>
+                </a:solidFill>
+                <a:miter lim="800000"/>
+                <a:headEnd/>
+                <a:tailEnd/>
+              </a14:hiddenLine>
+            </a:ext>
+          </a:extLst>
+        </p:spPr>
+      </p:pic>
+      <p:cxnSp>
+        <p:nvCxnSpPr>
+          <p:cNvPr id="30" name="Connector: Elbow 29">
+            <a:extLst>
+              <a:ext uri="{FF2B5EF4-FFF2-40B4-BE49-F238E27FC236}">
+                <a16:creationId xmlns:a16="http://schemas.microsoft.com/office/drawing/2014/main" id="{C580CB80-1A39-DD19-B382-66E645D59E0D}"/>
+              </a:ext>
+            </a:extLst>
+          </p:cNvPr>
+          <p:cNvCxnSpPr>
+            <a:cxnSpLocks/>
+            <a:stCxn id="17" idx="3"/>
+            <a:endCxn id="29" idx="1"/>
+          </p:cNvCxnSpPr>
+          <p:nvPr/>
+        </p:nvCxnSpPr>
+        <p:spPr>
+          <a:xfrm flipV="1">
+            <a:off x="1288225" y="3902455"/>
+            <a:ext cx="1639528" cy="230428"/>
+          </a:xfrm>
+          <a:prstGeom prst="bentConnector3">
+            <a:avLst>
+              <a:gd name="adj1" fmla="val 50000"/>
+            </a:avLst>
+          </a:prstGeom>
+          <a:ln>
+            <a:solidFill>
+              <a:schemeClr val="accent1"/>
+            </a:solidFill>
+            <a:tailEnd type="triangle"/>
+          </a:ln>
+        </p:spPr>
+        <p:style>
+          <a:lnRef idx="2">
+            <a:schemeClr val="accent1"/>
+          </a:lnRef>
+          <a:fillRef idx="0">
+            <a:schemeClr val="accent1"/>
+          </a:fillRef>
+          <a:effectRef idx="1">
+            <a:schemeClr val="accent1"/>
+          </a:effectRef>
+          <a:fontRef idx="minor">
+            <a:schemeClr val="tx1"/>
+          </a:fontRef>
+        </p:style>
+      </p:cxnSp>
+      <p:grpSp>
+        <p:nvGrpSpPr>
+          <p:cNvPr id="31" name="Group 30">
+            <a:extLst>
+              <a:ext uri="{FF2B5EF4-FFF2-40B4-BE49-F238E27FC236}">
+                <a16:creationId xmlns:a16="http://schemas.microsoft.com/office/drawing/2014/main" id="{5CC65912-2510-78DF-9E7F-067E8EBFF46F}"/>
+              </a:ext>
+            </a:extLst>
+          </p:cNvPr>
+          <p:cNvGrpSpPr/>
+          <p:nvPr/>
+        </p:nvGrpSpPr>
+        <p:grpSpPr>
+          <a:xfrm>
+            <a:off x="85060" y="5603361"/>
+            <a:ext cx="3366258" cy="1193249"/>
+            <a:chOff x="85060" y="5603361"/>
+            <a:chExt cx="3366258" cy="1193249"/>
+          </a:xfrm>
+        </p:grpSpPr>
+        <p:sp>
+          <p:nvSpPr>
+            <p:cNvPr id="32" name="Rectangle 31">
+              <a:extLst>
+                <a:ext uri="{FF2B5EF4-FFF2-40B4-BE49-F238E27FC236}">
+                  <a16:creationId xmlns:a16="http://schemas.microsoft.com/office/drawing/2014/main" id="{68D9AA13-A0FE-4459-B429-7C0F266E3165}"/>
+                </a:ext>
+              </a:extLst>
+            </p:cNvPr>
+            <p:cNvSpPr/>
+            <p:nvPr/>
+          </p:nvSpPr>
+          <p:spPr>
+            <a:xfrm>
+              <a:off x="85060" y="5603361"/>
+              <a:ext cx="3153842" cy="1193249"/>
+            </a:xfrm>
+            <a:prstGeom prst="rect">
+              <a:avLst/>
+            </a:prstGeom>
+            <a:solidFill>
+              <a:schemeClr val="bg1"/>
+            </a:solidFill>
+          </p:spPr>
+          <p:style>
+            <a:lnRef idx="2">
+              <a:schemeClr val="accent1">
+                <a:shade val="15000"/>
+              </a:schemeClr>
+            </a:lnRef>
+            <a:fillRef idx="1">
+              <a:schemeClr val="accent1"/>
+            </a:fillRef>
+            <a:effectRef idx="0">
+              <a:schemeClr val="accent1"/>
+            </a:effectRef>
+            <a:fontRef idx="minor">
+              <a:schemeClr val="lt1"/>
+            </a:fontRef>
+          </p:style>
+          <p:txBody>
+            <a:bodyPr rtlCol="0" anchor="ctr"/>
+            <a:lstStyle/>
+            <a:p>
+              <a:pPr marL="0" marR="0" lvl="0" indent="0" algn="ctr" defTabSz="914400" rtl="0" eaLnBrk="1" fontAlgn="auto" latinLnBrk="0" hangingPunct="1">
+                <a:lnSpc>
+                  <a:spcPct val="100000"/>
+                </a:lnSpc>
+                <a:spcBef>
+                  <a:spcPts val="0"/>
+                </a:spcBef>
+                <a:spcAft>
+                  <a:spcPts val="0"/>
+                </a:spcAft>
+                <a:buClrTx/>
+                <a:buSzTx/>
+                <a:buFontTx/>
+                <a:buNone/>
+                <a:tabLst/>
+                <a:defRPr/>
+              </a:pPr>
+              <a:endParaRPr kumimoji="0" lang="en-US" sz="1800" b="0" i="0" u="none" strike="noStrike" kern="1200" cap="none" spc="0" normalizeH="0" baseline="0" noProof="0">
+                <a:ln>
+                  <a:noFill/>
+                </a:ln>
+                <a:solidFill>
+                  <a:prstClr val="white"/>
+                </a:solidFill>
+                <a:effectLst/>
+                <a:uLnTx/>
+                <a:uFillTx/>
+                <a:latin typeface="Aptos" panose="02110004020202020204"/>
+                <a:ea typeface="+mn-ea"/>
+                <a:cs typeface="+mn-cs"/>
+              </a:endParaRPr>
+            </a:p>
+          </p:txBody>
+        </p:sp>
+        <p:grpSp>
+          <p:nvGrpSpPr>
+            <p:cNvPr id="33" name="Group 32">
+              <a:extLst>
+                <a:ext uri="{FF2B5EF4-FFF2-40B4-BE49-F238E27FC236}">
+                  <a16:creationId xmlns:a16="http://schemas.microsoft.com/office/drawing/2014/main" id="{89683DB9-882E-CB65-70AE-D8C2C35DCF6F}"/>
+                </a:ext>
+              </a:extLst>
+            </p:cNvPr>
+            <p:cNvGrpSpPr/>
+            <p:nvPr/>
+          </p:nvGrpSpPr>
+          <p:grpSpPr>
+            <a:xfrm>
+              <a:off x="273020" y="5729290"/>
+              <a:ext cx="633188" cy="274320"/>
+              <a:chOff x="273020" y="281518"/>
+              <a:chExt cx="633188" cy="274320"/>
+            </a:xfrm>
+          </p:grpSpPr>
+          <p:pic>
+            <p:nvPicPr>
+              <p:cNvPr id="60" name="Graphic 8" descr="AWS WAF service icon.">
+                <a:extLst>
+                  <a:ext uri="{FF2B5EF4-FFF2-40B4-BE49-F238E27FC236}">
+                    <a16:creationId xmlns:a16="http://schemas.microsoft.com/office/drawing/2014/main" id="{4B59EF97-3F82-131F-5E3A-420558729B16}"/>
+                  </a:ext>
+                </a:extLst>
+              </p:cNvPr>
+              <p:cNvPicPr>
+                <a:picLocks noChangeAspect="1" noChangeArrowheads="1"/>
+              </p:cNvPicPr>
+              <p:nvPr/>
+            </p:nvPicPr>
+            <p:blipFill>
+              <a:blip>
+                <a:extLst>
+                  <a:ext uri="{96DAC541-7B7A-43D3-8B79-37D633B846F1}">
+                    <asvg:svgBlip xmlns:asvg="http://schemas.microsoft.com/office/drawing/2016/SVG/main" r:embed="rId5"/>
+                  </a:ext>
+                </a:extLst>
+              </a:blip>
+              <a:srcRect/>
+              <a:stretch/>
+            </p:blipFill>
+            <p:spPr bwMode="auto">
+              <a:xfrm>
+                <a:off x="273020" y="281518"/>
+                <a:ext cx="274320" cy="274320"/>
+              </a:xfrm>
+              <a:prstGeom prst="rect">
+                <a:avLst/>
+              </a:prstGeom>
+              <a:noFill/>
+              <a:ln>
+                <a:noFill/>
+              </a:ln>
+              <a:extLst>
+                <a:ext uri="{909E8E84-426E-40DD-AFC4-6F175D3DCCD1}">
+                  <a14:hiddenFill xmlns:a14="http://schemas.microsoft.com/office/drawing/2010/main">
+                    <a:solidFill>
+                      <a:srgbClr val="FFFFFF"/>
+                    </a:solidFill>
+                  </a14:hiddenFill>
+                </a:ext>
+                <a:ext uri="{91240B29-F687-4F45-9708-019B960494DF}">
+                  <a14:hiddenLine xmlns:a14="http://schemas.microsoft.com/office/drawing/2010/main" w="9525">
+                    <a:solidFill>
+                      <a:srgbClr val="000000"/>
+                    </a:solidFill>
+                    <a:miter lim="800000"/>
+                    <a:headEnd/>
+                    <a:tailEnd/>
+                  </a14:hiddenLine>
+                </a:ext>
+              </a:extLst>
+            </p:spPr>
+          </p:pic>
+          <p:sp>
+            <p:nvSpPr>
+              <p:cNvPr id="61" name="TextBox 60">
+                <a:extLst>
+                  <a:ext uri="{FF2B5EF4-FFF2-40B4-BE49-F238E27FC236}">
+                    <a16:creationId xmlns:a16="http://schemas.microsoft.com/office/drawing/2014/main" id="{BBB96308-1E88-1B0D-371E-D73A5F5770B0}"/>
+                  </a:ext>
+                </a:extLst>
+              </p:cNvPr>
+              <p:cNvSpPr txBox="1"/>
+              <p:nvPr/>
+            </p:nvSpPr>
+            <p:spPr>
+              <a:xfrm>
+                <a:off x="548418" y="314599"/>
+                <a:ext cx="357790" cy="200055"/>
+              </a:xfrm>
+              <a:prstGeom prst="rect">
+                <a:avLst/>
+              </a:prstGeom>
+              <a:noFill/>
+            </p:spPr>
+            <p:txBody>
+              <a:bodyPr wrap="none" rtlCol="0">
+                <a:spAutoFit/>
+              </a:bodyPr>
+              <a:lstStyle/>
+              <a:p>
+                <a:pPr marL="0" marR="0" lvl="0" indent="0" algn="l" defTabSz="914400" rtl="0" eaLnBrk="1" fontAlgn="auto" latinLnBrk="0" hangingPunct="1">
+                  <a:lnSpc>
+                    <a:spcPct val="100000"/>
+                  </a:lnSpc>
+                  <a:spcBef>
+                    <a:spcPts val="0"/>
+                  </a:spcBef>
+                  <a:spcAft>
+                    <a:spcPts val="0"/>
+                  </a:spcAft>
+                  <a:buClrTx/>
+                  <a:buSzTx/>
+                  <a:buFontTx/>
+                  <a:buNone/>
+                  <a:tabLst/>
+                  <a:defRPr/>
+                </a:pPr>
+                <a:r>
+                  <a:rPr kumimoji="0" lang="en-US" sz="700" b="0" i="0" u="none" strike="noStrike" kern="1200" cap="none" spc="0" normalizeH="0" baseline="0" noProof="0" dirty="0">
+                    <a:ln>
+                      <a:noFill/>
+                    </a:ln>
+                    <a:solidFill>
+                      <a:prstClr val="black"/>
+                    </a:solidFill>
+                    <a:effectLst/>
+                    <a:uLnTx/>
+                    <a:uFillTx/>
+                    <a:latin typeface="Calibri" panose="020F0502020204030204"/>
+                    <a:ea typeface="+mn-ea"/>
+                    <a:cs typeface="+mn-cs"/>
+                  </a:rPr>
+                  <a:t>WAF</a:t>
+                </a:r>
+              </a:p>
+            </p:txBody>
+          </p:sp>
+        </p:grpSp>
+        <p:grpSp>
+          <p:nvGrpSpPr>
+            <p:cNvPr id="34" name="Group 33">
+              <a:extLst>
+                <a:ext uri="{FF2B5EF4-FFF2-40B4-BE49-F238E27FC236}">
+                  <a16:creationId xmlns:a16="http://schemas.microsoft.com/office/drawing/2014/main" id="{54BDF4EF-5628-F1AE-B5B1-F1982338DD0B}"/>
+                </a:ext>
+              </a:extLst>
+            </p:cNvPr>
+            <p:cNvGrpSpPr/>
+            <p:nvPr/>
+          </p:nvGrpSpPr>
+          <p:grpSpPr>
+            <a:xfrm>
+              <a:off x="273020" y="6056039"/>
+              <a:ext cx="869270" cy="274320"/>
+              <a:chOff x="273020" y="608267"/>
+              <a:chExt cx="869270" cy="274320"/>
+            </a:xfrm>
+          </p:grpSpPr>
+          <p:pic>
+            <p:nvPicPr>
+              <p:cNvPr id="58" name="Graphic 19" descr="Amazon CloudFront service icon.">
+                <a:extLst>
+                  <a:ext uri="{FF2B5EF4-FFF2-40B4-BE49-F238E27FC236}">
+                    <a16:creationId xmlns:a16="http://schemas.microsoft.com/office/drawing/2014/main" id="{919FD594-64AF-75D8-B88C-1D7C89D3CB67}"/>
+                  </a:ext>
+                </a:extLst>
+              </p:cNvPr>
+              <p:cNvPicPr>
+                <a:picLocks noChangeAspect="1" noChangeArrowheads="1"/>
+              </p:cNvPicPr>
+              <p:nvPr/>
+            </p:nvPicPr>
+            <p:blipFill>
+              <a:blip>
+                <a:extLst>
+                  <a:ext uri="{96DAC541-7B7A-43D3-8B79-37D633B846F1}">
+                    <asvg:svgBlip xmlns:asvg="http://schemas.microsoft.com/office/drawing/2016/SVG/main" r:embed="rId6"/>
+                  </a:ext>
+                </a:extLst>
+              </a:blip>
+              <a:srcRect/>
+              <a:stretch/>
+            </p:blipFill>
+            <p:spPr bwMode="auto">
+              <a:xfrm>
+                <a:off x="273020" y="608267"/>
+                <a:ext cx="274320" cy="274320"/>
+              </a:xfrm>
+              <a:prstGeom prst="rect">
+                <a:avLst/>
+              </a:prstGeom>
+              <a:noFill/>
+              <a:ln>
+                <a:noFill/>
+              </a:ln>
+              <a:extLst>
+                <a:ext uri="{909E8E84-426E-40DD-AFC4-6F175D3DCCD1}">
+                  <a14:hiddenFill xmlns:a14="http://schemas.microsoft.com/office/drawing/2010/main">
+                    <a:solidFill>
+                      <a:srgbClr val="FFFFFF"/>
+                    </a:solidFill>
+                  </a14:hiddenFill>
+                </a:ext>
+                <a:ext uri="{91240B29-F687-4F45-9708-019B960494DF}">
+                  <a14:hiddenLine xmlns:a14="http://schemas.microsoft.com/office/drawing/2010/main" w="9525">
+                    <a:solidFill>
+                      <a:srgbClr val="000000"/>
+                    </a:solidFill>
+                    <a:miter lim="800000"/>
+                    <a:headEnd/>
+                    <a:tailEnd/>
+                  </a14:hiddenLine>
+                </a:ext>
+              </a:extLst>
+            </p:spPr>
+          </p:pic>
+          <p:sp>
+            <p:nvSpPr>
+              <p:cNvPr id="59" name="TextBox 58">
+                <a:extLst>
+                  <a:ext uri="{FF2B5EF4-FFF2-40B4-BE49-F238E27FC236}">
+                    <a16:creationId xmlns:a16="http://schemas.microsoft.com/office/drawing/2014/main" id="{74DBC8B7-0553-05AE-9741-9A630FADA1A5}"/>
+                  </a:ext>
+                </a:extLst>
+              </p:cNvPr>
+              <p:cNvSpPr txBox="1"/>
+              <p:nvPr/>
+            </p:nvSpPr>
+            <p:spPr>
+              <a:xfrm>
+                <a:off x="548858" y="650947"/>
+                <a:ext cx="593432" cy="200055"/>
+              </a:xfrm>
+              <a:prstGeom prst="rect">
+                <a:avLst/>
+              </a:prstGeom>
+              <a:noFill/>
+            </p:spPr>
+            <p:txBody>
+              <a:bodyPr wrap="none" rtlCol="0">
+                <a:spAutoFit/>
+              </a:bodyPr>
+              <a:lstStyle/>
+              <a:p>
+                <a:pPr marL="0" marR="0" lvl="0" indent="0" algn="l" defTabSz="914400" rtl="0" eaLnBrk="1" fontAlgn="auto" latinLnBrk="0" hangingPunct="1">
+                  <a:lnSpc>
+                    <a:spcPct val="100000"/>
+                  </a:lnSpc>
+                  <a:spcBef>
+                    <a:spcPts val="0"/>
+                  </a:spcBef>
+                  <a:spcAft>
+                    <a:spcPts val="0"/>
+                  </a:spcAft>
+                  <a:buClrTx/>
+                  <a:buSzTx/>
+                  <a:buFontTx/>
+                  <a:buNone/>
+                  <a:tabLst/>
+                  <a:defRPr/>
+                </a:pPr>
+                <a:r>
+                  <a:rPr kumimoji="0" lang="en-US" sz="700" b="0" i="0" u="none" strike="noStrike" kern="1200" cap="none" spc="0" normalizeH="0" baseline="0" noProof="0" dirty="0">
+                    <a:ln>
+                      <a:noFill/>
+                    </a:ln>
+                    <a:solidFill>
+                      <a:prstClr val="black"/>
+                    </a:solidFill>
+                    <a:effectLst/>
+                    <a:uLnTx/>
+                    <a:uFillTx/>
+                    <a:latin typeface="Calibri" panose="020F0502020204030204"/>
+                    <a:ea typeface="+mn-ea"/>
+                    <a:cs typeface="+mn-cs"/>
+                  </a:rPr>
+                  <a:t>CloudFront</a:t>
+                </a:r>
+              </a:p>
+            </p:txBody>
+          </p:sp>
+        </p:grpSp>
+        <p:grpSp>
+          <p:nvGrpSpPr>
+            <p:cNvPr id="35" name="Group 34">
+              <a:extLst>
+                <a:ext uri="{FF2B5EF4-FFF2-40B4-BE49-F238E27FC236}">
+                  <a16:creationId xmlns:a16="http://schemas.microsoft.com/office/drawing/2014/main" id="{AAE48C6D-29C9-3E59-DD00-91A3FD8DADC7}"/>
+                </a:ext>
+              </a:extLst>
+            </p:cNvPr>
+            <p:cNvGrpSpPr/>
+            <p:nvPr/>
+          </p:nvGrpSpPr>
+          <p:grpSpPr>
+            <a:xfrm>
+              <a:off x="273020" y="6382788"/>
+              <a:ext cx="923774" cy="274320"/>
+              <a:chOff x="273020" y="935016"/>
+              <a:chExt cx="923774" cy="274320"/>
+            </a:xfrm>
+          </p:grpSpPr>
+          <p:pic>
+            <p:nvPicPr>
+              <p:cNvPr id="56" name="Graphic 7" descr="Amazon API Gateway service icon.">
+                <a:extLst>
+                  <a:ext uri="{FF2B5EF4-FFF2-40B4-BE49-F238E27FC236}">
+                    <a16:creationId xmlns:a16="http://schemas.microsoft.com/office/drawing/2014/main" id="{861C1E1D-374F-1155-3C3D-D91676D9FAEB}"/>
+                  </a:ext>
+                </a:extLst>
+              </p:cNvPr>
+              <p:cNvPicPr>
+                <a:picLocks noChangeAspect="1" noChangeArrowheads="1"/>
+              </p:cNvPicPr>
+              <p:nvPr/>
+            </p:nvPicPr>
+            <p:blipFill>
+              <a:blip>
+                <a:extLst>
+                  <a:ext uri="{96DAC541-7B7A-43D3-8B79-37D633B846F1}">
+                    <asvg:svgBlip xmlns:asvg="http://schemas.microsoft.com/office/drawing/2016/SVG/main" r:embed="rId10"/>
+                  </a:ext>
+                </a:extLst>
+              </a:blip>
+              <a:srcRect/>
+              <a:stretch/>
+            </p:blipFill>
+            <p:spPr bwMode="auto">
+              <a:xfrm>
+                <a:off x="273020" y="935016"/>
+                <a:ext cx="274320" cy="274320"/>
+              </a:xfrm>
+              <a:prstGeom prst="rect">
+                <a:avLst/>
+              </a:prstGeom>
+              <a:noFill/>
+              <a:ln>
+                <a:noFill/>
+              </a:ln>
+              <a:extLst>
+                <a:ext uri="{909E8E84-426E-40DD-AFC4-6F175D3DCCD1}">
+                  <a14:hiddenFill xmlns:a14="http://schemas.microsoft.com/office/drawing/2010/main">
+                    <a:solidFill>
+                      <a:srgbClr val="FFFFFF"/>
+                    </a:solidFill>
+                  </a14:hiddenFill>
+                </a:ext>
+                <a:ext uri="{91240B29-F687-4F45-9708-019B960494DF}">
+                  <a14:hiddenLine xmlns:a14="http://schemas.microsoft.com/office/drawing/2010/main" w="9525">
+                    <a:solidFill>
+                      <a:srgbClr val="000000"/>
+                    </a:solidFill>
+                    <a:miter lim="800000"/>
+                    <a:headEnd/>
+                    <a:tailEnd/>
+                  </a14:hiddenLine>
+                </a:ext>
+              </a:extLst>
+            </p:spPr>
+          </p:pic>
+          <p:sp>
+            <p:nvSpPr>
+              <p:cNvPr id="57" name="TextBox 56">
+                <a:extLst>
+                  <a:ext uri="{FF2B5EF4-FFF2-40B4-BE49-F238E27FC236}">
+                    <a16:creationId xmlns:a16="http://schemas.microsoft.com/office/drawing/2014/main" id="{88B37DBE-9C50-A1F1-82A7-D4EC6F99D48E}"/>
+                  </a:ext>
+                </a:extLst>
+              </p:cNvPr>
+              <p:cNvSpPr txBox="1"/>
+              <p:nvPr/>
+            </p:nvSpPr>
+            <p:spPr>
+              <a:xfrm>
+                <a:off x="548860" y="976184"/>
+                <a:ext cx="647934" cy="200055"/>
+              </a:xfrm>
+              <a:prstGeom prst="rect">
+                <a:avLst/>
+              </a:prstGeom>
+              <a:noFill/>
+            </p:spPr>
+            <p:txBody>
+              <a:bodyPr wrap="none" rtlCol="0">
+                <a:spAutoFit/>
+              </a:bodyPr>
+              <a:lstStyle/>
+              <a:p>
+                <a:pPr marL="0" marR="0" lvl="0" indent="0" algn="l" defTabSz="914400" rtl="0" eaLnBrk="1" fontAlgn="auto" latinLnBrk="0" hangingPunct="1">
+                  <a:lnSpc>
+                    <a:spcPct val="100000"/>
+                  </a:lnSpc>
+                  <a:spcBef>
+                    <a:spcPts val="0"/>
+                  </a:spcBef>
+                  <a:spcAft>
+                    <a:spcPts val="0"/>
+                  </a:spcAft>
+                  <a:buClrTx/>
+                  <a:buSzTx/>
+                  <a:buFontTx/>
+                  <a:buNone/>
+                  <a:tabLst/>
+                  <a:defRPr/>
+                </a:pPr>
+                <a:r>
+                  <a:rPr kumimoji="0" lang="en-US" sz="700" b="0" i="0" u="none" strike="noStrike" kern="1200" cap="none" spc="0" normalizeH="0" baseline="0" noProof="0" dirty="0">
+                    <a:ln>
+                      <a:noFill/>
+                    </a:ln>
+                    <a:solidFill>
+                      <a:prstClr val="black"/>
+                    </a:solidFill>
+                    <a:effectLst/>
+                    <a:uLnTx/>
+                    <a:uFillTx/>
+                    <a:latin typeface="Calibri" panose="020F0502020204030204"/>
+                    <a:ea typeface="+mn-ea"/>
+                    <a:cs typeface="+mn-cs"/>
+                  </a:rPr>
+                  <a:t>API Gateway</a:t>
+                </a:r>
+              </a:p>
+            </p:txBody>
+          </p:sp>
+        </p:grpSp>
+        <p:grpSp>
+          <p:nvGrpSpPr>
+            <p:cNvPr id="36" name="Group 35">
+              <a:extLst>
+                <a:ext uri="{FF2B5EF4-FFF2-40B4-BE49-F238E27FC236}">
+                  <a16:creationId xmlns:a16="http://schemas.microsoft.com/office/drawing/2014/main" id="{37952F6A-1C56-398E-2FCA-7181F143E9DD}"/>
+                </a:ext>
+              </a:extLst>
+            </p:cNvPr>
+            <p:cNvGrpSpPr/>
+            <p:nvPr/>
+          </p:nvGrpSpPr>
+          <p:grpSpPr>
+            <a:xfrm>
+              <a:off x="1246336" y="5729290"/>
+              <a:ext cx="610098" cy="290296"/>
+              <a:chOff x="1246336" y="281518"/>
+              <a:chExt cx="610098" cy="290296"/>
+            </a:xfrm>
+          </p:grpSpPr>
+          <p:pic>
+            <p:nvPicPr>
+              <p:cNvPr id="54" name="Graphic 53" descr="Application Load Balancer resource icon for the Elastic Load Balancing service.">
+                <a:extLst>
+                  <a:ext uri="{FF2B5EF4-FFF2-40B4-BE49-F238E27FC236}">
+                    <a16:creationId xmlns:a16="http://schemas.microsoft.com/office/drawing/2014/main" id="{4F2812D3-A092-91AC-8831-EFF8DF86ED7A}"/>
+                  </a:ext>
+                </a:extLst>
+              </p:cNvPr>
+              <p:cNvPicPr>
+                <a:picLocks noChangeAspect="1"/>
+              </p:cNvPicPr>
+              <p:nvPr/>
+            </p:nvPicPr>
+            <p:blipFill>
+              <a:blip>
+                <a:extLst>
+                  <a:ext uri="{96DAC541-7B7A-43D3-8B79-37D633B846F1}">
+                    <asvg:svgBlip xmlns:asvg="http://schemas.microsoft.com/office/drawing/2016/SVG/main" r:embed="rId11"/>
+                  </a:ext>
+                </a:extLst>
+              </a:blip>
+              <a:stretch>
+                <a:fillRect/>
+              </a:stretch>
+            </p:blipFill>
+            <p:spPr>
+              <a:xfrm>
+                <a:off x="1246336" y="281518"/>
+                <a:ext cx="290296" cy="290296"/>
+              </a:xfrm>
+              <a:prstGeom prst="rect">
+                <a:avLst/>
+              </a:prstGeom>
+            </p:spPr>
+          </p:pic>
+          <p:sp>
+            <p:nvSpPr>
+              <p:cNvPr id="55" name="TextBox 54">
+                <a:extLst>
+                  <a:ext uri="{FF2B5EF4-FFF2-40B4-BE49-F238E27FC236}">
+                    <a16:creationId xmlns:a16="http://schemas.microsoft.com/office/drawing/2014/main" id="{26326771-BBE7-C995-2BDF-320555B0B9F3}"/>
+                  </a:ext>
+                </a:extLst>
+              </p:cNvPr>
+              <p:cNvSpPr txBox="1"/>
+              <p:nvPr/>
+            </p:nvSpPr>
+            <p:spPr>
+              <a:xfrm>
+                <a:off x="1527497" y="335663"/>
+                <a:ext cx="328937" cy="200055"/>
+              </a:xfrm>
+              <a:prstGeom prst="rect">
+                <a:avLst/>
+              </a:prstGeom>
+              <a:noFill/>
+            </p:spPr>
+            <p:txBody>
+              <a:bodyPr wrap="none" rtlCol="0">
+                <a:spAutoFit/>
+              </a:bodyPr>
+              <a:lstStyle/>
+              <a:p>
+                <a:pPr marL="0" marR="0" lvl="0" indent="0" algn="l" defTabSz="914400" rtl="0" eaLnBrk="1" fontAlgn="auto" latinLnBrk="0" hangingPunct="1">
+                  <a:lnSpc>
+                    <a:spcPct val="100000"/>
+                  </a:lnSpc>
+                  <a:spcBef>
+                    <a:spcPts val="0"/>
+                  </a:spcBef>
+                  <a:spcAft>
+                    <a:spcPts val="0"/>
+                  </a:spcAft>
+                  <a:buClrTx/>
+                  <a:buSzTx/>
+                  <a:buFontTx/>
+                  <a:buNone/>
+                  <a:tabLst/>
+                  <a:defRPr/>
+                </a:pPr>
+                <a:r>
+                  <a:rPr kumimoji="0" lang="en-US" sz="700" b="0" i="0" u="none" strike="noStrike" kern="1200" cap="none" spc="0" normalizeH="0" baseline="0" noProof="0" dirty="0">
+                    <a:ln>
+                      <a:noFill/>
+                    </a:ln>
+                    <a:solidFill>
+                      <a:prstClr val="black"/>
+                    </a:solidFill>
+                    <a:effectLst/>
+                    <a:uLnTx/>
+                    <a:uFillTx/>
+                    <a:latin typeface="Calibri" panose="020F0502020204030204"/>
+                    <a:ea typeface="+mn-ea"/>
+                    <a:cs typeface="+mn-cs"/>
+                  </a:rPr>
+                  <a:t>NLB</a:t>
+                </a:r>
+              </a:p>
+            </p:txBody>
+          </p:sp>
+        </p:grpSp>
+        <p:grpSp>
+          <p:nvGrpSpPr>
+            <p:cNvPr id="37" name="Group 36">
+              <a:extLst>
+                <a:ext uri="{FF2B5EF4-FFF2-40B4-BE49-F238E27FC236}">
+                  <a16:creationId xmlns:a16="http://schemas.microsoft.com/office/drawing/2014/main" id="{FCE41E63-D059-4A51-90E3-024594F18B64}"/>
+                </a:ext>
+              </a:extLst>
+            </p:cNvPr>
+            <p:cNvGrpSpPr/>
+            <p:nvPr/>
+          </p:nvGrpSpPr>
+          <p:grpSpPr>
+            <a:xfrm>
+              <a:off x="1254324" y="6072015"/>
+              <a:ext cx="599343" cy="274320"/>
+              <a:chOff x="1254324" y="624243"/>
+              <a:chExt cx="599343" cy="274320"/>
+            </a:xfrm>
+          </p:grpSpPr>
+          <p:pic>
+            <p:nvPicPr>
+              <p:cNvPr id="52" name="Graphic 51" descr="Network Load Balancer resource icon for the Elastic Load Balancing service.">
+                <a:extLst>
+                  <a:ext uri="{FF2B5EF4-FFF2-40B4-BE49-F238E27FC236}">
+                    <a16:creationId xmlns:a16="http://schemas.microsoft.com/office/drawing/2014/main" id="{4D8A02D8-7325-BF66-08FF-3A1B89808277}"/>
+                  </a:ext>
+                </a:extLst>
+              </p:cNvPr>
+              <p:cNvPicPr>
+                <a:picLocks noChangeAspect="1"/>
+              </p:cNvPicPr>
+              <p:nvPr/>
+            </p:nvPicPr>
+            <p:blipFill>
+              <a:blip>
+                <a:extLst>
+                  <a:ext uri="{96DAC541-7B7A-43D3-8B79-37D633B846F1}">
+                    <asvg:svgBlip xmlns:asvg="http://schemas.microsoft.com/office/drawing/2016/SVG/main" r:embed="rId12"/>
+                  </a:ext>
+                </a:extLst>
+              </a:blip>
+              <a:stretch>
+                <a:fillRect/>
+              </a:stretch>
+            </p:blipFill>
+            <p:spPr>
+              <a:xfrm>
+                <a:off x="1254324" y="624243"/>
+                <a:ext cx="274320" cy="274320"/>
+              </a:xfrm>
+              <a:prstGeom prst="rect">
+                <a:avLst/>
+              </a:prstGeom>
+            </p:spPr>
+          </p:pic>
+          <p:sp>
+            <p:nvSpPr>
+              <p:cNvPr id="53" name="TextBox 52">
+                <a:extLst>
+                  <a:ext uri="{FF2B5EF4-FFF2-40B4-BE49-F238E27FC236}">
+                    <a16:creationId xmlns:a16="http://schemas.microsoft.com/office/drawing/2014/main" id="{719BA24A-2F35-A3A5-4521-11A70BFE5E18}"/>
+                  </a:ext>
+                </a:extLst>
+              </p:cNvPr>
+              <p:cNvSpPr txBox="1"/>
+              <p:nvPr/>
+            </p:nvSpPr>
+            <p:spPr>
+              <a:xfrm>
+                <a:off x="1531143" y="672011"/>
+                <a:ext cx="322524" cy="200055"/>
+              </a:xfrm>
+              <a:prstGeom prst="rect">
+                <a:avLst/>
+              </a:prstGeom>
+              <a:noFill/>
+            </p:spPr>
+            <p:txBody>
+              <a:bodyPr wrap="none" rtlCol="0">
+                <a:spAutoFit/>
+              </a:bodyPr>
+              <a:lstStyle/>
+              <a:p>
+                <a:pPr marL="0" marR="0" lvl="0" indent="0" algn="l" defTabSz="914400" rtl="0" eaLnBrk="1" fontAlgn="auto" latinLnBrk="0" hangingPunct="1">
+                  <a:lnSpc>
+                    <a:spcPct val="100000"/>
+                  </a:lnSpc>
+                  <a:spcBef>
+                    <a:spcPts val="0"/>
+                  </a:spcBef>
+                  <a:spcAft>
+                    <a:spcPts val="0"/>
+                  </a:spcAft>
+                  <a:buClrTx/>
+                  <a:buSzTx/>
+                  <a:buFontTx/>
+                  <a:buNone/>
+                  <a:tabLst/>
+                  <a:defRPr/>
+                </a:pPr>
+                <a:r>
+                  <a:rPr kumimoji="0" lang="en-US" sz="700" b="0" i="0" u="none" strike="noStrike" kern="1200" cap="none" spc="0" normalizeH="0" baseline="0" noProof="0" dirty="0">
+                    <a:ln>
+                      <a:noFill/>
+                    </a:ln>
+                    <a:solidFill>
+                      <a:prstClr val="black"/>
+                    </a:solidFill>
+                    <a:effectLst/>
+                    <a:uLnTx/>
+                    <a:uFillTx/>
+                    <a:latin typeface="Calibri" panose="020F0502020204030204"/>
+                    <a:ea typeface="+mn-ea"/>
+                    <a:cs typeface="+mn-cs"/>
+                  </a:rPr>
+                  <a:t>ALB</a:t>
+                </a:r>
+              </a:p>
+            </p:txBody>
+          </p:sp>
+        </p:grpSp>
+        <p:grpSp>
+          <p:nvGrpSpPr>
+            <p:cNvPr id="38" name="Group 37">
+              <a:extLst>
+                <a:ext uri="{FF2B5EF4-FFF2-40B4-BE49-F238E27FC236}">
+                  <a16:creationId xmlns:a16="http://schemas.microsoft.com/office/drawing/2014/main" id="{2CD68CCB-2B7C-45B4-DAC1-76DBD7F860B0}"/>
+                </a:ext>
+              </a:extLst>
+            </p:cNvPr>
+            <p:cNvGrpSpPr/>
+            <p:nvPr/>
+          </p:nvGrpSpPr>
+          <p:grpSpPr>
+            <a:xfrm>
+              <a:off x="2216552" y="6082101"/>
+              <a:ext cx="608222" cy="274320"/>
+              <a:chOff x="1254324" y="950992"/>
+              <a:chExt cx="608222" cy="274320"/>
+            </a:xfrm>
+          </p:grpSpPr>
+          <p:grpSp>
+            <p:nvGrpSpPr>
+              <p:cNvPr id="48" name="Group 47">
+                <a:extLst>
+                  <a:ext uri="{FF2B5EF4-FFF2-40B4-BE49-F238E27FC236}">
+                    <a16:creationId xmlns:a16="http://schemas.microsoft.com/office/drawing/2014/main" id="{BDACDB94-2104-DAA2-3A3D-B4628A60948B}"/>
+                  </a:ext>
+                </a:extLst>
+              </p:cNvPr>
+              <p:cNvGrpSpPr/>
+              <p:nvPr/>
+            </p:nvGrpSpPr>
+            <p:grpSpPr>
+              <a:xfrm>
+                <a:off x="1254324" y="950992"/>
+                <a:ext cx="274320" cy="274320"/>
+                <a:chOff x="2462281" y="2481979"/>
+                <a:chExt cx="274320" cy="274320"/>
+              </a:xfrm>
+            </p:grpSpPr>
+            <p:sp>
+              <p:nvSpPr>
+                <p:cNvPr id="50" name="Oval 49">
+                  <a:extLst>
+                    <a:ext uri="{FF2B5EF4-FFF2-40B4-BE49-F238E27FC236}">
+                      <a16:creationId xmlns:a16="http://schemas.microsoft.com/office/drawing/2014/main" id="{E6379417-F506-75D0-DC69-AB53880CA0A2}"/>
+                    </a:ext>
+                  </a:extLst>
+                </p:cNvPr>
+                <p:cNvSpPr/>
+                <p:nvPr/>
+              </p:nvSpPr>
+              <p:spPr>
+                <a:xfrm>
+                  <a:off x="2484453" y="2503228"/>
+                  <a:ext cx="229527" cy="229527"/>
+                </a:xfrm>
+                <a:prstGeom prst="ellipse">
+                  <a:avLst/>
+                </a:prstGeom>
+                <a:solidFill>
+                  <a:schemeClr val="bg1"/>
+                </a:solidFill>
+                <a:ln>
+                  <a:noFill/>
+                </a:ln>
+              </p:spPr>
+              <p:style>
+                <a:lnRef idx="2">
+                  <a:schemeClr val="accent1">
+                    <a:shade val="15000"/>
+                  </a:schemeClr>
+                </a:lnRef>
+                <a:fillRef idx="1">
+                  <a:schemeClr val="accent1"/>
+                </a:fillRef>
+                <a:effectRef idx="0">
+                  <a:schemeClr val="accent1"/>
+                </a:effectRef>
+                <a:fontRef idx="minor">
+                  <a:schemeClr val="lt1"/>
+                </a:fontRef>
+              </p:style>
+              <p:txBody>
+                <a:bodyPr rtlCol="0" anchor="ctr"/>
+                <a:lstStyle/>
+                <a:p>
+                  <a:pPr marL="0" marR="0" lvl="0" indent="0" algn="ctr" defTabSz="914400" rtl="0" eaLnBrk="1" fontAlgn="auto" latinLnBrk="0" hangingPunct="1">
+                    <a:lnSpc>
+                      <a:spcPct val="100000"/>
+                    </a:lnSpc>
+                    <a:spcBef>
+                      <a:spcPts val="0"/>
+                    </a:spcBef>
+                    <a:spcAft>
+                      <a:spcPts val="0"/>
+                    </a:spcAft>
+                    <a:buClrTx/>
+                    <a:buSzTx/>
+                    <a:buFontTx/>
+                    <a:buNone/>
+                    <a:tabLst/>
+                    <a:defRPr/>
+                  </a:pPr>
+                  <a:endParaRPr kumimoji="0" lang="en-US" sz="1800" b="0" i="0" u="none" strike="noStrike" kern="1200" cap="none" spc="0" normalizeH="0" baseline="0" noProof="0">
+                    <a:ln>
+                      <a:noFill/>
+                    </a:ln>
+                    <a:solidFill>
+                      <a:prstClr val="white"/>
+                    </a:solidFill>
+                    <a:effectLst/>
+                    <a:uLnTx/>
+                    <a:uFillTx/>
+                    <a:latin typeface="Aptos" panose="02110004020202020204"/>
+                    <a:ea typeface="+mn-ea"/>
+                    <a:cs typeface="+mn-cs"/>
+                  </a:endParaRPr>
+                </a:p>
+              </p:txBody>
+            </p:sp>
+            <p:pic>
+              <p:nvPicPr>
+                <p:cNvPr id="51" name="Graphic 50" descr="Internet gateway resource icon for the Amazon VPC service.&#10;">
+                  <a:extLst>
+                    <a:ext uri="{FF2B5EF4-FFF2-40B4-BE49-F238E27FC236}">
+                      <a16:creationId xmlns:a16="http://schemas.microsoft.com/office/drawing/2014/main" id="{C17B3D03-2042-B476-B072-2E18E4BA67A8}"/>
+                    </a:ext>
+                  </a:extLst>
+                </p:cNvPr>
+                <p:cNvPicPr>
+                  <a:picLocks noChangeAspect="1"/>
+                </p:cNvPicPr>
+                <p:nvPr/>
+              </p:nvPicPr>
+              <p:blipFill>
+                <a:blip>
+                  <a:extLst>
+                    <a:ext uri="{96DAC541-7B7A-43D3-8B79-37D633B846F1}">
+                      <asvg:svgBlip xmlns:asvg="http://schemas.microsoft.com/office/drawing/2016/SVG/main" r:embed="rId13"/>
+                    </a:ext>
+                  </a:extLst>
+                </a:blip>
+                <a:stretch>
+                  <a:fillRect/>
+                </a:stretch>
+              </p:blipFill>
+              <p:spPr>
+                <a:xfrm>
+                  <a:off x="2462281" y="2481979"/>
+                  <a:ext cx="274320" cy="274320"/>
+                </a:xfrm>
+                <a:prstGeom prst="rect">
+                  <a:avLst/>
+                </a:prstGeom>
+              </p:spPr>
+            </p:pic>
+          </p:grpSp>
+          <p:sp>
+            <p:nvSpPr>
+              <p:cNvPr id="49" name="TextBox 48">
+                <a:extLst>
+                  <a:ext uri="{FF2B5EF4-FFF2-40B4-BE49-F238E27FC236}">
+                    <a16:creationId xmlns:a16="http://schemas.microsoft.com/office/drawing/2014/main" id="{2967CE3D-E579-ACF4-1922-BDB36A05490B}"/>
+                  </a:ext>
+                </a:extLst>
+              </p:cNvPr>
+              <p:cNvSpPr txBox="1"/>
+              <p:nvPr/>
+            </p:nvSpPr>
+            <p:spPr>
+              <a:xfrm>
+                <a:off x="1519182" y="999899"/>
+                <a:ext cx="343364" cy="200055"/>
+              </a:xfrm>
+              <a:prstGeom prst="rect">
+                <a:avLst/>
+              </a:prstGeom>
+              <a:noFill/>
+            </p:spPr>
+            <p:txBody>
+              <a:bodyPr wrap="none" rtlCol="0">
+                <a:spAutoFit/>
+              </a:bodyPr>
+              <a:lstStyle/>
+              <a:p>
+                <a:pPr marL="0" marR="0" lvl="0" indent="0" algn="l" defTabSz="914400" rtl="0" eaLnBrk="1" fontAlgn="auto" latinLnBrk="0" hangingPunct="1">
+                  <a:lnSpc>
+                    <a:spcPct val="100000"/>
+                  </a:lnSpc>
+                  <a:spcBef>
+                    <a:spcPts val="0"/>
+                  </a:spcBef>
+                  <a:spcAft>
+                    <a:spcPts val="0"/>
+                  </a:spcAft>
+                  <a:buClrTx/>
+                  <a:buSzTx/>
+                  <a:buFontTx/>
+                  <a:buNone/>
+                  <a:tabLst/>
+                  <a:defRPr/>
+                </a:pPr>
+                <a:r>
+                  <a:rPr kumimoji="0" lang="en-US" sz="700" b="0" i="0" u="none" strike="noStrike" kern="1200" cap="none" spc="0" normalizeH="0" baseline="0" noProof="0" dirty="0">
+                    <a:ln>
+                      <a:noFill/>
+                    </a:ln>
+                    <a:solidFill>
+                      <a:prstClr val="black"/>
+                    </a:solidFill>
+                    <a:effectLst/>
+                    <a:uLnTx/>
+                    <a:uFillTx/>
+                    <a:latin typeface="Calibri" panose="020F0502020204030204"/>
+                    <a:ea typeface="+mn-ea"/>
+                    <a:cs typeface="+mn-cs"/>
+                  </a:rPr>
+                  <a:t>IGW</a:t>
+                </a:r>
+              </a:p>
+            </p:txBody>
+          </p:sp>
+        </p:grpSp>
+        <p:grpSp>
+          <p:nvGrpSpPr>
+            <p:cNvPr id="39" name="Group 38">
+              <a:extLst>
+                <a:ext uri="{FF2B5EF4-FFF2-40B4-BE49-F238E27FC236}">
+                  <a16:creationId xmlns:a16="http://schemas.microsoft.com/office/drawing/2014/main" id="{D60AABF8-8500-8CC0-A632-25757C7BF29F}"/>
+                </a:ext>
+              </a:extLst>
+            </p:cNvPr>
+            <p:cNvGrpSpPr/>
+            <p:nvPr/>
+          </p:nvGrpSpPr>
+          <p:grpSpPr>
+            <a:xfrm>
+              <a:off x="2216552" y="6414402"/>
+              <a:ext cx="1022350" cy="307777"/>
+              <a:chOff x="1254324" y="1269055"/>
+              <a:chExt cx="1022350" cy="307777"/>
+            </a:xfrm>
+          </p:grpSpPr>
+          <p:pic>
+            <p:nvPicPr>
+              <p:cNvPr id="46" name="Graphic 45" descr="Endpoints resource icon for the Amazon VPC service.&#10;">
+                <a:extLst>
+                  <a:ext uri="{FF2B5EF4-FFF2-40B4-BE49-F238E27FC236}">
+                    <a16:creationId xmlns:a16="http://schemas.microsoft.com/office/drawing/2014/main" id="{44CE4FAB-1908-6A62-0A72-5C1A1F5672B8}"/>
+                  </a:ext>
+                </a:extLst>
+              </p:cNvPr>
+              <p:cNvPicPr>
+                <a:picLocks noChangeAspect="1"/>
+              </p:cNvPicPr>
+              <p:nvPr/>
+            </p:nvPicPr>
+            <p:blipFill>
+              <a:blip>
+                <a:extLst>
+                  <a:ext uri="{96DAC541-7B7A-43D3-8B79-37D633B846F1}">
+                    <asvg:svgBlip xmlns:asvg="http://schemas.microsoft.com/office/drawing/2016/SVG/main" r:embed="rId8"/>
+                  </a:ext>
+                </a:extLst>
+              </a:blip>
+              <a:stretch>
+                <a:fillRect/>
+              </a:stretch>
+            </p:blipFill>
+            <p:spPr>
+              <a:xfrm>
+                <a:off x="1254324" y="1277744"/>
+                <a:ext cx="274320" cy="274320"/>
+              </a:xfrm>
+              <a:prstGeom prst="rect">
+                <a:avLst/>
+              </a:prstGeom>
+            </p:spPr>
+          </p:pic>
+          <p:sp>
+            <p:nvSpPr>
+              <p:cNvPr id="47" name="TextBox 46">
+                <a:extLst>
+                  <a:ext uri="{FF2B5EF4-FFF2-40B4-BE49-F238E27FC236}">
+                    <a16:creationId xmlns:a16="http://schemas.microsoft.com/office/drawing/2014/main" id="{183E0499-33B5-51CE-F9E0-B78CB4E3EEFB}"/>
+                  </a:ext>
+                </a:extLst>
+              </p:cNvPr>
+              <p:cNvSpPr txBox="1"/>
+              <p:nvPr/>
+            </p:nvSpPr>
+            <p:spPr>
+              <a:xfrm>
+                <a:off x="1514927" y="1269055"/>
+                <a:ext cx="761747" cy="307777"/>
+              </a:xfrm>
+              <a:prstGeom prst="rect">
+                <a:avLst/>
+              </a:prstGeom>
+              <a:noFill/>
+            </p:spPr>
+            <p:txBody>
+              <a:bodyPr wrap="none" rtlCol="0">
+                <a:spAutoFit/>
+              </a:bodyPr>
+              <a:lstStyle/>
+              <a:p>
+                <a:pPr marL="0" marR="0" lvl="0" indent="0" algn="l" defTabSz="914400" rtl="0" eaLnBrk="1" fontAlgn="auto" latinLnBrk="0" hangingPunct="1">
+                  <a:lnSpc>
+                    <a:spcPct val="100000"/>
+                  </a:lnSpc>
+                  <a:spcBef>
+                    <a:spcPts val="0"/>
+                  </a:spcBef>
+                  <a:spcAft>
+                    <a:spcPts val="0"/>
+                  </a:spcAft>
+                  <a:buClrTx/>
+                  <a:buSzTx/>
+                  <a:buFontTx/>
+                  <a:buNone/>
+                  <a:tabLst/>
+                  <a:defRPr/>
+                </a:pPr>
+                <a:r>
+                  <a:rPr kumimoji="0" lang="en-US" sz="700" b="0" i="0" u="none" strike="noStrike" kern="1200" cap="none" spc="0" normalizeH="0" baseline="0" noProof="0" dirty="0">
+                    <a:ln>
+                      <a:noFill/>
+                    </a:ln>
+                    <a:solidFill>
+                      <a:prstClr val="black"/>
+                    </a:solidFill>
+                    <a:effectLst/>
+                    <a:uLnTx/>
+                    <a:uFillTx/>
+                    <a:latin typeface="Calibri" panose="020F0502020204030204"/>
+                    <a:ea typeface="+mn-ea"/>
+                    <a:cs typeface="+mn-cs"/>
+                  </a:rPr>
+                  <a:t>VPC Endpoint &amp;</a:t>
+                </a:r>
+              </a:p>
+              <a:p>
+                <a:pPr marL="0" marR="0" lvl="0" indent="0" algn="l" defTabSz="914400" rtl="0" eaLnBrk="1" fontAlgn="auto" latinLnBrk="0" hangingPunct="1">
+                  <a:lnSpc>
+                    <a:spcPct val="100000"/>
+                  </a:lnSpc>
+                  <a:spcBef>
+                    <a:spcPts val="0"/>
+                  </a:spcBef>
+                  <a:spcAft>
+                    <a:spcPts val="0"/>
+                  </a:spcAft>
+                  <a:buClrTx/>
+                  <a:buSzTx/>
+                  <a:buFontTx/>
+                  <a:buNone/>
+                  <a:tabLst/>
+                  <a:defRPr/>
+                </a:pPr>
+                <a:r>
+                  <a:rPr kumimoji="0" lang="en-US" sz="700" b="0" i="0" u="none" strike="noStrike" kern="1200" cap="none" spc="0" normalizeH="0" baseline="0" noProof="0" dirty="0">
+                    <a:ln>
+                      <a:noFill/>
+                    </a:ln>
+                    <a:solidFill>
+                      <a:prstClr val="black"/>
+                    </a:solidFill>
+                    <a:effectLst/>
+                    <a:uLnTx/>
+                    <a:uFillTx/>
+                    <a:latin typeface="Calibri" panose="020F0502020204030204"/>
+                    <a:ea typeface="+mn-ea"/>
+                    <a:cs typeface="+mn-cs"/>
+                  </a:rPr>
+                  <a:t>VPC Links</a:t>
+                </a:r>
+              </a:p>
+            </p:txBody>
+          </p:sp>
+        </p:grpSp>
+        <p:grpSp>
+          <p:nvGrpSpPr>
+            <p:cNvPr id="40" name="Group 39">
+              <a:extLst>
+                <a:ext uri="{FF2B5EF4-FFF2-40B4-BE49-F238E27FC236}">
+                  <a16:creationId xmlns:a16="http://schemas.microsoft.com/office/drawing/2014/main" id="{C5F2BAA9-70B0-6C27-7DB4-26080E0B05F1}"/>
+                </a:ext>
+              </a:extLst>
+            </p:cNvPr>
+            <p:cNvGrpSpPr/>
+            <p:nvPr/>
+          </p:nvGrpSpPr>
+          <p:grpSpPr>
+            <a:xfrm>
+              <a:off x="1254324" y="6385050"/>
+              <a:ext cx="903788" cy="307777"/>
+              <a:chOff x="278860" y="1219433"/>
+              <a:chExt cx="903788" cy="307777"/>
+            </a:xfrm>
+          </p:grpSpPr>
+          <p:pic>
+            <p:nvPicPr>
+              <p:cNvPr id="44" name="Graphic 43" descr="Session Manager resource icon for the AWS Systems Manager service.">
+                <a:extLst>
+                  <a:ext uri="{FF2B5EF4-FFF2-40B4-BE49-F238E27FC236}">
+                    <a16:creationId xmlns:a16="http://schemas.microsoft.com/office/drawing/2014/main" id="{319E9E5E-042D-D372-98CA-E4005533F9A4}"/>
+                  </a:ext>
+                </a:extLst>
+              </p:cNvPr>
+              <p:cNvPicPr>
+                <a:picLocks noChangeAspect="1"/>
+              </p:cNvPicPr>
+              <p:nvPr/>
+            </p:nvPicPr>
+            <p:blipFill>
+              <a:blip>
+                <a:extLst>
+                  <a:ext uri="{96DAC541-7B7A-43D3-8B79-37D633B846F1}">
+                    <asvg:svgBlip xmlns:asvg="http://schemas.microsoft.com/office/drawing/2016/SVG/main" r:embed="rId14"/>
+                  </a:ext>
+                </a:extLst>
+              </a:blip>
+              <a:stretch>
+                <a:fillRect/>
+              </a:stretch>
+            </p:blipFill>
+            <p:spPr>
+              <a:xfrm>
+                <a:off x="278860" y="1248785"/>
+                <a:ext cx="274320" cy="274320"/>
+              </a:xfrm>
+              <a:prstGeom prst="rect">
+                <a:avLst/>
+              </a:prstGeom>
+            </p:spPr>
+          </p:pic>
+          <p:sp>
+            <p:nvSpPr>
+              <p:cNvPr id="45" name="TextBox 44">
+                <a:extLst>
+                  <a:ext uri="{FF2B5EF4-FFF2-40B4-BE49-F238E27FC236}">
+                    <a16:creationId xmlns:a16="http://schemas.microsoft.com/office/drawing/2014/main" id="{5EDBF9F9-F7E3-DFC6-B38C-AD120825540F}"/>
+                  </a:ext>
+                </a:extLst>
+              </p:cNvPr>
+              <p:cNvSpPr txBox="1"/>
+              <p:nvPr/>
+            </p:nvSpPr>
+            <p:spPr>
+              <a:xfrm>
+                <a:off x="523493" y="1219433"/>
+                <a:ext cx="659155" cy="307777"/>
+              </a:xfrm>
+              <a:prstGeom prst="rect">
+                <a:avLst/>
+              </a:prstGeom>
+              <a:noFill/>
+            </p:spPr>
+            <p:txBody>
+              <a:bodyPr wrap="none" rtlCol="0">
+                <a:spAutoFit/>
+              </a:bodyPr>
+              <a:lstStyle/>
+              <a:p>
+                <a:pPr marL="0" marR="0" lvl="0" indent="0" algn="l" defTabSz="914400" rtl="0" eaLnBrk="1" fontAlgn="auto" latinLnBrk="0" hangingPunct="1">
+                  <a:lnSpc>
+                    <a:spcPct val="100000"/>
+                  </a:lnSpc>
+                  <a:spcBef>
+                    <a:spcPts val="0"/>
+                  </a:spcBef>
+                  <a:spcAft>
+                    <a:spcPts val="0"/>
+                  </a:spcAft>
+                  <a:buClrTx/>
+                  <a:buSzTx/>
+                  <a:buFontTx/>
+                  <a:buNone/>
+                  <a:tabLst/>
+                  <a:defRPr/>
+                </a:pPr>
+                <a:r>
+                  <a:rPr kumimoji="0" lang="en-US" sz="700" b="0" i="0" u="none" strike="noStrike" kern="1200" cap="none" spc="0" normalizeH="0" baseline="0" noProof="0" dirty="0">
+                    <a:ln>
+                      <a:noFill/>
+                    </a:ln>
+                    <a:solidFill>
+                      <a:prstClr val="black"/>
+                    </a:solidFill>
+                    <a:effectLst/>
+                    <a:uLnTx/>
+                    <a:uFillTx/>
+                    <a:latin typeface="Calibri" panose="020F0502020204030204"/>
+                    <a:ea typeface="+mn-ea"/>
+                    <a:cs typeface="+mn-cs"/>
+                  </a:rPr>
+                  <a:t>SSM Session </a:t>
+                </a:r>
+              </a:p>
+              <a:p>
+                <a:pPr marL="0" marR="0" lvl="0" indent="0" algn="l" defTabSz="914400" rtl="0" eaLnBrk="1" fontAlgn="auto" latinLnBrk="0" hangingPunct="1">
+                  <a:lnSpc>
+                    <a:spcPct val="100000"/>
+                  </a:lnSpc>
+                  <a:spcBef>
+                    <a:spcPts val="0"/>
+                  </a:spcBef>
+                  <a:spcAft>
+                    <a:spcPts val="0"/>
+                  </a:spcAft>
+                  <a:buClrTx/>
+                  <a:buSzTx/>
+                  <a:buFontTx/>
+                  <a:buNone/>
+                  <a:tabLst/>
+                  <a:defRPr/>
+                </a:pPr>
+                <a:r>
+                  <a:rPr kumimoji="0" lang="en-US" sz="700" b="0" i="0" u="none" strike="noStrike" kern="1200" cap="none" spc="0" normalizeH="0" baseline="0" noProof="0" dirty="0">
+                    <a:ln>
+                      <a:noFill/>
+                    </a:ln>
+                    <a:solidFill>
+                      <a:prstClr val="black"/>
+                    </a:solidFill>
+                    <a:effectLst/>
+                    <a:uLnTx/>
+                    <a:uFillTx/>
+                    <a:latin typeface="Calibri" panose="020F0502020204030204"/>
+                    <a:ea typeface="+mn-ea"/>
+                    <a:cs typeface="+mn-cs"/>
+                  </a:rPr>
+                  <a:t>Manager</a:t>
+                </a:r>
+              </a:p>
+            </p:txBody>
+          </p:sp>
+        </p:grpSp>
+        <p:grpSp>
+          <p:nvGrpSpPr>
+            <p:cNvPr id="41" name="Group 40">
+              <a:extLst>
+                <a:ext uri="{FF2B5EF4-FFF2-40B4-BE49-F238E27FC236}">
+                  <a16:creationId xmlns:a16="http://schemas.microsoft.com/office/drawing/2014/main" id="{1A18F4FE-F9CC-0C56-8412-E033B06B41B2}"/>
+                </a:ext>
+              </a:extLst>
+            </p:cNvPr>
+            <p:cNvGrpSpPr/>
+            <p:nvPr/>
+          </p:nvGrpSpPr>
+          <p:grpSpPr>
+            <a:xfrm>
+              <a:off x="2216552" y="5756362"/>
+              <a:ext cx="1234766" cy="274320"/>
+              <a:chOff x="2216552" y="308590"/>
+              <a:chExt cx="1234766" cy="274320"/>
+            </a:xfrm>
+          </p:grpSpPr>
+          <p:sp>
+            <p:nvSpPr>
+              <p:cNvPr id="42" name="TextBox 17">
+                <a:extLst>
+                  <a:ext uri="{FF2B5EF4-FFF2-40B4-BE49-F238E27FC236}">
+                    <a16:creationId xmlns:a16="http://schemas.microsoft.com/office/drawing/2014/main" id="{EEC41D50-B9F2-43BA-F1E7-2AB4A2F5027F}"/>
+                  </a:ext>
+                  <a:ext uri="{C183D7F6-B498-43B3-948B-1728B52AA6E4}">
+                    <adec:decorative xmlns:adec="http://schemas.microsoft.com/office/drawing/2017/decorative" val="1"/>
+                  </a:ext>
+                </a:extLst>
+              </p:cNvPr>
+              <p:cNvSpPr txBox="1">
+                <a:spLocks noChangeArrowheads="1"/>
+              </p:cNvSpPr>
+              <p:nvPr/>
+            </p:nvSpPr>
+            <p:spPr bwMode="auto">
+              <a:xfrm>
+                <a:off x="2216552" y="345722"/>
+                <a:ext cx="1234766" cy="200055"/>
+              </a:xfrm>
+              <a:prstGeom prst="rect">
+                <a:avLst/>
+              </a:prstGeom>
+              <a:noFill/>
+              <a:ln>
+                <a:noFill/>
+              </a:ln>
+              <a:extLst>
+                <a:ext uri="{909E8E84-426E-40DD-AFC4-6F175D3DCCD1}">
+                  <a14:hiddenFill xmlns:a14="http://schemas.microsoft.com/office/drawing/2010/main">
+                    <a:solidFill>
+                      <a:srgbClr val="FFFFFF"/>
+                    </a:solidFill>
+                  </a14:hiddenFill>
+                </a:ext>
+                <a:ext uri="{91240B29-F687-4F45-9708-019B960494DF}">
+                  <a14:hiddenLine xmlns:a14="http://schemas.microsoft.com/office/drawing/2010/main" w="9525">
+                    <a:solidFill>
+                      <a:srgbClr val="000000"/>
+                    </a:solidFill>
+                    <a:miter lim="800000"/>
+                    <a:headEnd/>
+                    <a:tailEnd/>
+                  </a14:hiddenLine>
+                </a:ext>
+              </a:extLst>
+            </p:spPr>
+            <p:txBody>
+              <a:bodyPr wrap="square">
+                <a:spAutoFit/>
+              </a:bodyPr>
+              <a:lstStyle>
+                <a:lvl1pPr>
+                  <a:defRPr>
+                    <a:solidFill>
+                      <a:schemeClr val="tx1"/>
+                    </a:solidFill>
+                    <a:latin typeface="Calibri" panose="020F0502020204030204" pitchFamily="34" charset="0"/>
+                  </a:defRPr>
+                </a:lvl1pPr>
+                <a:lvl2pPr marL="742950" indent="-285750">
+                  <a:defRPr>
+                    <a:solidFill>
+                      <a:schemeClr val="tx1"/>
+                    </a:solidFill>
+                    <a:latin typeface="Calibri" panose="020F0502020204030204" pitchFamily="34" charset="0"/>
+                  </a:defRPr>
+                </a:lvl2pPr>
+                <a:lvl3pPr marL="1143000" indent="-228600">
+                  <a:defRPr>
+                    <a:solidFill>
+                      <a:schemeClr val="tx1"/>
+                    </a:solidFill>
+                    <a:latin typeface="Calibri" panose="020F0502020204030204" pitchFamily="34" charset="0"/>
+                  </a:defRPr>
+                </a:lvl3pPr>
+                <a:lvl4pPr marL="1600200" indent="-228600">
+                  <a:defRPr>
+                    <a:solidFill>
+                      <a:schemeClr val="tx1"/>
+                    </a:solidFill>
+                    <a:latin typeface="Calibri" panose="020F0502020204030204" pitchFamily="34" charset="0"/>
+                  </a:defRPr>
+                </a:lvl4pPr>
+                <a:lvl5pPr marL="2057400" indent="-228600">
+                  <a:defRPr>
+                    <a:solidFill>
+                      <a:schemeClr val="tx1"/>
+                    </a:solidFill>
+                    <a:latin typeface="Calibri" panose="020F0502020204030204" pitchFamily="34" charset="0"/>
+                  </a:defRPr>
+                </a:lvl5pPr>
+                <a:lvl6pPr marL="2514600" indent="-228600" eaLnBrk="0" fontAlgn="base" hangingPunct="0">
+                  <a:spcBef>
+                    <a:spcPct val="0"/>
+                  </a:spcBef>
+                  <a:spcAft>
+                    <a:spcPct val="0"/>
+                  </a:spcAft>
+                  <a:defRPr>
+                    <a:solidFill>
+                      <a:schemeClr val="tx1"/>
+                    </a:solidFill>
+                    <a:latin typeface="Calibri" panose="020F0502020204030204" pitchFamily="34" charset="0"/>
+                  </a:defRPr>
+                </a:lvl6pPr>
+                <a:lvl7pPr marL="2971800" indent="-228600" eaLnBrk="0" fontAlgn="base" hangingPunct="0">
+                  <a:spcBef>
+                    <a:spcPct val="0"/>
+                  </a:spcBef>
+                  <a:spcAft>
+                    <a:spcPct val="0"/>
+                  </a:spcAft>
+                  <a:defRPr>
+                    <a:solidFill>
+                      <a:schemeClr val="tx1"/>
+                    </a:solidFill>
+                    <a:latin typeface="Calibri" panose="020F0502020204030204" pitchFamily="34" charset="0"/>
+                  </a:defRPr>
+                </a:lvl7pPr>
+                <a:lvl8pPr marL="3429000" indent="-228600" eaLnBrk="0" fontAlgn="base" hangingPunct="0">
+                  <a:spcBef>
+                    <a:spcPct val="0"/>
+                  </a:spcBef>
+                  <a:spcAft>
+                    <a:spcPct val="0"/>
+                  </a:spcAft>
+                  <a:defRPr>
+                    <a:solidFill>
+                      <a:schemeClr val="tx1"/>
+                    </a:solidFill>
+                    <a:latin typeface="Calibri" panose="020F0502020204030204" pitchFamily="34" charset="0"/>
+                  </a:defRPr>
+                </a:lvl8pPr>
+                <a:lvl9pPr marL="3886200" indent="-228600" eaLnBrk="0" fontAlgn="base" hangingPunct="0">
+                  <a:spcBef>
+                    <a:spcPct val="0"/>
+                  </a:spcBef>
+                  <a:spcAft>
+                    <a:spcPct val="0"/>
+                  </a:spcAft>
+                  <a:defRPr>
+                    <a:solidFill>
+                      <a:schemeClr val="tx1"/>
+                    </a:solidFill>
+                    <a:latin typeface="Calibri" panose="020F0502020204030204" pitchFamily="34" charset="0"/>
+                  </a:defRPr>
+                </a:lvl9pPr>
+              </a:lstStyle>
+              <a:p>
+                <a:pPr marL="0" marR="0" lvl="0" indent="0" algn="ctr" defTabSz="914400" rtl="0" eaLnBrk="1" fontAlgn="auto" latinLnBrk="0" hangingPunct="1">
+                  <a:lnSpc>
+                    <a:spcPct val="100000"/>
+                  </a:lnSpc>
+                  <a:spcBef>
+                    <a:spcPts val="0"/>
+                  </a:spcBef>
+                  <a:spcAft>
+                    <a:spcPts val="0"/>
+                  </a:spcAft>
+                  <a:buClrTx/>
+                  <a:buSzTx/>
+                  <a:buFontTx/>
+                  <a:buNone/>
+                  <a:tabLst/>
+                  <a:defRPr/>
+                </a:pPr>
+                <a:r>
+                  <a:rPr kumimoji="0" lang="en-US" altLang="en-US" sz="700" b="0" i="0" u="none" strike="noStrike" kern="1200" cap="none" spc="0" normalizeH="0" baseline="0" noProof="0" dirty="0">
+                    <a:ln>
+                      <a:noFill/>
+                    </a:ln>
+                    <a:solidFill>
+                      <a:prstClr val="black"/>
+                    </a:solidFill>
+                    <a:effectLst/>
+                    <a:uLnTx/>
+                    <a:uFillTx/>
+                    <a:latin typeface="Arial" panose="020B0604020202020204" pitchFamily="34" charset="0"/>
+                    <a:ea typeface="Amazon Ember" panose="020B0603020204020204" pitchFamily="34" charset="0"/>
+                    <a:cs typeface="Arial" panose="020B0604020202020204" pitchFamily="34" charset="0"/>
+                  </a:rPr>
+                  <a:t>NAT Gateway</a:t>
+                </a:r>
+              </a:p>
+            </p:txBody>
+          </p:sp>
+          <p:pic>
+            <p:nvPicPr>
+              <p:cNvPr id="43" name="Graphic 35">
+                <a:extLst>
+                  <a:ext uri="{FF2B5EF4-FFF2-40B4-BE49-F238E27FC236}">
+                    <a16:creationId xmlns:a16="http://schemas.microsoft.com/office/drawing/2014/main" id="{F9D46BAD-403B-8A04-D9EB-D62196307F2B}"/>
+                  </a:ext>
+                  <a:ext uri="{C183D7F6-B498-43B3-948B-1728B52AA6E4}">
+                    <adec:decorative xmlns:adec="http://schemas.microsoft.com/office/drawing/2017/decorative" val="1"/>
+                  </a:ext>
+                </a:extLst>
+              </p:cNvPr>
+              <p:cNvPicPr>
+                <a:picLocks noChangeAspect="1" noChangeArrowheads="1"/>
+              </p:cNvPicPr>
+              <p:nvPr/>
+            </p:nvPicPr>
+            <p:blipFill>
+              <a:blip>
+                <a:extLst>
+                  <a:ext uri="{96DAC541-7B7A-43D3-8B79-37D633B846F1}">
+                    <asvg:svgBlip xmlns:asvg="http://schemas.microsoft.com/office/drawing/2016/SVG/main" r:embed="rId15"/>
+                  </a:ext>
+                </a:extLst>
+              </a:blip>
+              <a:srcRect/>
+              <a:stretch/>
+            </p:blipFill>
+            <p:spPr bwMode="auto">
+              <a:xfrm>
+                <a:off x="2216552" y="308590"/>
+                <a:ext cx="274320" cy="274320"/>
+              </a:xfrm>
+              <a:prstGeom prst="rect">
+                <a:avLst/>
+              </a:prstGeom>
+              <a:noFill/>
+              <a:ln>
+                <a:noFill/>
+              </a:ln>
+              <a:extLst>
+                <a:ext uri="{909E8E84-426E-40DD-AFC4-6F175D3DCCD1}">
+                  <a14:hiddenFill xmlns:a14="http://schemas.microsoft.com/office/drawing/2010/main">
+                    <a:solidFill>
+                      <a:srgbClr val="FFFFFF"/>
+                    </a:solidFill>
+                  </a14:hiddenFill>
+                </a:ext>
+                <a:ext uri="{91240B29-F687-4F45-9708-019B960494DF}">
+                  <a14:hiddenLine xmlns:a14="http://schemas.microsoft.com/office/drawing/2010/main" w="9525">
+                    <a:solidFill>
+                      <a:srgbClr val="000000"/>
+                    </a:solidFill>
+                    <a:miter lim="800000"/>
+                    <a:headEnd/>
+                    <a:tailEnd/>
+                  </a14:hiddenLine>
+                </a:ext>
+              </a:extLst>
+            </p:spPr>
+          </p:pic>
+        </p:grpSp>
+      </p:grpSp>
+      <p:pic>
+        <p:nvPicPr>
+          <p:cNvPr id="64" name="Graphic 17" descr="Amazon Cognito service icon.">
+            <a:extLst>
+              <a:ext uri="{FF2B5EF4-FFF2-40B4-BE49-F238E27FC236}">
+                <a16:creationId xmlns:a16="http://schemas.microsoft.com/office/drawing/2014/main" id="{58CD06B2-0B12-132F-AEAC-A551F50B5F97}"/>
+              </a:ext>
+            </a:extLst>
+          </p:cNvPr>
+          <p:cNvPicPr>
+            <a:picLocks noChangeAspect="1" noChangeArrowheads="1"/>
+          </p:cNvPicPr>
+          <p:nvPr/>
+        </p:nvPicPr>
+        <p:blipFill>
+          <a:blip>
+            <a:extLst>
+              <a:ext uri="{96DAC541-7B7A-43D3-8B79-37D633B846F1}">
+                <asvg:svgBlip xmlns:asvg="http://schemas.microsoft.com/office/drawing/2016/SVG/main" r:embed="rId16"/>
+              </a:ext>
+            </a:extLst>
+          </a:blip>
+          <a:srcRect/>
+          <a:stretch/>
+        </p:blipFill>
+        <p:spPr bwMode="auto">
+          <a:xfrm>
+            <a:off x="2043651" y="1900157"/>
+            <a:ext cx="365760" cy="365760"/>
+          </a:xfrm>
+          <a:prstGeom prst="rect">
+            <a:avLst/>
+          </a:prstGeom>
+          <a:noFill/>
+          <a:ln>
+            <a:noFill/>
+          </a:ln>
+          <a:extLst>
+            <a:ext uri="{909E8E84-426E-40DD-AFC4-6F175D3DCCD1}">
+              <a14:hiddenFill xmlns:a14="http://schemas.microsoft.com/office/drawing/2010/main">
+                <a:solidFill>
+                  <a:srgbClr val="FFFFFF"/>
+                </a:solidFill>
+              </a14:hiddenFill>
+            </a:ext>
+            <a:ext uri="{91240B29-F687-4F45-9708-019B960494DF}">
+              <a14:hiddenLine xmlns:a14="http://schemas.microsoft.com/office/drawing/2010/main" w="9525">
+                <a:solidFill>
+                  <a:srgbClr val="000000"/>
+                </a:solidFill>
+                <a:miter lim="800000"/>
+                <a:headEnd/>
+                <a:tailEnd/>
+              </a14:hiddenLine>
+            </a:ext>
+          </a:extLst>
+        </p:spPr>
+      </p:pic>
+      <p:sp>
+        <p:nvSpPr>
+          <p:cNvPr id="65" name="TextBox 11">
+            <a:extLst>
+              <a:ext uri="{FF2B5EF4-FFF2-40B4-BE49-F238E27FC236}">
+                <a16:creationId xmlns:a16="http://schemas.microsoft.com/office/drawing/2014/main" id="{BA0F96AD-5134-1424-DD2F-4C85F772DDB5}"/>
+              </a:ext>
+            </a:extLst>
+          </p:cNvPr>
+          <p:cNvSpPr txBox="1">
+            <a:spLocks noChangeArrowheads="1"/>
+          </p:cNvSpPr>
+          <p:nvPr/>
+        </p:nvSpPr>
+        <p:spPr bwMode="auto">
+          <a:xfrm>
+            <a:off x="1809336" y="2273926"/>
+            <a:ext cx="834390" cy="400110"/>
+          </a:xfrm>
+          <a:prstGeom prst="rect">
+            <a:avLst/>
+          </a:prstGeom>
+          <a:noFill/>
+          <a:ln>
+            <a:noFill/>
+          </a:ln>
+          <a:extLst>
+            <a:ext uri="{909E8E84-426E-40DD-AFC4-6F175D3DCCD1}">
+              <a14:hiddenFill xmlns:a14="http://schemas.microsoft.com/office/drawing/2010/main">
+                <a:solidFill>
+                  <a:srgbClr val="FFFFFF"/>
+                </a:solidFill>
+              </a14:hiddenFill>
+            </a:ext>
+            <a:ext uri="{91240B29-F687-4F45-9708-019B960494DF}">
+              <a14:hiddenLine xmlns:a14="http://schemas.microsoft.com/office/drawing/2010/main" w="9525">
+                <a:solidFill>
+                  <a:srgbClr val="000000"/>
+                </a:solidFill>
+                <a:miter lim="800000"/>
+                <a:headEnd/>
+                <a:tailEnd/>
+              </a14:hiddenLine>
+            </a:ext>
+          </a:extLst>
+        </p:spPr>
+        <p:txBody>
+          <a:bodyPr wrap="square">
+            <a:spAutoFit/>
+          </a:bodyPr>
+          <a:lstStyle>
+            <a:lvl1pPr>
+              <a:defRPr>
+                <a:solidFill>
+                  <a:schemeClr val="tx1"/>
+                </a:solidFill>
+                <a:latin typeface="Calibri" panose="020F0502020204030204" pitchFamily="34" charset="0"/>
+              </a:defRPr>
+            </a:lvl1pPr>
+            <a:lvl2pPr marL="742950" indent="-285750">
+              <a:defRPr>
+                <a:solidFill>
+                  <a:schemeClr val="tx1"/>
+                </a:solidFill>
+                <a:latin typeface="Calibri" panose="020F0502020204030204" pitchFamily="34" charset="0"/>
+              </a:defRPr>
+            </a:lvl2pPr>
+            <a:lvl3pPr marL="1143000" indent="-228600">
+              <a:defRPr>
+                <a:solidFill>
+                  <a:schemeClr val="tx1"/>
+                </a:solidFill>
+                <a:latin typeface="Calibri" panose="020F0502020204030204" pitchFamily="34" charset="0"/>
+              </a:defRPr>
+            </a:lvl3pPr>
+            <a:lvl4pPr marL="1600200" indent="-228600">
+              <a:defRPr>
+                <a:solidFill>
+                  <a:schemeClr val="tx1"/>
+                </a:solidFill>
+                <a:latin typeface="Calibri" panose="020F0502020204030204" pitchFamily="34" charset="0"/>
+              </a:defRPr>
+            </a:lvl4pPr>
+            <a:lvl5pPr marL="2057400" indent="-228600">
+              <a:defRPr>
+                <a:solidFill>
+                  <a:schemeClr val="tx1"/>
+                </a:solidFill>
+                <a:latin typeface="Calibri" panose="020F0502020204030204" pitchFamily="34" charset="0"/>
+              </a:defRPr>
+            </a:lvl5pPr>
+            <a:lvl6pPr marL="2514600" indent="-228600" eaLnBrk="0" fontAlgn="base" hangingPunct="0">
+              <a:spcBef>
+                <a:spcPct val="0"/>
+              </a:spcBef>
+              <a:spcAft>
+                <a:spcPct val="0"/>
+              </a:spcAft>
+              <a:defRPr>
+                <a:solidFill>
+                  <a:schemeClr val="tx1"/>
+                </a:solidFill>
+                <a:latin typeface="Calibri" panose="020F0502020204030204" pitchFamily="34" charset="0"/>
+              </a:defRPr>
+            </a:lvl6pPr>
+            <a:lvl7pPr marL="2971800" indent="-228600" eaLnBrk="0" fontAlgn="base" hangingPunct="0">
+              <a:spcBef>
+                <a:spcPct val="0"/>
+              </a:spcBef>
+              <a:spcAft>
+                <a:spcPct val="0"/>
+              </a:spcAft>
+              <a:defRPr>
+                <a:solidFill>
+                  <a:schemeClr val="tx1"/>
+                </a:solidFill>
+                <a:latin typeface="Calibri" panose="020F0502020204030204" pitchFamily="34" charset="0"/>
+              </a:defRPr>
+            </a:lvl7pPr>
+            <a:lvl8pPr marL="3429000" indent="-228600" eaLnBrk="0" fontAlgn="base" hangingPunct="0">
+              <a:spcBef>
+                <a:spcPct val="0"/>
+              </a:spcBef>
+              <a:spcAft>
+                <a:spcPct val="0"/>
+              </a:spcAft>
+              <a:defRPr>
+                <a:solidFill>
+                  <a:schemeClr val="tx1"/>
+                </a:solidFill>
+                <a:latin typeface="Calibri" panose="020F0502020204030204" pitchFamily="34" charset="0"/>
+              </a:defRPr>
+            </a:lvl8pPr>
+            <a:lvl9pPr marL="3886200" indent="-228600" eaLnBrk="0" fontAlgn="base" hangingPunct="0">
+              <a:spcBef>
+                <a:spcPct val="0"/>
+              </a:spcBef>
+              <a:spcAft>
+                <a:spcPct val="0"/>
+              </a:spcAft>
+              <a:defRPr>
+                <a:solidFill>
+                  <a:schemeClr val="tx1"/>
+                </a:solidFill>
+                <a:latin typeface="Calibri" panose="020F0502020204030204" pitchFamily="34" charset="0"/>
+              </a:defRPr>
+            </a:lvl9pPr>
+          </a:lstStyle>
+          <a:p>
+            <a:pPr algn="ctr" fontAlgn="base">
+              <a:spcBef>
+                <a:spcPct val="0"/>
+              </a:spcBef>
+              <a:spcAft>
+                <a:spcPct val="0"/>
+              </a:spcAft>
+            </a:pPr>
+            <a:r>
+              <a:rPr lang="en-US" altLang="en-US" sz="1000" dirty="0">
+                <a:solidFill>
+                  <a:srgbClr val="FFFFFF"/>
+                </a:solidFill>
+                <a:latin typeface="Arial" panose="020B0604020202020204" pitchFamily="34" charset="0"/>
+                <a:ea typeface="Amazon Ember" panose="020B0603020204020204" pitchFamily="34" charset="0"/>
+                <a:cs typeface="Arial" panose="020B0604020202020204" pitchFamily="34" charset="0"/>
+              </a:rPr>
+              <a:t>Amazon Cognito</a:t>
+            </a:r>
+          </a:p>
+        </p:txBody>
+      </p:sp>
+      <p:pic>
+        <p:nvPicPr>
+          <p:cNvPr id="66" name="Graphic 8" descr="Amazon Simple Storage Service (Amazon S3) service icon.">
+            <a:extLst>
+              <a:ext uri="{FF2B5EF4-FFF2-40B4-BE49-F238E27FC236}">
+                <a16:creationId xmlns:a16="http://schemas.microsoft.com/office/drawing/2014/main" id="{4CF1F16A-0BE4-1512-7307-6E9876F6ECAD}"/>
+              </a:ext>
+            </a:extLst>
+          </p:cNvPr>
+          <p:cNvPicPr>
+            <a:picLocks noChangeAspect="1" noChangeArrowheads="1"/>
+          </p:cNvPicPr>
+          <p:nvPr/>
+        </p:nvPicPr>
+        <p:blipFill>
+          <a:blip>
+            <a:extLst>
+              <a:ext uri="{96DAC541-7B7A-43D3-8B79-37D633B846F1}">
+                <asvg:svgBlip xmlns:asvg="http://schemas.microsoft.com/office/drawing/2016/SVG/main" r:embed="rId7"/>
+              </a:ext>
+            </a:extLst>
+          </a:blip>
+          <a:srcRect/>
+          <a:stretch/>
+        </p:blipFill>
+        <p:spPr bwMode="auto">
+          <a:xfrm>
+            <a:off x="5134272" y="4758126"/>
+            <a:ext cx="274320" cy="274320"/>
+          </a:xfrm>
+          <a:prstGeom prst="rect">
+            <a:avLst/>
+          </a:prstGeom>
+          <a:noFill/>
+          <a:ln>
+            <a:noFill/>
+          </a:ln>
+          <a:extLst>
+            <a:ext uri="{909E8E84-426E-40DD-AFC4-6F175D3DCCD1}">
+              <a14:hiddenFill xmlns:a14="http://schemas.microsoft.com/office/drawing/2010/main">
+                <a:solidFill>
+                  <a:srgbClr val="FFFFFF"/>
+                </a:solidFill>
+              </a14:hiddenFill>
+            </a:ext>
+            <a:ext uri="{91240B29-F687-4F45-9708-019B960494DF}">
+              <a14:hiddenLine xmlns:a14="http://schemas.microsoft.com/office/drawing/2010/main" w="9525">
+                <a:solidFill>
+                  <a:srgbClr val="000000"/>
+                </a:solidFill>
+                <a:miter lim="800000"/>
+                <a:headEnd/>
+                <a:tailEnd/>
+              </a14:hiddenLine>
+            </a:ext>
+          </a:extLst>
+        </p:spPr>
+      </p:pic>
+      <p:pic>
+        <p:nvPicPr>
+          <p:cNvPr id="67" name="Graphic 23" descr="Amazon DynamoDB service icon.">
+            <a:extLst>
+              <a:ext uri="{FF2B5EF4-FFF2-40B4-BE49-F238E27FC236}">
+                <a16:creationId xmlns:a16="http://schemas.microsoft.com/office/drawing/2014/main" id="{10722A4A-241B-0E6F-5E8D-C6D9FFD85DA2}"/>
+              </a:ext>
+            </a:extLst>
+          </p:cNvPr>
+          <p:cNvPicPr>
+            <a:picLocks noChangeAspect="1" noChangeArrowheads="1"/>
+          </p:cNvPicPr>
+          <p:nvPr/>
+        </p:nvPicPr>
+        <p:blipFill>
+          <a:blip>
+            <a:extLst>
+              <a:ext uri="{96DAC541-7B7A-43D3-8B79-37D633B846F1}">
+                <asvg:svgBlip xmlns:asvg="http://schemas.microsoft.com/office/drawing/2016/SVG/main" r:embed="rId17"/>
+              </a:ext>
+            </a:extLst>
+          </a:blip>
+          <a:srcRect/>
+          <a:stretch/>
+        </p:blipFill>
+        <p:spPr bwMode="auto">
+          <a:xfrm>
+            <a:off x="4322005" y="4782414"/>
+            <a:ext cx="274320" cy="274320"/>
+          </a:xfrm>
+          <a:prstGeom prst="rect">
+            <a:avLst/>
+          </a:prstGeom>
+          <a:noFill/>
+          <a:ln>
+            <a:noFill/>
+          </a:ln>
+          <a:extLst>
+            <a:ext uri="{909E8E84-426E-40DD-AFC4-6F175D3DCCD1}">
+              <a14:hiddenFill xmlns:a14="http://schemas.microsoft.com/office/drawing/2010/main">
+                <a:solidFill>
+                  <a:srgbClr val="FFFFFF"/>
+                </a:solidFill>
+              </a14:hiddenFill>
+            </a:ext>
+            <a:ext uri="{91240B29-F687-4F45-9708-019B960494DF}">
+              <a14:hiddenLine xmlns:a14="http://schemas.microsoft.com/office/drawing/2010/main" w="9525">
+                <a:solidFill>
+                  <a:srgbClr val="000000"/>
+                </a:solidFill>
+                <a:miter lim="800000"/>
+                <a:headEnd/>
+                <a:tailEnd/>
+              </a14:hiddenLine>
+            </a:ext>
+          </a:extLst>
+        </p:spPr>
+      </p:pic>
+      <p:pic>
+        <p:nvPicPr>
+          <p:cNvPr id="68" name="lambda" descr="Lambda service icon.">
+            <a:extLst>
+              <a:ext uri="{FF2B5EF4-FFF2-40B4-BE49-F238E27FC236}">
+                <a16:creationId xmlns:a16="http://schemas.microsoft.com/office/drawing/2014/main" id="{2721E76C-373A-F8DC-FB82-E4C5CD6F3386}"/>
+              </a:ext>
+            </a:extLst>
+          </p:cNvPr>
+          <p:cNvPicPr>
+            <a:picLocks noChangeAspect="1" noChangeArrowheads="1"/>
+          </p:cNvPicPr>
+          <p:nvPr/>
+        </p:nvPicPr>
+        <p:blipFill>
+          <a:blip>
+            <a:extLst>
+              <a:ext uri="{96DAC541-7B7A-43D3-8B79-37D633B846F1}">
+                <asvg:svgBlip xmlns:asvg="http://schemas.microsoft.com/office/drawing/2016/SVG/main" r:embed="rId18"/>
+              </a:ext>
+            </a:extLst>
+          </a:blip>
+          <a:srcRect/>
+          <a:stretch/>
+        </p:blipFill>
+        <p:spPr bwMode="auto">
+          <a:xfrm>
+            <a:off x="4636133" y="3753985"/>
+            <a:ext cx="274320" cy="274320"/>
+          </a:xfrm>
+          <a:prstGeom prst="rect">
+            <a:avLst/>
+          </a:prstGeom>
+          <a:noFill/>
+          <a:ln>
+            <a:noFill/>
+          </a:ln>
+          <a:extLst>
+            <a:ext uri="{909E8E84-426E-40DD-AFC4-6F175D3DCCD1}">
+              <a14:hiddenFill xmlns:a14="http://schemas.microsoft.com/office/drawing/2010/main">
+                <a:solidFill>
+                  <a:srgbClr val="FFFFFF"/>
+                </a:solidFill>
+              </a14:hiddenFill>
+            </a:ext>
+            <a:ext uri="{91240B29-F687-4F45-9708-019B960494DF}">
+              <a14:hiddenLine xmlns:a14="http://schemas.microsoft.com/office/drawing/2010/main" w="9525">
+                <a:solidFill>
+                  <a:srgbClr val="000000"/>
+                </a:solidFill>
+                <a:miter lim="800000"/>
+                <a:headEnd/>
+                <a:tailEnd/>
+              </a14:hiddenLine>
+            </a:ext>
+          </a:extLst>
+        </p:spPr>
+      </p:pic>
+      <p:pic>
+        <p:nvPicPr>
+          <p:cNvPr id="69" name="Graphic 68" descr="Endpoints resource icon for the Amazon VPC service.&#10;">
+            <a:extLst>
+              <a:ext uri="{FF2B5EF4-FFF2-40B4-BE49-F238E27FC236}">
+                <a16:creationId xmlns:a16="http://schemas.microsoft.com/office/drawing/2014/main" id="{212AC547-760E-A7D5-DDA7-1C75CD046046}"/>
+              </a:ext>
+            </a:extLst>
+          </p:cNvPr>
+          <p:cNvPicPr>
+            <a:picLocks noChangeAspect="1"/>
+          </p:cNvPicPr>
+          <p:nvPr/>
+        </p:nvPicPr>
+        <p:blipFill>
+          <a:blip>
+            <a:extLst>
+              <a:ext uri="{96DAC541-7B7A-43D3-8B79-37D633B846F1}">
+                <asvg:svgBlip xmlns:asvg="http://schemas.microsoft.com/office/drawing/2016/SVG/main" r:embed="rId8"/>
+              </a:ext>
+            </a:extLst>
+          </a:blip>
+          <a:stretch>
+            <a:fillRect/>
+          </a:stretch>
+        </p:blipFill>
+        <p:spPr>
+          <a:xfrm>
+            <a:off x="5091487" y="3753985"/>
+            <a:ext cx="274320" cy="274320"/>
+          </a:xfrm>
+          <a:prstGeom prst="rect">
+            <a:avLst/>
+          </a:prstGeom>
+        </p:spPr>
+      </p:pic>
+      <p:cxnSp>
+        <p:nvCxnSpPr>
+          <p:cNvPr id="70" name="Connector: Elbow 69">
+            <a:extLst>
+              <a:ext uri="{FF2B5EF4-FFF2-40B4-BE49-F238E27FC236}">
+                <a16:creationId xmlns:a16="http://schemas.microsoft.com/office/drawing/2014/main" id="{ABC23582-23AB-E5A0-4286-88A40793360C}"/>
+              </a:ext>
+            </a:extLst>
+          </p:cNvPr>
+          <p:cNvCxnSpPr>
+            <a:cxnSpLocks/>
+            <a:stCxn id="69" idx="2"/>
+            <a:endCxn id="67" idx="0"/>
+          </p:cNvCxnSpPr>
+          <p:nvPr/>
+        </p:nvCxnSpPr>
+        <p:spPr>
+          <a:xfrm rot="5400000">
+            <a:off x="4466852" y="4020618"/>
+            <a:ext cx="754109" cy="769482"/>
+          </a:xfrm>
+          <a:prstGeom prst="bentConnector3">
+            <a:avLst>
+              <a:gd name="adj1" fmla="val 20949"/>
+            </a:avLst>
+          </a:prstGeom>
+          <a:ln w="28575">
+            <a:tailEnd type="triangle"/>
+          </a:ln>
+        </p:spPr>
+        <p:style>
+          <a:lnRef idx="1">
+            <a:schemeClr val="accent1"/>
+          </a:lnRef>
+          <a:fillRef idx="0">
+            <a:schemeClr val="accent1"/>
+          </a:fillRef>
+          <a:effectRef idx="0">
+            <a:schemeClr val="accent1"/>
+          </a:effectRef>
+          <a:fontRef idx="minor">
+            <a:schemeClr val="tx1"/>
+          </a:fontRef>
+        </p:style>
+      </p:cxnSp>
+      <p:cxnSp>
+        <p:nvCxnSpPr>
+          <p:cNvPr id="71" name="Connector: Elbow 70">
+            <a:extLst>
+              <a:ext uri="{FF2B5EF4-FFF2-40B4-BE49-F238E27FC236}">
+                <a16:creationId xmlns:a16="http://schemas.microsoft.com/office/drawing/2014/main" id="{7A14A33A-596C-BCE9-336D-ACE76742A452}"/>
+              </a:ext>
+            </a:extLst>
+          </p:cNvPr>
+          <p:cNvCxnSpPr>
+            <a:cxnSpLocks/>
+            <a:stCxn id="69" idx="2"/>
+            <a:endCxn id="66" idx="0"/>
+          </p:cNvCxnSpPr>
+          <p:nvPr/>
+        </p:nvCxnSpPr>
+        <p:spPr>
+          <a:xfrm rot="16200000" flipH="1">
+            <a:off x="4885129" y="4371822"/>
+            <a:ext cx="729821" cy="42785"/>
+          </a:xfrm>
+          <a:prstGeom prst="bentConnector3">
+            <a:avLst>
+              <a:gd name="adj1" fmla="val 21288"/>
+            </a:avLst>
+          </a:prstGeom>
+          <a:ln w="28575">
+            <a:tailEnd type="triangle"/>
+          </a:ln>
+        </p:spPr>
+        <p:style>
+          <a:lnRef idx="1">
+            <a:schemeClr val="accent1"/>
+          </a:lnRef>
+          <a:fillRef idx="0">
+            <a:schemeClr val="accent1"/>
+          </a:fillRef>
+          <a:effectRef idx="0">
+            <a:schemeClr val="accent1"/>
+          </a:effectRef>
+          <a:fontRef idx="minor">
+            <a:schemeClr val="tx1"/>
+          </a:fontRef>
+        </p:style>
+      </p:cxnSp>
+      <p:sp>
+        <p:nvSpPr>
+          <p:cNvPr id="72" name="TextBox 71">
+            <a:extLst>
+              <a:ext uri="{FF2B5EF4-FFF2-40B4-BE49-F238E27FC236}">
+                <a16:creationId xmlns:a16="http://schemas.microsoft.com/office/drawing/2014/main" id="{5FC13100-3E9F-753F-46A9-8EC01A8E9A11}"/>
+              </a:ext>
+            </a:extLst>
+          </p:cNvPr>
+          <p:cNvSpPr txBox="1"/>
+          <p:nvPr/>
+        </p:nvSpPr>
+        <p:spPr>
+          <a:xfrm>
+            <a:off x="5292471" y="3706479"/>
+            <a:ext cx="896399" cy="369332"/>
+          </a:xfrm>
+          <a:prstGeom prst="rect">
+            <a:avLst/>
+          </a:prstGeom>
+          <a:noFill/>
+        </p:spPr>
+        <p:txBody>
+          <a:bodyPr wrap="none" rtlCol="0">
+            <a:spAutoFit/>
+          </a:bodyPr>
+          <a:lstStyle/>
+          <a:p>
+            <a:pPr algn="ctr"/>
+            <a:r>
+              <a:rPr lang="en-US" sz="900" dirty="0">
+                <a:solidFill>
+                  <a:schemeClr val="bg1"/>
+                </a:solidFill>
+              </a:rPr>
+              <a:t>Interface VPC </a:t>
+            </a:r>
+          </a:p>
+          <a:p>
+            <a:pPr algn="ctr"/>
+            <a:r>
+              <a:rPr lang="en-US" sz="900" dirty="0">
+                <a:solidFill>
+                  <a:schemeClr val="bg1"/>
+                </a:solidFill>
+              </a:rPr>
+              <a:t>Endpoint</a:t>
+            </a:r>
+          </a:p>
+        </p:txBody>
+      </p:sp>
+      <p:cxnSp>
+        <p:nvCxnSpPr>
+          <p:cNvPr id="73" name="Straight Arrow Connector 72">
+            <a:extLst>
+              <a:ext uri="{FF2B5EF4-FFF2-40B4-BE49-F238E27FC236}">
+                <a16:creationId xmlns:a16="http://schemas.microsoft.com/office/drawing/2014/main" id="{42D21BED-7590-58BA-56C2-4D00F6D2FC02}"/>
+              </a:ext>
+            </a:extLst>
+          </p:cNvPr>
+          <p:cNvCxnSpPr>
+            <a:cxnSpLocks/>
+            <a:stCxn id="68" idx="3"/>
+          </p:cNvCxnSpPr>
+          <p:nvPr/>
+        </p:nvCxnSpPr>
+        <p:spPr>
+          <a:xfrm>
+            <a:off x="4910453" y="3891145"/>
+            <a:ext cx="223819" cy="0"/>
+          </a:xfrm>
+          <a:prstGeom prst="straightConnector1">
+            <a:avLst/>
+          </a:prstGeom>
+          <a:ln>
+            <a:tailEnd type="triangle"/>
+          </a:ln>
+        </p:spPr>
+        <p:style>
+          <a:lnRef idx="1">
+            <a:schemeClr val="accent2"/>
+          </a:lnRef>
+          <a:fillRef idx="0">
+            <a:schemeClr val="accent2"/>
+          </a:fillRef>
+          <a:effectRef idx="0">
+            <a:schemeClr val="accent2"/>
+          </a:effectRef>
+          <a:fontRef idx="minor">
+            <a:schemeClr val="tx1"/>
+          </a:fontRef>
+        </p:style>
+      </p:cxnSp>
+      <p:sp>
+        <p:nvSpPr>
+          <p:cNvPr id="80" name="Rectangle 79">
+            <a:extLst>
+              <a:ext uri="{FF2B5EF4-FFF2-40B4-BE49-F238E27FC236}">
+                <a16:creationId xmlns:a16="http://schemas.microsoft.com/office/drawing/2014/main" id="{235006C4-BA31-8940-6C4A-0126E1A42721}"/>
+              </a:ext>
+            </a:extLst>
+          </p:cNvPr>
+          <p:cNvSpPr/>
+          <p:nvPr/>
+        </p:nvSpPr>
+        <p:spPr>
+          <a:xfrm>
+            <a:off x="8580381" y="0"/>
+            <a:ext cx="3611619" cy="6858000"/>
+          </a:xfrm>
+          <a:prstGeom prst="rect">
+            <a:avLst/>
+          </a:prstGeom>
+          <a:solidFill>
+            <a:schemeClr val="bg2"/>
+          </a:solidFill>
+          <a:ln>
+            <a:noFill/>
+          </a:ln>
+        </p:spPr>
+        <p:style>
+          <a:lnRef idx="2">
+            <a:schemeClr val="accent1">
+              <a:shade val="15000"/>
+            </a:schemeClr>
+          </a:lnRef>
+          <a:fillRef idx="1">
+            <a:schemeClr val="accent1"/>
+          </a:fillRef>
+          <a:effectRef idx="0">
+            <a:schemeClr val="accent1"/>
+          </a:effectRef>
+          <a:fontRef idx="minor">
+            <a:schemeClr val="lt1"/>
+          </a:fontRef>
+        </p:style>
+        <p:txBody>
+          <a:bodyPr rtlCol="0" anchor="ctr"/>
+          <a:lstStyle/>
+          <a:p>
+            <a:pPr algn="ctr"/>
+            <a:endParaRPr lang="en-US" dirty="0"/>
+          </a:p>
+        </p:txBody>
+      </p:sp>
+      <p:sp>
+        <p:nvSpPr>
+          <p:cNvPr id="81" name="TextBox 80">
+            <a:extLst>
+              <a:ext uri="{FF2B5EF4-FFF2-40B4-BE49-F238E27FC236}">
+                <a16:creationId xmlns:a16="http://schemas.microsoft.com/office/drawing/2014/main" id="{38890B99-FE6E-9F3D-F994-155FA151C595}"/>
+              </a:ext>
+            </a:extLst>
+          </p:cNvPr>
+          <p:cNvSpPr txBox="1"/>
+          <p:nvPr/>
+        </p:nvSpPr>
+        <p:spPr>
+          <a:xfrm>
+            <a:off x="8838986" y="709241"/>
+            <a:ext cx="2724363" cy="2846933"/>
+          </a:xfrm>
+          <a:prstGeom prst="rect">
+            <a:avLst/>
+          </a:prstGeom>
+          <a:noFill/>
+        </p:spPr>
+        <p:txBody>
+          <a:bodyPr wrap="square" rtlCol="0">
+            <a:spAutoFit/>
+          </a:bodyPr>
+          <a:lstStyle/>
+          <a:p>
+            <a:r>
+              <a:rPr lang="en-US" dirty="0"/>
+              <a:t>Ask</a:t>
+            </a:r>
+          </a:p>
+          <a:p>
+            <a:endParaRPr lang="en-US" dirty="0"/>
+          </a:p>
+          <a:p>
+            <a:pPr marL="285750" indent="-285750">
+              <a:buFont typeface="Arial" panose="020B0604020202020204" pitchFamily="34" charset="0"/>
+              <a:buChar char="•"/>
+            </a:pPr>
+            <a:r>
+              <a:rPr lang="en-US" sz="1100" dirty="0"/>
+              <a:t>Are VPC Endpoints  used between AOI Gateway and Lambdas</a:t>
+            </a:r>
+          </a:p>
+          <a:p>
+            <a:pPr marL="285750" indent="-285750">
+              <a:buFont typeface="Arial" panose="020B0604020202020204" pitchFamily="34" charset="0"/>
+              <a:buChar char="•"/>
+            </a:pPr>
+            <a:r>
+              <a:rPr lang="en-US" sz="1100" dirty="0"/>
+              <a:t>Are Interface VPC Endpoints used between Lambdas and DynamoDB and S3?</a:t>
+            </a:r>
+          </a:p>
+          <a:p>
+            <a:pPr marL="285750" indent="-285750">
+              <a:buFont typeface="Arial" panose="020B0604020202020204" pitchFamily="34" charset="0"/>
+              <a:buChar char="•"/>
+            </a:pPr>
+            <a:r>
+              <a:rPr lang="en-US" sz="1100" dirty="0"/>
+              <a:t>Are Lambdas full insolated from AZ failures?</a:t>
+            </a:r>
+          </a:p>
+          <a:p>
+            <a:pPr marL="285750" indent="-285750">
+              <a:buFont typeface="Arial" panose="020B0604020202020204" pitchFamily="34" charset="0"/>
+              <a:buChar char="•"/>
+            </a:pPr>
+            <a:r>
+              <a:rPr lang="en-US" sz="1100" dirty="0"/>
+              <a:t>Where is SQS?</a:t>
+            </a:r>
+          </a:p>
+          <a:p>
+            <a:pPr marL="285750" indent="-285750">
+              <a:buFont typeface="Arial" panose="020B0604020202020204" pitchFamily="34" charset="0"/>
+              <a:buChar char="•"/>
+            </a:pPr>
+            <a:r>
+              <a:rPr lang="en-US" sz="1100" dirty="0"/>
+              <a:t>Where is SNS?</a:t>
+            </a:r>
+          </a:p>
+          <a:p>
+            <a:pPr marL="285750" indent="-285750">
+              <a:buFont typeface="Arial" panose="020B0604020202020204" pitchFamily="34" charset="0"/>
+              <a:buChar char="•"/>
+            </a:pPr>
+            <a:endParaRPr lang="en-US" sz="1100" dirty="0"/>
+          </a:p>
+          <a:p>
+            <a:pPr marL="285750" indent="-285750">
+              <a:buFont typeface="Arial" panose="020B0604020202020204" pitchFamily="34" charset="0"/>
+              <a:buChar char="•"/>
+            </a:pPr>
+            <a:endParaRPr lang="en-US" sz="1100" dirty="0"/>
+          </a:p>
+          <a:p>
+            <a:pPr marL="285750" indent="-285750">
+              <a:buFont typeface="Arial" panose="020B0604020202020204" pitchFamily="34" charset="0"/>
+              <a:buChar char="•"/>
+            </a:pPr>
+            <a:endParaRPr lang="en-US" sz="1100" dirty="0"/>
+          </a:p>
+          <a:p>
+            <a:pPr marL="285750" indent="-285750">
+              <a:buFont typeface="Arial" panose="020B0604020202020204" pitchFamily="34" charset="0"/>
+              <a:buChar char="•"/>
+            </a:pPr>
+            <a:endParaRPr lang="en-US" sz="1100" dirty="0"/>
+          </a:p>
+        </p:txBody>
+      </p:sp>
+      <p:pic>
+        <p:nvPicPr>
+          <p:cNvPr id="83" name="Graphic 26" descr="Amazon Simple Queue Service (Amazon SQS) service icon.">
+            <a:extLst>
+              <a:ext uri="{FF2B5EF4-FFF2-40B4-BE49-F238E27FC236}">
+                <a16:creationId xmlns:a16="http://schemas.microsoft.com/office/drawing/2014/main" id="{2AECED97-2D90-3AE8-2870-E04E5CB8BB31}"/>
+              </a:ext>
+            </a:extLst>
+          </p:cNvPr>
+          <p:cNvPicPr>
+            <a:picLocks noChangeAspect="1" noChangeArrowheads="1"/>
+          </p:cNvPicPr>
+          <p:nvPr/>
+        </p:nvPicPr>
+        <p:blipFill>
+          <a:blip>
+            <a:extLst>
+              <a:ext uri="{96DAC541-7B7A-43D3-8B79-37D633B846F1}">
+                <asvg:svgBlip xmlns:asvg="http://schemas.microsoft.com/office/drawing/2016/SVG/main" r:embed="rId19"/>
+              </a:ext>
+            </a:extLst>
+          </a:blip>
+          <a:srcRect/>
+          <a:stretch/>
+        </p:blipFill>
+        <p:spPr bwMode="auto">
+          <a:xfrm>
+            <a:off x="4415450" y="2897045"/>
+            <a:ext cx="274320" cy="274320"/>
+          </a:xfrm>
+          <a:prstGeom prst="rect">
+            <a:avLst/>
+          </a:prstGeom>
+          <a:noFill/>
+          <a:ln>
+            <a:noFill/>
+          </a:ln>
+          <a:extLst>
+            <a:ext uri="{909E8E84-426E-40DD-AFC4-6F175D3DCCD1}">
+              <a14:hiddenFill xmlns:a14="http://schemas.microsoft.com/office/drawing/2010/main">
+                <a:solidFill>
+                  <a:srgbClr val="FFFFFF"/>
+                </a:solidFill>
+              </a14:hiddenFill>
+            </a:ext>
+            <a:ext uri="{91240B29-F687-4F45-9708-019B960494DF}">
+              <a14:hiddenLine xmlns:a14="http://schemas.microsoft.com/office/drawing/2010/main" w="9525">
+                <a:solidFill>
+                  <a:srgbClr val="000000"/>
+                </a:solidFill>
+                <a:miter lim="800000"/>
+                <a:headEnd/>
+                <a:tailEnd/>
+              </a14:hiddenLine>
+            </a:ext>
+          </a:extLst>
+        </p:spPr>
+      </p:pic>
+      <p:sp>
+        <p:nvSpPr>
+          <p:cNvPr id="85" name="TextBox 11">
+            <a:extLst>
+              <a:ext uri="{FF2B5EF4-FFF2-40B4-BE49-F238E27FC236}">
+                <a16:creationId xmlns:a16="http://schemas.microsoft.com/office/drawing/2014/main" id="{100AE9A6-3DD9-65C1-38BB-D75BA01D6617}"/>
+              </a:ext>
+            </a:extLst>
+          </p:cNvPr>
+          <p:cNvSpPr txBox="1">
+            <a:spLocks noChangeArrowheads="1"/>
+          </p:cNvSpPr>
+          <p:nvPr/>
+        </p:nvSpPr>
+        <p:spPr bwMode="auto">
+          <a:xfrm>
+            <a:off x="4180459" y="2712093"/>
+            <a:ext cx="746124" cy="246221"/>
+          </a:xfrm>
+          <a:prstGeom prst="rect">
+            <a:avLst/>
+          </a:prstGeom>
+          <a:noFill/>
+          <a:ln>
+            <a:noFill/>
+          </a:ln>
+          <a:extLst>
+            <a:ext uri="{909E8E84-426E-40DD-AFC4-6F175D3DCCD1}">
+              <a14:hiddenFill xmlns:a14="http://schemas.microsoft.com/office/drawing/2010/main">
+                <a:solidFill>
+                  <a:srgbClr val="FFFFFF"/>
+                </a:solidFill>
+              </a14:hiddenFill>
+            </a:ext>
+            <a:ext uri="{91240B29-F687-4F45-9708-019B960494DF}">
+              <a14:hiddenLine xmlns:a14="http://schemas.microsoft.com/office/drawing/2010/main" w="9525">
+                <a:solidFill>
+                  <a:srgbClr val="000000"/>
+                </a:solidFill>
+                <a:miter lim="800000"/>
+                <a:headEnd/>
+                <a:tailEnd/>
+              </a14:hiddenLine>
+            </a:ext>
+          </a:extLst>
+        </p:spPr>
+        <p:txBody>
+          <a:bodyPr wrap="square">
+            <a:spAutoFit/>
+          </a:bodyPr>
+          <a:lstStyle>
+            <a:lvl1pPr>
+              <a:defRPr>
+                <a:solidFill>
+                  <a:schemeClr val="tx1"/>
+                </a:solidFill>
+                <a:latin typeface="Calibri" panose="020F0502020204030204" pitchFamily="34" charset="0"/>
+              </a:defRPr>
+            </a:lvl1pPr>
+            <a:lvl2pPr marL="742950" indent="-285750">
+              <a:defRPr>
+                <a:solidFill>
+                  <a:schemeClr val="tx1"/>
+                </a:solidFill>
+                <a:latin typeface="Calibri" panose="020F0502020204030204" pitchFamily="34" charset="0"/>
+              </a:defRPr>
+            </a:lvl2pPr>
+            <a:lvl3pPr marL="1143000" indent="-228600">
+              <a:defRPr>
+                <a:solidFill>
+                  <a:schemeClr val="tx1"/>
+                </a:solidFill>
+                <a:latin typeface="Calibri" panose="020F0502020204030204" pitchFamily="34" charset="0"/>
+              </a:defRPr>
+            </a:lvl3pPr>
+            <a:lvl4pPr marL="1600200" indent="-228600">
+              <a:defRPr>
+                <a:solidFill>
+                  <a:schemeClr val="tx1"/>
+                </a:solidFill>
+                <a:latin typeface="Calibri" panose="020F0502020204030204" pitchFamily="34" charset="0"/>
+              </a:defRPr>
+            </a:lvl4pPr>
+            <a:lvl5pPr marL="2057400" indent="-228600">
+              <a:defRPr>
+                <a:solidFill>
+                  <a:schemeClr val="tx1"/>
+                </a:solidFill>
+                <a:latin typeface="Calibri" panose="020F0502020204030204" pitchFamily="34" charset="0"/>
+              </a:defRPr>
+            </a:lvl5pPr>
+            <a:lvl6pPr marL="2514600" indent="-228600" eaLnBrk="0" fontAlgn="base" hangingPunct="0">
+              <a:spcBef>
+                <a:spcPct val="0"/>
+              </a:spcBef>
+              <a:spcAft>
+                <a:spcPct val="0"/>
+              </a:spcAft>
+              <a:defRPr>
+                <a:solidFill>
+                  <a:schemeClr val="tx1"/>
+                </a:solidFill>
+                <a:latin typeface="Calibri" panose="020F0502020204030204" pitchFamily="34" charset="0"/>
+              </a:defRPr>
+            </a:lvl6pPr>
+            <a:lvl7pPr marL="2971800" indent="-228600" eaLnBrk="0" fontAlgn="base" hangingPunct="0">
+              <a:spcBef>
+                <a:spcPct val="0"/>
+              </a:spcBef>
+              <a:spcAft>
+                <a:spcPct val="0"/>
+              </a:spcAft>
+              <a:defRPr>
+                <a:solidFill>
+                  <a:schemeClr val="tx1"/>
+                </a:solidFill>
+                <a:latin typeface="Calibri" panose="020F0502020204030204" pitchFamily="34" charset="0"/>
+              </a:defRPr>
+            </a:lvl7pPr>
+            <a:lvl8pPr marL="3429000" indent="-228600" eaLnBrk="0" fontAlgn="base" hangingPunct="0">
+              <a:spcBef>
+                <a:spcPct val="0"/>
+              </a:spcBef>
+              <a:spcAft>
+                <a:spcPct val="0"/>
+              </a:spcAft>
+              <a:defRPr>
+                <a:solidFill>
+                  <a:schemeClr val="tx1"/>
+                </a:solidFill>
+                <a:latin typeface="Calibri" panose="020F0502020204030204" pitchFamily="34" charset="0"/>
+              </a:defRPr>
+            </a:lvl8pPr>
+            <a:lvl9pPr marL="3886200" indent="-228600" eaLnBrk="0" fontAlgn="base" hangingPunct="0">
+              <a:spcBef>
+                <a:spcPct val="0"/>
+              </a:spcBef>
+              <a:spcAft>
+                <a:spcPct val="0"/>
+              </a:spcAft>
+              <a:defRPr>
+                <a:solidFill>
+                  <a:schemeClr val="tx1"/>
+                </a:solidFill>
+                <a:latin typeface="Calibri" panose="020F0502020204030204" pitchFamily="34" charset="0"/>
+              </a:defRPr>
+            </a:lvl9pPr>
+          </a:lstStyle>
+          <a:p>
+            <a:pPr algn="ctr" eaLnBrk="1" hangingPunct="1"/>
+            <a:r>
+              <a:rPr lang="en-US" altLang="en-US" sz="1000" dirty="0">
+                <a:solidFill>
+                  <a:schemeClr val="bg1"/>
+                </a:solidFill>
+                <a:latin typeface="Arial" panose="020B0604020202020204" pitchFamily="34" charset="0"/>
+                <a:ea typeface="Amazon Ember" panose="020B0603020204020204" pitchFamily="34" charset="0"/>
+                <a:cs typeface="Arial" panose="020B0604020202020204" pitchFamily="34" charset="0"/>
+              </a:rPr>
+              <a:t>SQS</a:t>
+            </a:r>
+          </a:p>
+        </p:txBody>
+      </p:sp>
+      <p:pic>
+        <p:nvPicPr>
+          <p:cNvPr id="91" name="Graphic 24" descr="Amazon Simple Notification Service (Amazon SNS) service icon.">
+            <a:extLst>
+              <a:ext uri="{FF2B5EF4-FFF2-40B4-BE49-F238E27FC236}">
+                <a16:creationId xmlns:a16="http://schemas.microsoft.com/office/drawing/2014/main" id="{CC7A1776-C2D8-82ED-7083-AAABB5D9F0F9}"/>
+              </a:ext>
+            </a:extLst>
+          </p:cNvPr>
+          <p:cNvPicPr>
+            <a:picLocks noChangeAspect="1" noChangeArrowheads="1"/>
+          </p:cNvPicPr>
+          <p:nvPr/>
+        </p:nvPicPr>
+        <p:blipFill>
+          <a:blip>
+            <a:extLst>
+              <a:ext uri="{96DAC541-7B7A-43D3-8B79-37D633B846F1}">
+                <asvg:svgBlip xmlns:asvg="http://schemas.microsoft.com/office/drawing/2016/SVG/main" r:embed="rId20"/>
+              </a:ext>
+            </a:extLst>
+          </a:blip>
+          <a:srcRect/>
+          <a:stretch/>
+        </p:blipFill>
+        <p:spPr bwMode="auto">
+          <a:xfrm>
+            <a:off x="4973194" y="2902885"/>
+            <a:ext cx="274320" cy="274320"/>
+          </a:xfrm>
+          <a:prstGeom prst="rect">
+            <a:avLst/>
+          </a:prstGeom>
+          <a:noFill/>
+          <a:ln>
+            <a:noFill/>
+          </a:ln>
+          <a:extLst>
+            <a:ext uri="{909E8E84-426E-40DD-AFC4-6F175D3DCCD1}">
+              <a14:hiddenFill xmlns:a14="http://schemas.microsoft.com/office/drawing/2010/main">
+                <a:solidFill>
+                  <a:srgbClr val="FFFFFF"/>
+                </a:solidFill>
+              </a14:hiddenFill>
+            </a:ext>
+            <a:ext uri="{91240B29-F687-4F45-9708-019B960494DF}">
+              <a14:hiddenLine xmlns:a14="http://schemas.microsoft.com/office/drawing/2010/main" w="9525">
+                <a:solidFill>
+                  <a:srgbClr val="000000"/>
+                </a:solidFill>
+                <a:miter lim="800000"/>
+                <a:headEnd/>
+                <a:tailEnd/>
+              </a14:hiddenLine>
+            </a:ext>
+          </a:extLst>
+        </p:spPr>
+      </p:pic>
+      <p:sp>
+        <p:nvSpPr>
+          <p:cNvPr id="93" name="TextBox 9">
+            <a:extLst>
+              <a:ext uri="{FF2B5EF4-FFF2-40B4-BE49-F238E27FC236}">
+                <a16:creationId xmlns:a16="http://schemas.microsoft.com/office/drawing/2014/main" id="{1614AAAA-86B5-ACAF-A73A-469C0354AEDB}"/>
+              </a:ext>
+            </a:extLst>
+          </p:cNvPr>
+          <p:cNvSpPr txBox="1">
+            <a:spLocks noChangeArrowheads="1"/>
+          </p:cNvSpPr>
+          <p:nvPr/>
+        </p:nvSpPr>
+        <p:spPr bwMode="auto">
+          <a:xfrm>
+            <a:off x="4752055" y="2712093"/>
+            <a:ext cx="731838" cy="246221"/>
+          </a:xfrm>
+          <a:prstGeom prst="rect">
+            <a:avLst/>
+          </a:prstGeom>
+          <a:noFill/>
+          <a:ln>
+            <a:noFill/>
+          </a:ln>
+          <a:extLst>
+            <a:ext uri="{909E8E84-426E-40DD-AFC4-6F175D3DCCD1}">
+              <a14:hiddenFill xmlns:a14="http://schemas.microsoft.com/office/drawing/2010/main">
+                <a:solidFill>
+                  <a:srgbClr val="FFFFFF"/>
+                </a:solidFill>
+              </a14:hiddenFill>
+            </a:ext>
+            <a:ext uri="{91240B29-F687-4F45-9708-019B960494DF}">
+              <a14:hiddenLine xmlns:a14="http://schemas.microsoft.com/office/drawing/2010/main" w="9525">
+                <a:solidFill>
+                  <a:srgbClr val="000000"/>
+                </a:solidFill>
+                <a:miter lim="800000"/>
+                <a:headEnd/>
+                <a:tailEnd/>
+              </a14:hiddenLine>
+            </a:ext>
+          </a:extLst>
+        </p:spPr>
+        <p:txBody>
+          <a:bodyPr wrap="square">
+            <a:spAutoFit/>
+          </a:bodyPr>
+          <a:lstStyle>
+            <a:lvl1pPr>
+              <a:defRPr>
+                <a:solidFill>
+                  <a:schemeClr val="tx1"/>
+                </a:solidFill>
+                <a:latin typeface="Calibri" panose="020F0502020204030204" pitchFamily="34" charset="0"/>
+              </a:defRPr>
+            </a:lvl1pPr>
+            <a:lvl2pPr marL="742950" indent="-285750">
+              <a:defRPr>
+                <a:solidFill>
+                  <a:schemeClr val="tx1"/>
+                </a:solidFill>
+                <a:latin typeface="Calibri" panose="020F0502020204030204" pitchFamily="34" charset="0"/>
+              </a:defRPr>
+            </a:lvl2pPr>
+            <a:lvl3pPr marL="1143000" indent="-228600">
+              <a:defRPr>
+                <a:solidFill>
+                  <a:schemeClr val="tx1"/>
+                </a:solidFill>
+                <a:latin typeface="Calibri" panose="020F0502020204030204" pitchFamily="34" charset="0"/>
+              </a:defRPr>
+            </a:lvl3pPr>
+            <a:lvl4pPr marL="1600200" indent="-228600">
+              <a:defRPr>
+                <a:solidFill>
+                  <a:schemeClr val="tx1"/>
+                </a:solidFill>
+                <a:latin typeface="Calibri" panose="020F0502020204030204" pitchFamily="34" charset="0"/>
+              </a:defRPr>
+            </a:lvl4pPr>
+            <a:lvl5pPr marL="2057400" indent="-228600">
+              <a:defRPr>
+                <a:solidFill>
+                  <a:schemeClr val="tx1"/>
+                </a:solidFill>
+                <a:latin typeface="Calibri" panose="020F0502020204030204" pitchFamily="34" charset="0"/>
+              </a:defRPr>
+            </a:lvl5pPr>
+            <a:lvl6pPr marL="2514600" indent="-228600" eaLnBrk="0" fontAlgn="base" hangingPunct="0">
+              <a:spcBef>
+                <a:spcPct val="0"/>
+              </a:spcBef>
+              <a:spcAft>
+                <a:spcPct val="0"/>
+              </a:spcAft>
+              <a:defRPr>
+                <a:solidFill>
+                  <a:schemeClr val="tx1"/>
+                </a:solidFill>
+                <a:latin typeface="Calibri" panose="020F0502020204030204" pitchFamily="34" charset="0"/>
+              </a:defRPr>
+            </a:lvl6pPr>
+            <a:lvl7pPr marL="2971800" indent="-228600" eaLnBrk="0" fontAlgn="base" hangingPunct="0">
+              <a:spcBef>
+                <a:spcPct val="0"/>
+              </a:spcBef>
+              <a:spcAft>
+                <a:spcPct val="0"/>
+              </a:spcAft>
+              <a:defRPr>
+                <a:solidFill>
+                  <a:schemeClr val="tx1"/>
+                </a:solidFill>
+                <a:latin typeface="Calibri" panose="020F0502020204030204" pitchFamily="34" charset="0"/>
+              </a:defRPr>
+            </a:lvl7pPr>
+            <a:lvl8pPr marL="3429000" indent="-228600" eaLnBrk="0" fontAlgn="base" hangingPunct="0">
+              <a:spcBef>
+                <a:spcPct val="0"/>
+              </a:spcBef>
+              <a:spcAft>
+                <a:spcPct val="0"/>
+              </a:spcAft>
+              <a:defRPr>
+                <a:solidFill>
+                  <a:schemeClr val="tx1"/>
+                </a:solidFill>
+                <a:latin typeface="Calibri" panose="020F0502020204030204" pitchFamily="34" charset="0"/>
+              </a:defRPr>
+            </a:lvl8pPr>
+            <a:lvl9pPr marL="3886200" indent="-228600" eaLnBrk="0" fontAlgn="base" hangingPunct="0">
+              <a:spcBef>
+                <a:spcPct val="0"/>
+              </a:spcBef>
+              <a:spcAft>
+                <a:spcPct val="0"/>
+              </a:spcAft>
+              <a:defRPr>
+                <a:solidFill>
+                  <a:schemeClr val="tx1"/>
+                </a:solidFill>
+                <a:latin typeface="Calibri" panose="020F0502020204030204" pitchFamily="34" charset="0"/>
+              </a:defRPr>
+            </a:lvl9pPr>
+          </a:lstStyle>
+          <a:p>
+            <a:pPr algn="ctr" eaLnBrk="1" hangingPunct="1"/>
+            <a:r>
+              <a:rPr lang="en-US" altLang="en-US" sz="1000" dirty="0">
+                <a:solidFill>
+                  <a:schemeClr val="bg1"/>
+                </a:solidFill>
+                <a:latin typeface="Arial" panose="020B0604020202020204" pitchFamily="34" charset="0"/>
+                <a:ea typeface="Amazon Ember" panose="020B0603020204020204" pitchFamily="34" charset="0"/>
+                <a:cs typeface="Arial" panose="020B0604020202020204" pitchFamily="34" charset="0"/>
+              </a:rPr>
+              <a:t>SNS</a:t>
+            </a:r>
+          </a:p>
+        </p:txBody>
+      </p:sp>
+      <p:cxnSp>
+        <p:nvCxnSpPr>
+          <p:cNvPr id="95" name="Connector: Elbow 94">
+            <a:extLst>
+              <a:ext uri="{FF2B5EF4-FFF2-40B4-BE49-F238E27FC236}">
+                <a16:creationId xmlns:a16="http://schemas.microsoft.com/office/drawing/2014/main" id="{907BC3B3-20B5-8CB0-E48F-F3EDE5FEA521}"/>
+              </a:ext>
+            </a:extLst>
+          </p:cNvPr>
+          <p:cNvCxnSpPr>
+            <a:cxnSpLocks/>
+            <a:stCxn id="68" idx="0"/>
+            <a:endCxn id="83" idx="2"/>
+          </p:cNvCxnSpPr>
+          <p:nvPr/>
+        </p:nvCxnSpPr>
+        <p:spPr>
+          <a:xfrm rot="16200000" flipV="1">
+            <a:off x="4371642" y="3352333"/>
+            <a:ext cx="582620" cy="220683"/>
+          </a:xfrm>
+          <a:prstGeom prst="bentConnector3">
+            <a:avLst>
+              <a:gd name="adj1" fmla="val 50000"/>
+            </a:avLst>
+          </a:prstGeom>
+          <a:ln>
+            <a:tailEnd type="triangle"/>
+          </a:ln>
+        </p:spPr>
+        <p:style>
+          <a:lnRef idx="2">
+            <a:schemeClr val="accent1"/>
+          </a:lnRef>
+          <a:fillRef idx="0">
+            <a:schemeClr val="accent1"/>
+          </a:fillRef>
+          <a:effectRef idx="1">
+            <a:schemeClr val="accent1"/>
+          </a:effectRef>
+          <a:fontRef idx="minor">
+            <a:schemeClr val="tx1"/>
+          </a:fontRef>
+        </p:style>
+      </p:cxnSp>
+      <p:cxnSp>
+        <p:nvCxnSpPr>
+          <p:cNvPr id="100" name="Connector: Elbow 99">
+            <a:extLst>
+              <a:ext uri="{FF2B5EF4-FFF2-40B4-BE49-F238E27FC236}">
+                <a16:creationId xmlns:a16="http://schemas.microsoft.com/office/drawing/2014/main" id="{4A5104B3-E95D-8AE9-FEE0-53F69D24B447}"/>
+              </a:ext>
+            </a:extLst>
+          </p:cNvPr>
+          <p:cNvCxnSpPr>
+            <a:cxnSpLocks/>
+            <a:stCxn id="68" idx="0"/>
+            <a:endCxn id="91" idx="2"/>
+          </p:cNvCxnSpPr>
+          <p:nvPr/>
+        </p:nvCxnSpPr>
+        <p:spPr>
+          <a:xfrm rot="5400000" flipH="1" flipV="1">
+            <a:off x="4653433" y="3297065"/>
+            <a:ext cx="576780" cy="337061"/>
+          </a:xfrm>
+          <a:prstGeom prst="bentConnector3">
+            <a:avLst>
+              <a:gd name="adj1" fmla="val 50000"/>
+            </a:avLst>
+          </a:prstGeom>
+          <a:ln>
+            <a:tailEnd type="triangle"/>
+          </a:ln>
+        </p:spPr>
+        <p:style>
+          <a:lnRef idx="2">
+            <a:schemeClr val="accent1"/>
+          </a:lnRef>
+          <a:fillRef idx="0">
+            <a:schemeClr val="accent1"/>
+          </a:fillRef>
+          <a:effectRef idx="1">
+            <a:schemeClr val="accent1"/>
+          </a:effectRef>
+          <a:fontRef idx="minor">
+            <a:schemeClr val="tx1"/>
+          </a:fontRef>
+        </p:style>
+      </p:cxnSp>
+      <p:sp>
+        <p:nvSpPr>
+          <p:cNvPr id="104" name="TextBox 103">
+            <a:extLst>
+              <a:ext uri="{FF2B5EF4-FFF2-40B4-BE49-F238E27FC236}">
+                <a16:creationId xmlns:a16="http://schemas.microsoft.com/office/drawing/2014/main" id="{528EB2B3-3F18-DE75-38AE-B868F789CA46}"/>
+              </a:ext>
+            </a:extLst>
+          </p:cNvPr>
+          <p:cNvSpPr txBox="1"/>
+          <p:nvPr/>
+        </p:nvSpPr>
+        <p:spPr>
+          <a:xfrm>
+            <a:off x="3168850" y="208364"/>
+            <a:ext cx="2854949" cy="369332"/>
+          </a:xfrm>
+          <a:prstGeom prst="rect">
+            <a:avLst/>
+          </a:prstGeom>
+          <a:noFill/>
+        </p:spPr>
+        <p:txBody>
+          <a:bodyPr wrap="none" rtlCol="0">
+            <a:spAutoFit/>
+          </a:bodyPr>
+          <a:lstStyle/>
+          <a:p>
+            <a:r>
+              <a:rPr lang="en-US" dirty="0">
+                <a:solidFill>
+                  <a:schemeClr val="bg1"/>
+                </a:solidFill>
+              </a:rPr>
+              <a:t>Web App SPA and Backend</a:t>
+            </a:r>
+          </a:p>
+        </p:txBody>
+      </p:sp>
+      <p:sp>
+        <p:nvSpPr>
+          <p:cNvPr id="3" name="TextBox 11">
+            <a:extLst>
+              <a:ext uri="{FF2B5EF4-FFF2-40B4-BE49-F238E27FC236}">
+                <a16:creationId xmlns:a16="http://schemas.microsoft.com/office/drawing/2014/main" id="{044211F4-73AE-58BA-7D11-2F90F21A20B0}"/>
+              </a:ext>
+            </a:extLst>
+          </p:cNvPr>
+          <p:cNvSpPr txBox="1">
+            <a:spLocks noChangeArrowheads="1"/>
+          </p:cNvSpPr>
+          <p:nvPr/>
+        </p:nvSpPr>
+        <p:spPr bwMode="auto">
+          <a:xfrm>
+            <a:off x="3991747" y="5027538"/>
+            <a:ext cx="934836" cy="246221"/>
+          </a:xfrm>
+          <a:prstGeom prst="rect">
+            <a:avLst/>
+          </a:prstGeom>
+          <a:noFill/>
+          <a:ln>
+            <a:noFill/>
+          </a:ln>
+          <a:extLst>
+            <a:ext uri="{909E8E84-426E-40DD-AFC4-6F175D3DCCD1}">
+              <a14:hiddenFill xmlns:a14="http://schemas.microsoft.com/office/drawing/2010/main">
+                <a:solidFill>
+                  <a:srgbClr val="FFFFFF"/>
+                </a:solidFill>
+              </a14:hiddenFill>
+            </a:ext>
+            <a:ext uri="{91240B29-F687-4F45-9708-019B960494DF}">
+              <a14:hiddenLine xmlns:a14="http://schemas.microsoft.com/office/drawing/2010/main" w="9525">
+                <a:solidFill>
+                  <a:srgbClr val="000000"/>
+                </a:solidFill>
+                <a:miter lim="800000"/>
+                <a:headEnd/>
+                <a:tailEnd/>
+              </a14:hiddenLine>
+            </a:ext>
+          </a:extLst>
+        </p:spPr>
+        <p:txBody>
+          <a:bodyPr wrap="square">
+            <a:spAutoFit/>
+          </a:bodyPr>
+          <a:lstStyle>
+            <a:lvl1pPr>
+              <a:defRPr>
+                <a:solidFill>
+                  <a:schemeClr val="tx1"/>
+                </a:solidFill>
+                <a:latin typeface="Calibri" panose="020F0502020204030204" pitchFamily="34" charset="0"/>
+              </a:defRPr>
+            </a:lvl1pPr>
+            <a:lvl2pPr marL="742950" indent="-285750">
+              <a:defRPr>
+                <a:solidFill>
+                  <a:schemeClr val="tx1"/>
+                </a:solidFill>
+                <a:latin typeface="Calibri" panose="020F0502020204030204" pitchFamily="34" charset="0"/>
+              </a:defRPr>
+            </a:lvl2pPr>
+            <a:lvl3pPr marL="1143000" indent="-228600">
+              <a:defRPr>
+                <a:solidFill>
+                  <a:schemeClr val="tx1"/>
+                </a:solidFill>
+                <a:latin typeface="Calibri" panose="020F0502020204030204" pitchFamily="34" charset="0"/>
+              </a:defRPr>
+            </a:lvl3pPr>
+            <a:lvl4pPr marL="1600200" indent="-228600">
+              <a:defRPr>
+                <a:solidFill>
+                  <a:schemeClr val="tx1"/>
+                </a:solidFill>
+                <a:latin typeface="Calibri" panose="020F0502020204030204" pitchFamily="34" charset="0"/>
+              </a:defRPr>
+            </a:lvl4pPr>
+            <a:lvl5pPr marL="2057400" indent="-228600">
+              <a:defRPr>
+                <a:solidFill>
+                  <a:schemeClr val="tx1"/>
+                </a:solidFill>
+                <a:latin typeface="Calibri" panose="020F0502020204030204" pitchFamily="34" charset="0"/>
+              </a:defRPr>
+            </a:lvl5pPr>
+            <a:lvl6pPr marL="2514600" indent="-228600" eaLnBrk="0" fontAlgn="base" hangingPunct="0">
+              <a:spcBef>
+                <a:spcPct val="0"/>
+              </a:spcBef>
+              <a:spcAft>
+                <a:spcPct val="0"/>
+              </a:spcAft>
+              <a:defRPr>
+                <a:solidFill>
+                  <a:schemeClr val="tx1"/>
+                </a:solidFill>
+                <a:latin typeface="Calibri" panose="020F0502020204030204" pitchFamily="34" charset="0"/>
+              </a:defRPr>
+            </a:lvl6pPr>
+            <a:lvl7pPr marL="2971800" indent="-228600" eaLnBrk="0" fontAlgn="base" hangingPunct="0">
+              <a:spcBef>
+                <a:spcPct val="0"/>
+              </a:spcBef>
+              <a:spcAft>
+                <a:spcPct val="0"/>
+              </a:spcAft>
+              <a:defRPr>
+                <a:solidFill>
+                  <a:schemeClr val="tx1"/>
+                </a:solidFill>
+                <a:latin typeface="Calibri" panose="020F0502020204030204" pitchFamily="34" charset="0"/>
+              </a:defRPr>
+            </a:lvl7pPr>
+            <a:lvl8pPr marL="3429000" indent="-228600" eaLnBrk="0" fontAlgn="base" hangingPunct="0">
+              <a:spcBef>
+                <a:spcPct val="0"/>
+              </a:spcBef>
+              <a:spcAft>
+                <a:spcPct val="0"/>
+              </a:spcAft>
+              <a:defRPr>
+                <a:solidFill>
+                  <a:schemeClr val="tx1"/>
+                </a:solidFill>
+                <a:latin typeface="Calibri" panose="020F0502020204030204" pitchFamily="34" charset="0"/>
+              </a:defRPr>
+            </a:lvl8pPr>
+            <a:lvl9pPr marL="3886200" indent="-228600" eaLnBrk="0" fontAlgn="base" hangingPunct="0">
+              <a:spcBef>
+                <a:spcPct val="0"/>
+              </a:spcBef>
+              <a:spcAft>
+                <a:spcPct val="0"/>
+              </a:spcAft>
+              <a:defRPr>
+                <a:solidFill>
+                  <a:schemeClr val="tx1"/>
+                </a:solidFill>
+                <a:latin typeface="Calibri" panose="020F0502020204030204" pitchFamily="34" charset="0"/>
+              </a:defRPr>
+            </a:lvl9pPr>
+          </a:lstStyle>
+          <a:p>
+            <a:pPr algn="ctr" eaLnBrk="1" hangingPunct="1"/>
+            <a:r>
+              <a:rPr lang="en-US" altLang="en-US" sz="1000" dirty="0">
+                <a:solidFill>
+                  <a:schemeClr val="bg1"/>
+                </a:solidFill>
+                <a:latin typeface="Arial" panose="020B0604020202020204" pitchFamily="34" charset="0"/>
+                <a:ea typeface="Amazon Ember" panose="020B0603020204020204" pitchFamily="34" charset="0"/>
+                <a:cs typeface="Arial" panose="020B0604020202020204" pitchFamily="34" charset="0"/>
+              </a:rPr>
+              <a:t>DynamoDB</a:t>
+            </a:r>
+          </a:p>
+        </p:txBody>
+      </p:sp>
+      <p:sp>
+        <p:nvSpPr>
+          <p:cNvPr id="28" name="TextBox 9">
+            <a:extLst>
+              <a:ext uri="{FF2B5EF4-FFF2-40B4-BE49-F238E27FC236}">
+                <a16:creationId xmlns:a16="http://schemas.microsoft.com/office/drawing/2014/main" id="{3E9980C8-CB30-BE6D-E80F-66DFBB37D9DC}"/>
+              </a:ext>
+            </a:extLst>
+          </p:cNvPr>
+          <p:cNvSpPr txBox="1">
+            <a:spLocks noChangeArrowheads="1"/>
+          </p:cNvSpPr>
+          <p:nvPr/>
+        </p:nvSpPr>
+        <p:spPr bwMode="auto">
+          <a:xfrm>
+            <a:off x="4910453" y="5027537"/>
+            <a:ext cx="731838" cy="246221"/>
+          </a:xfrm>
+          <a:prstGeom prst="rect">
+            <a:avLst/>
+          </a:prstGeom>
+          <a:noFill/>
+          <a:ln>
+            <a:noFill/>
+          </a:ln>
+          <a:extLst>
+            <a:ext uri="{909E8E84-426E-40DD-AFC4-6F175D3DCCD1}">
+              <a14:hiddenFill xmlns:a14="http://schemas.microsoft.com/office/drawing/2010/main">
+                <a:solidFill>
+                  <a:srgbClr val="FFFFFF"/>
+                </a:solidFill>
+              </a14:hiddenFill>
+            </a:ext>
+            <a:ext uri="{91240B29-F687-4F45-9708-019B960494DF}">
+              <a14:hiddenLine xmlns:a14="http://schemas.microsoft.com/office/drawing/2010/main" w="9525">
+                <a:solidFill>
+                  <a:srgbClr val="000000"/>
+                </a:solidFill>
+                <a:miter lim="800000"/>
+                <a:headEnd/>
+                <a:tailEnd/>
+              </a14:hiddenLine>
+            </a:ext>
+          </a:extLst>
+        </p:spPr>
+        <p:txBody>
+          <a:bodyPr wrap="square">
+            <a:spAutoFit/>
+          </a:bodyPr>
+          <a:lstStyle>
+            <a:lvl1pPr>
+              <a:defRPr>
+                <a:solidFill>
+                  <a:schemeClr val="tx1"/>
+                </a:solidFill>
+                <a:latin typeface="Calibri" panose="020F0502020204030204" pitchFamily="34" charset="0"/>
+              </a:defRPr>
+            </a:lvl1pPr>
+            <a:lvl2pPr marL="742950" indent="-285750">
+              <a:defRPr>
+                <a:solidFill>
+                  <a:schemeClr val="tx1"/>
+                </a:solidFill>
+                <a:latin typeface="Calibri" panose="020F0502020204030204" pitchFamily="34" charset="0"/>
+              </a:defRPr>
+            </a:lvl2pPr>
+            <a:lvl3pPr marL="1143000" indent="-228600">
+              <a:defRPr>
+                <a:solidFill>
+                  <a:schemeClr val="tx1"/>
+                </a:solidFill>
+                <a:latin typeface="Calibri" panose="020F0502020204030204" pitchFamily="34" charset="0"/>
+              </a:defRPr>
+            </a:lvl3pPr>
+            <a:lvl4pPr marL="1600200" indent="-228600">
+              <a:defRPr>
+                <a:solidFill>
+                  <a:schemeClr val="tx1"/>
+                </a:solidFill>
+                <a:latin typeface="Calibri" panose="020F0502020204030204" pitchFamily="34" charset="0"/>
+              </a:defRPr>
+            </a:lvl4pPr>
+            <a:lvl5pPr marL="2057400" indent="-228600">
+              <a:defRPr>
+                <a:solidFill>
+                  <a:schemeClr val="tx1"/>
+                </a:solidFill>
+                <a:latin typeface="Calibri" panose="020F0502020204030204" pitchFamily="34" charset="0"/>
+              </a:defRPr>
+            </a:lvl5pPr>
+            <a:lvl6pPr marL="2514600" indent="-228600" eaLnBrk="0" fontAlgn="base" hangingPunct="0">
+              <a:spcBef>
+                <a:spcPct val="0"/>
+              </a:spcBef>
+              <a:spcAft>
+                <a:spcPct val="0"/>
+              </a:spcAft>
+              <a:defRPr>
+                <a:solidFill>
+                  <a:schemeClr val="tx1"/>
+                </a:solidFill>
+                <a:latin typeface="Calibri" panose="020F0502020204030204" pitchFamily="34" charset="0"/>
+              </a:defRPr>
+            </a:lvl6pPr>
+            <a:lvl7pPr marL="2971800" indent="-228600" eaLnBrk="0" fontAlgn="base" hangingPunct="0">
+              <a:spcBef>
+                <a:spcPct val="0"/>
+              </a:spcBef>
+              <a:spcAft>
+                <a:spcPct val="0"/>
+              </a:spcAft>
+              <a:defRPr>
+                <a:solidFill>
+                  <a:schemeClr val="tx1"/>
+                </a:solidFill>
+                <a:latin typeface="Calibri" panose="020F0502020204030204" pitchFamily="34" charset="0"/>
+              </a:defRPr>
+            </a:lvl7pPr>
+            <a:lvl8pPr marL="3429000" indent="-228600" eaLnBrk="0" fontAlgn="base" hangingPunct="0">
+              <a:spcBef>
+                <a:spcPct val="0"/>
+              </a:spcBef>
+              <a:spcAft>
+                <a:spcPct val="0"/>
+              </a:spcAft>
+              <a:defRPr>
+                <a:solidFill>
+                  <a:schemeClr val="tx1"/>
+                </a:solidFill>
+                <a:latin typeface="Calibri" panose="020F0502020204030204" pitchFamily="34" charset="0"/>
+              </a:defRPr>
+            </a:lvl8pPr>
+            <a:lvl9pPr marL="3886200" indent="-228600" eaLnBrk="0" fontAlgn="base" hangingPunct="0">
+              <a:spcBef>
+                <a:spcPct val="0"/>
+              </a:spcBef>
+              <a:spcAft>
+                <a:spcPct val="0"/>
+              </a:spcAft>
+              <a:defRPr>
+                <a:solidFill>
+                  <a:schemeClr val="tx1"/>
+                </a:solidFill>
+                <a:latin typeface="Calibri" panose="020F0502020204030204" pitchFamily="34" charset="0"/>
+              </a:defRPr>
+            </a:lvl9pPr>
+          </a:lstStyle>
+          <a:p>
+            <a:pPr algn="ctr" eaLnBrk="1" hangingPunct="1"/>
+            <a:r>
+              <a:rPr lang="en-US" altLang="en-US" sz="1000" dirty="0">
+                <a:solidFill>
+                  <a:schemeClr val="bg1"/>
+                </a:solidFill>
+                <a:latin typeface="Arial" panose="020B0604020202020204" pitchFamily="34" charset="0"/>
+                <a:ea typeface="Amazon Ember" panose="020B0603020204020204" pitchFamily="34" charset="0"/>
+                <a:cs typeface="Arial" panose="020B0604020202020204" pitchFamily="34" charset="0"/>
+              </a:rPr>
+              <a:t>S3</a:t>
+            </a:r>
+          </a:p>
+        </p:txBody>
+      </p:sp>
+      <p:sp>
+        <p:nvSpPr>
+          <p:cNvPr id="63" name="TextBox 9">
+            <a:extLst>
+              <a:ext uri="{FF2B5EF4-FFF2-40B4-BE49-F238E27FC236}">
+                <a16:creationId xmlns:a16="http://schemas.microsoft.com/office/drawing/2014/main" id="{BC25DD1D-1449-9056-0BB5-A8879FF7647E}"/>
+              </a:ext>
+            </a:extLst>
+          </p:cNvPr>
+          <p:cNvSpPr txBox="1">
+            <a:spLocks noChangeArrowheads="1"/>
+          </p:cNvSpPr>
+          <p:nvPr/>
+        </p:nvSpPr>
+        <p:spPr bwMode="auto">
+          <a:xfrm>
+            <a:off x="1824680" y="4978595"/>
+            <a:ext cx="931832" cy="246221"/>
+          </a:xfrm>
+          <a:prstGeom prst="rect">
+            <a:avLst/>
+          </a:prstGeom>
+          <a:noFill/>
+          <a:ln>
+            <a:noFill/>
+          </a:ln>
+          <a:extLst>
+            <a:ext uri="{909E8E84-426E-40DD-AFC4-6F175D3DCCD1}">
+              <a14:hiddenFill xmlns:a14="http://schemas.microsoft.com/office/drawing/2010/main">
+                <a:solidFill>
+                  <a:srgbClr val="FFFFFF"/>
+                </a:solidFill>
+              </a14:hiddenFill>
+            </a:ext>
+            <a:ext uri="{91240B29-F687-4F45-9708-019B960494DF}">
+              <a14:hiddenLine xmlns:a14="http://schemas.microsoft.com/office/drawing/2010/main" w="9525">
+                <a:solidFill>
+                  <a:srgbClr val="000000"/>
+                </a:solidFill>
+                <a:miter lim="800000"/>
+                <a:headEnd/>
+                <a:tailEnd/>
+              </a14:hiddenLine>
+            </a:ext>
+          </a:extLst>
+        </p:spPr>
+        <p:txBody>
+          <a:bodyPr wrap="square">
+            <a:spAutoFit/>
+          </a:bodyPr>
+          <a:lstStyle>
+            <a:lvl1pPr>
+              <a:defRPr>
+                <a:solidFill>
+                  <a:schemeClr val="tx1"/>
+                </a:solidFill>
+                <a:latin typeface="Calibri" panose="020F0502020204030204" pitchFamily="34" charset="0"/>
+              </a:defRPr>
+            </a:lvl1pPr>
+            <a:lvl2pPr marL="742950" indent="-285750">
+              <a:defRPr>
+                <a:solidFill>
+                  <a:schemeClr val="tx1"/>
+                </a:solidFill>
+                <a:latin typeface="Calibri" panose="020F0502020204030204" pitchFamily="34" charset="0"/>
+              </a:defRPr>
+            </a:lvl2pPr>
+            <a:lvl3pPr marL="1143000" indent="-228600">
+              <a:defRPr>
+                <a:solidFill>
+                  <a:schemeClr val="tx1"/>
+                </a:solidFill>
+                <a:latin typeface="Calibri" panose="020F0502020204030204" pitchFamily="34" charset="0"/>
+              </a:defRPr>
+            </a:lvl3pPr>
+            <a:lvl4pPr marL="1600200" indent="-228600">
+              <a:defRPr>
+                <a:solidFill>
+                  <a:schemeClr val="tx1"/>
+                </a:solidFill>
+                <a:latin typeface="Calibri" panose="020F0502020204030204" pitchFamily="34" charset="0"/>
+              </a:defRPr>
+            </a:lvl4pPr>
+            <a:lvl5pPr marL="2057400" indent="-228600">
+              <a:defRPr>
+                <a:solidFill>
+                  <a:schemeClr val="tx1"/>
+                </a:solidFill>
+                <a:latin typeface="Calibri" panose="020F0502020204030204" pitchFamily="34" charset="0"/>
+              </a:defRPr>
+            </a:lvl5pPr>
+            <a:lvl6pPr marL="2514600" indent="-228600" eaLnBrk="0" fontAlgn="base" hangingPunct="0">
+              <a:spcBef>
+                <a:spcPct val="0"/>
+              </a:spcBef>
+              <a:spcAft>
+                <a:spcPct val="0"/>
+              </a:spcAft>
+              <a:defRPr>
+                <a:solidFill>
+                  <a:schemeClr val="tx1"/>
+                </a:solidFill>
+                <a:latin typeface="Calibri" panose="020F0502020204030204" pitchFamily="34" charset="0"/>
+              </a:defRPr>
+            </a:lvl6pPr>
+            <a:lvl7pPr marL="2971800" indent="-228600" eaLnBrk="0" fontAlgn="base" hangingPunct="0">
+              <a:spcBef>
+                <a:spcPct val="0"/>
+              </a:spcBef>
+              <a:spcAft>
+                <a:spcPct val="0"/>
+              </a:spcAft>
+              <a:defRPr>
+                <a:solidFill>
+                  <a:schemeClr val="tx1"/>
+                </a:solidFill>
+                <a:latin typeface="Calibri" panose="020F0502020204030204" pitchFamily="34" charset="0"/>
+              </a:defRPr>
+            </a:lvl7pPr>
+            <a:lvl8pPr marL="3429000" indent="-228600" eaLnBrk="0" fontAlgn="base" hangingPunct="0">
+              <a:spcBef>
+                <a:spcPct val="0"/>
+              </a:spcBef>
+              <a:spcAft>
+                <a:spcPct val="0"/>
+              </a:spcAft>
+              <a:defRPr>
+                <a:solidFill>
+                  <a:schemeClr val="tx1"/>
+                </a:solidFill>
+                <a:latin typeface="Calibri" panose="020F0502020204030204" pitchFamily="34" charset="0"/>
+              </a:defRPr>
+            </a:lvl8pPr>
+            <a:lvl9pPr marL="3886200" indent="-228600" eaLnBrk="0" fontAlgn="base" hangingPunct="0">
+              <a:spcBef>
+                <a:spcPct val="0"/>
+              </a:spcBef>
+              <a:spcAft>
+                <a:spcPct val="0"/>
+              </a:spcAft>
+              <a:defRPr>
+                <a:solidFill>
+                  <a:schemeClr val="tx1"/>
+                </a:solidFill>
+                <a:latin typeface="Calibri" panose="020F0502020204030204" pitchFamily="34" charset="0"/>
+              </a:defRPr>
+            </a:lvl9pPr>
+          </a:lstStyle>
+          <a:p>
+            <a:pPr algn="ctr" eaLnBrk="1" hangingPunct="1"/>
+            <a:r>
+              <a:rPr lang="en-US" altLang="en-US" sz="1000" dirty="0">
+                <a:solidFill>
+                  <a:schemeClr val="bg1"/>
+                </a:solidFill>
+                <a:latin typeface="Arial" panose="020B0604020202020204" pitchFamily="34" charset="0"/>
+                <a:ea typeface="Amazon Ember" panose="020B0603020204020204" pitchFamily="34" charset="0"/>
+                <a:cs typeface="Arial" panose="020B0604020202020204" pitchFamily="34" charset="0"/>
+              </a:rPr>
+              <a:t>CloudFront</a:t>
+            </a:r>
+          </a:p>
+        </p:txBody>
+      </p:sp>
+      <p:sp>
+        <p:nvSpPr>
+          <p:cNvPr id="75" name="TextBox 9">
+            <a:extLst>
+              <a:ext uri="{FF2B5EF4-FFF2-40B4-BE49-F238E27FC236}">
+                <a16:creationId xmlns:a16="http://schemas.microsoft.com/office/drawing/2014/main" id="{C9DAAD46-DCB1-C652-7B1B-285040BD3E9D}"/>
+              </a:ext>
+            </a:extLst>
+          </p:cNvPr>
+          <p:cNvSpPr txBox="1">
+            <a:spLocks noChangeArrowheads="1"/>
+          </p:cNvSpPr>
+          <p:nvPr/>
+        </p:nvSpPr>
+        <p:spPr bwMode="auto">
+          <a:xfrm>
+            <a:off x="1832189" y="4218053"/>
+            <a:ext cx="931832" cy="246221"/>
+          </a:xfrm>
+          <a:prstGeom prst="rect">
+            <a:avLst/>
+          </a:prstGeom>
+          <a:noFill/>
+          <a:ln>
+            <a:noFill/>
+          </a:ln>
+          <a:extLst>
+            <a:ext uri="{909E8E84-426E-40DD-AFC4-6F175D3DCCD1}">
+              <a14:hiddenFill xmlns:a14="http://schemas.microsoft.com/office/drawing/2010/main">
+                <a:solidFill>
+                  <a:srgbClr val="FFFFFF"/>
+                </a:solidFill>
+              </a14:hiddenFill>
+            </a:ext>
+            <a:ext uri="{91240B29-F687-4F45-9708-019B960494DF}">
+              <a14:hiddenLine xmlns:a14="http://schemas.microsoft.com/office/drawing/2010/main" w="9525">
+                <a:solidFill>
+                  <a:srgbClr val="000000"/>
+                </a:solidFill>
+                <a:miter lim="800000"/>
+                <a:headEnd/>
+                <a:tailEnd/>
+              </a14:hiddenLine>
+            </a:ext>
+          </a:extLst>
+        </p:spPr>
+        <p:txBody>
+          <a:bodyPr wrap="square">
+            <a:spAutoFit/>
+          </a:bodyPr>
+          <a:lstStyle>
+            <a:lvl1pPr>
+              <a:defRPr>
+                <a:solidFill>
+                  <a:schemeClr val="tx1"/>
+                </a:solidFill>
+                <a:latin typeface="Calibri" panose="020F0502020204030204" pitchFamily="34" charset="0"/>
+              </a:defRPr>
+            </a:lvl1pPr>
+            <a:lvl2pPr marL="742950" indent="-285750">
+              <a:defRPr>
+                <a:solidFill>
+                  <a:schemeClr val="tx1"/>
+                </a:solidFill>
+                <a:latin typeface="Calibri" panose="020F0502020204030204" pitchFamily="34" charset="0"/>
+              </a:defRPr>
+            </a:lvl2pPr>
+            <a:lvl3pPr marL="1143000" indent="-228600">
+              <a:defRPr>
+                <a:solidFill>
+                  <a:schemeClr val="tx1"/>
+                </a:solidFill>
+                <a:latin typeface="Calibri" panose="020F0502020204030204" pitchFamily="34" charset="0"/>
+              </a:defRPr>
+            </a:lvl3pPr>
+            <a:lvl4pPr marL="1600200" indent="-228600">
+              <a:defRPr>
+                <a:solidFill>
+                  <a:schemeClr val="tx1"/>
+                </a:solidFill>
+                <a:latin typeface="Calibri" panose="020F0502020204030204" pitchFamily="34" charset="0"/>
+              </a:defRPr>
+            </a:lvl4pPr>
+            <a:lvl5pPr marL="2057400" indent="-228600">
+              <a:defRPr>
+                <a:solidFill>
+                  <a:schemeClr val="tx1"/>
+                </a:solidFill>
+                <a:latin typeface="Calibri" panose="020F0502020204030204" pitchFamily="34" charset="0"/>
+              </a:defRPr>
+            </a:lvl5pPr>
+            <a:lvl6pPr marL="2514600" indent="-228600" eaLnBrk="0" fontAlgn="base" hangingPunct="0">
+              <a:spcBef>
+                <a:spcPct val="0"/>
+              </a:spcBef>
+              <a:spcAft>
+                <a:spcPct val="0"/>
+              </a:spcAft>
+              <a:defRPr>
+                <a:solidFill>
+                  <a:schemeClr val="tx1"/>
+                </a:solidFill>
+                <a:latin typeface="Calibri" panose="020F0502020204030204" pitchFamily="34" charset="0"/>
+              </a:defRPr>
+            </a:lvl6pPr>
+            <a:lvl7pPr marL="2971800" indent="-228600" eaLnBrk="0" fontAlgn="base" hangingPunct="0">
+              <a:spcBef>
+                <a:spcPct val="0"/>
+              </a:spcBef>
+              <a:spcAft>
+                <a:spcPct val="0"/>
+              </a:spcAft>
+              <a:defRPr>
+                <a:solidFill>
+                  <a:schemeClr val="tx1"/>
+                </a:solidFill>
+                <a:latin typeface="Calibri" panose="020F0502020204030204" pitchFamily="34" charset="0"/>
+              </a:defRPr>
+            </a:lvl7pPr>
+            <a:lvl8pPr marL="3429000" indent="-228600" eaLnBrk="0" fontAlgn="base" hangingPunct="0">
+              <a:spcBef>
+                <a:spcPct val="0"/>
+              </a:spcBef>
+              <a:spcAft>
+                <a:spcPct val="0"/>
+              </a:spcAft>
+              <a:defRPr>
+                <a:solidFill>
+                  <a:schemeClr val="tx1"/>
+                </a:solidFill>
+                <a:latin typeface="Calibri" panose="020F0502020204030204" pitchFamily="34" charset="0"/>
+              </a:defRPr>
+            </a:lvl8pPr>
+            <a:lvl9pPr marL="3886200" indent="-228600" eaLnBrk="0" fontAlgn="base" hangingPunct="0">
+              <a:spcBef>
+                <a:spcPct val="0"/>
+              </a:spcBef>
+              <a:spcAft>
+                <a:spcPct val="0"/>
+              </a:spcAft>
+              <a:defRPr>
+                <a:solidFill>
+                  <a:schemeClr val="tx1"/>
+                </a:solidFill>
+                <a:latin typeface="Calibri" panose="020F0502020204030204" pitchFamily="34" charset="0"/>
+              </a:defRPr>
+            </a:lvl9pPr>
+          </a:lstStyle>
+          <a:p>
+            <a:pPr algn="ctr" eaLnBrk="1" hangingPunct="1"/>
+            <a:r>
+              <a:rPr lang="en-US" altLang="en-US" sz="1000" dirty="0">
+                <a:solidFill>
+                  <a:schemeClr val="bg1"/>
+                </a:solidFill>
+                <a:latin typeface="Arial" panose="020B0604020202020204" pitchFamily="34" charset="0"/>
+                <a:ea typeface="Amazon Ember" panose="020B0603020204020204" pitchFamily="34" charset="0"/>
+                <a:cs typeface="Arial" panose="020B0604020202020204" pitchFamily="34" charset="0"/>
+              </a:rPr>
+              <a:t>WAF</a:t>
+            </a:r>
+          </a:p>
+        </p:txBody>
+      </p:sp>
+      <p:sp>
+        <p:nvSpPr>
+          <p:cNvPr id="77" name="TextBox 9">
+            <a:extLst>
+              <a:ext uri="{FF2B5EF4-FFF2-40B4-BE49-F238E27FC236}">
+                <a16:creationId xmlns:a16="http://schemas.microsoft.com/office/drawing/2014/main" id="{36890E9E-79A3-3FD8-6D20-1BBD4CDB9BF9}"/>
+              </a:ext>
+            </a:extLst>
+          </p:cNvPr>
+          <p:cNvSpPr txBox="1">
+            <a:spLocks noChangeArrowheads="1"/>
+          </p:cNvSpPr>
+          <p:nvPr/>
+        </p:nvSpPr>
+        <p:spPr bwMode="auto">
+          <a:xfrm>
+            <a:off x="2591210" y="3362260"/>
+            <a:ext cx="931832" cy="400110"/>
+          </a:xfrm>
+          <a:prstGeom prst="rect">
+            <a:avLst/>
+          </a:prstGeom>
+          <a:noFill/>
+          <a:ln>
+            <a:noFill/>
+          </a:ln>
+          <a:extLst>
+            <a:ext uri="{909E8E84-426E-40DD-AFC4-6F175D3DCCD1}">
+              <a14:hiddenFill xmlns:a14="http://schemas.microsoft.com/office/drawing/2010/main">
+                <a:solidFill>
+                  <a:srgbClr val="FFFFFF"/>
+                </a:solidFill>
+              </a14:hiddenFill>
+            </a:ext>
+            <a:ext uri="{91240B29-F687-4F45-9708-019B960494DF}">
+              <a14:hiddenLine xmlns:a14="http://schemas.microsoft.com/office/drawing/2010/main" w="9525">
+                <a:solidFill>
+                  <a:srgbClr val="000000"/>
+                </a:solidFill>
+                <a:miter lim="800000"/>
+                <a:headEnd/>
+                <a:tailEnd/>
+              </a14:hiddenLine>
+            </a:ext>
+          </a:extLst>
+        </p:spPr>
+        <p:txBody>
+          <a:bodyPr wrap="square">
+            <a:spAutoFit/>
+          </a:bodyPr>
+          <a:lstStyle>
+            <a:lvl1pPr>
+              <a:defRPr>
+                <a:solidFill>
+                  <a:schemeClr val="tx1"/>
+                </a:solidFill>
+                <a:latin typeface="Calibri" panose="020F0502020204030204" pitchFamily="34" charset="0"/>
+              </a:defRPr>
+            </a:lvl1pPr>
+            <a:lvl2pPr marL="742950" indent="-285750">
+              <a:defRPr>
+                <a:solidFill>
+                  <a:schemeClr val="tx1"/>
+                </a:solidFill>
+                <a:latin typeface="Calibri" panose="020F0502020204030204" pitchFamily="34" charset="0"/>
+              </a:defRPr>
+            </a:lvl2pPr>
+            <a:lvl3pPr marL="1143000" indent="-228600">
+              <a:defRPr>
+                <a:solidFill>
+                  <a:schemeClr val="tx1"/>
+                </a:solidFill>
+                <a:latin typeface="Calibri" panose="020F0502020204030204" pitchFamily="34" charset="0"/>
+              </a:defRPr>
+            </a:lvl3pPr>
+            <a:lvl4pPr marL="1600200" indent="-228600">
+              <a:defRPr>
+                <a:solidFill>
+                  <a:schemeClr val="tx1"/>
+                </a:solidFill>
+                <a:latin typeface="Calibri" panose="020F0502020204030204" pitchFamily="34" charset="0"/>
+              </a:defRPr>
+            </a:lvl4pPr>
+            <a:lvl5pPr marL="2057400" indent="-228600">
+              <a:defRPr>
+                <a:solidFill>
+                  <a:schemeClr val="tx1"/>
+                </a:solidFill>
+                <a:latin typeface="Calibri" panose="020F0502020204030204" pitchFamily="34" charset="0"/>
+              </a:defRPr>
+            </a:lvl5pPr>
+            <a:lvl6pPr marL="2514600" indent="-228600" eaLnBrk="0" fontAlgn="base" hangingPunct="0">
+              <a:spcBef>
+                <a:spcPct val="0"/>
+              </a:spcBef>
+              <a:spcAft>
+                <a:spcPct val="0"/>
+              </a:spcAft>
+              <a:defRPr>
+                <a:solidFill>
+                  <a:schemeClr val="tx1"/>
+                </a:solidFill>
+                <a:latin typeface="Calibri" panose="020F0502020204030204" pitchFamily="34" charset="0"/>
+              </a:defRPr>
+            </a:lvl6pPr>
+            <a:lvl7pPr marL="2971800" indent="-228600" eaLnBrk="0" fontAlgn="base" hangingPunct="0">
+              <a:spcBef>
+                <a:spcPct val="0"/>
+              </a:spcBef>
+              <a:spcAft>
+                <a:spcPct val="0"/>
+              </a:spcAft>
+              <a:defRPr>
+                <a:solidFill>
+                  <a:schemeClr val="tx1"/>
+                </a:solidFill>
+                <a:latin typeface="Calibri" panose="020F0502020204030204" pitchFamily="34" charset="0"/>
+              </a:defRPr>
+            </a:lvl7pPr>
+            <a:lvl8pPr marL="3429000" indent="-228600" eaLnBrk="0" fontAlgn="base" hangingPunct="0">
+              <a:spcBef>
+                <a:spcPct val="0"/>
+              </a:spcBef>
+              <a:spcAft>
+                <a:spcPct val="0"/>
+              </a:spcAft>
+              <a:defRPr>
+                <a:solidFill>
+                  <a:schemeClr val="tx1"/>
+                </a:solidFill>
+                <a:latin typeface="Calibri" panose="020F0502020204030204" pitchFamily="34" charset="0"/>
+              </a:defRPr>
+            </a:lvl8pPr>
+            <a:lvl9pPr marL="3886200" indent="-228600" eaLnBrk="0" fontAlgn="base" hangingPunct="0">
+              <a:spcBef>
+                <a:spcPct val="0"/>
+              </a:spcBef>
+              <a:spcAft>
+                <a:spcPct val="0"/>
+              </a:spcAft>
+              <a:defRPr>
+                <a:solidFill>
+                  <a:schemeClr val="tx1"/>
+                </a:solidFill>
+                <a:latin typeface="Calibri" panose="020F0502020204030204" pitchFamily="34" charset="0"/>
+              </a:defRPr>
+            </a:lvl9pPr>
+          </a:lstStyle>
+          <a:p>
+            <a:pPr algn="ctr" eaLnBrk="1" hangingPunct="1"/>
+            <a:r>
+              <a:rPr lang="en-US" altLang="en-US" sz="1000" dirty="0">
+                <a:solidFill>
+                  <a:schemeClr val="bg1"/>
+                </a:solidFill>
+                <a:latin typeface="Arial" panose="020B0604020202020204" pitchFamily="34" charset="0"/>
+                <a:ea typeface="Amazon Ember" panose="020B0603020204020204" pitchFamily="34" charset="0"/>
+                <a:cs typeface="Arial" panose="020B0604020202020204" pitchFamily="34" charset="0"/>
+              </a:rPr>
+              <a:t>API </a:t>
+            </a:r>
+          </a:p>
+          <a:p>
+            <a:pPr algn="ctr" eaLnBrk="1" hangingPunct="1"/>
+            <a:r>
+              <a:rPr lang="en-US" altLang="en-US" sz="1000" dirty="0">
+                <a:solidFill>
+                  <a:schemeClr val="bg1"/>
+                </a:solidFill>
+                <a:latin typeface="Arial" panose="020B0604020202020204" pitchFamily="34" charset="0"/>
+                <a:ea typeface="Amazon Ember" panose="020B0603020204020204" pitchFamily="34" charset="0"/>
+                <a:cs typeface="Arial" panose="020B0604020202020204" pitchFamily="34" charset="0"/>
+              </a:rPr>
+              <a:t>Gateway</a:t>
+            </a:r>
+          </a:p>
+        </p:txBody>
+      </p:sp>
+    </p:spTree>
+    <p:extLst>
+      <p:ext uri="{BB962C8B-B14F-4D97-AF65-F5344CB8AC3E}">
+        <p14:creationId xmlns:p14="http://schemas.microsoft.com/office/powerpoint/2010/main" val="1002257472"/>
+      </p:ext>
+    </p:extLst>
+  </p:cSld>
+  <p:clrMapOvr>
+    <a:masterClrMapping/>
+  </p:clrMapOvr>
+</p:sld>
+</file>
+
+<file path=ppt/slides/slide12.xml><?xml version="1.0" encoding="utf-8"?>
+<p:sld xmlns:a="http://schemas.openxmlformats.org/drawingml/2006/main" xmlns:r="http://schemas.openxmlformats.org/officeDocument/2006/relationships" xmlns:p="http://schemas.openxmlformats.org/presentationml/2006/main">
+  <p:cSld>
+    <p:bg>
+      <p:bgPr>
+        <a:solidFill>
+          <a:schemeClr val="tx1"/>
+        </a:solidFill>
+        <a:effectLst/>
+      </p:bgPr>
+    </p:bg>
+    <p:spTree>
+      <p:nvGrpSpPr>
+        <p:cNvPr id="1" name=""/>
+        <p:cNvGrpSpPr/>
+        <p:nvPr/>
+      </p:nvGrpSpPr>
+      <p:grpSpPr>
+        <a:xfrm>
+          <a:off x="0" y="0"/>
+          <a:ext cx="0" cy="0"/>
+          <a:chOff x="0" y="0"/>
+          <a:chExt cx="0" cy="0"/>
+        </a:xfrm>
+      </p:grpSpPr>
+      <p:pic>
+        <p:nvPicPr>
+          <p:cNvPr id="3" name="Graphic 2">
+            <a:extLst>
+              <a:ext uri="{FF2B5EF4-FFF2-40B4-BE49-F238E27FC236}">
+                <a16:creationId xmlns:a16="http://schemas.microsoft.com/office/drawing/2014/main" id="{A32F4CC8-D3D6-738E-7824-DE62B6BB84FC}"/>
+              </a:ext>
+            </a:extLst>
+          </p:cNvPr>
+          <p:cNvPicPr>
+            <a:picLocks noChangeAspect="1"/>
+          </p:cNvPicPr>
+          <p:nvPr/>
+        </p:nvPicPr>
+        <p:blipFill>
+          <a:blip>
+            <a:extLst>
+              <a:ext uri="{96DAC541-7B7A-43D3-8B79-37D633B846F1}">
+                <asvg:svgBlip xmlns:asvg="http://schemas.microsoft.com/office/drawing/2016/SVG/main" r:embed="rId2"/>
+              </a:ext>
+            </a:extLst>
+          </a:blip>
+          <a:stretch>
+            <a:fillRect/>
+          </a:stretch>
+        </p:blipFill>
+        <p:spPr>
+          <a:xfrm>
+            <a:off x="609600" y="137873"/>
+            <a:ext cx="10972800" cy="6858000"/>
+          </a:xfrm>
+          <a:prstGeom prst="rect">
+            <a:avLst/>
+          </a:prstGeom>
+        </p:spPr>
+      </p:pic>
+    </p:spTree>
+    <p:extLst>
+      <p:ext uri="{BB962C8B-B14F-4D97-AF65-F5344CB8AC3E}">
+        <p14:creationId xmlns:p14="http://schemas.microsoft.com/office/powerpoint/2010/main" val="2314957383"/>
+      </p:ext>
+    </p:extLst>
+  </p:cSld>
+  <p:clrMapOvr>
+    <a:masterClrMapping/>
+  </p:clrMapOvr>
+</p:sld>
+</file>
+
+<file path=ppt/slides/slide13.xml><?xml version="1.0" encoding="utf-8"?>
+<p:sld xmlns:a="http://schemas.openxmlformats.org/drawingml/2006/main" xmlns:r="http://schemas.openxmlformats.org/officeDocument/2006/relationships" xmlns:p="http://schemas.openxmlformats.org/presentationml/2006/main">
+  <p:cSld>
+    <p:bg>
+      <p:bgPr>
+        <a:solidFill>
+          <a:schemeClr val="tx1"/>
+        </a:solidFill>
+        <a:effectLst/>
+      </p:bgPr>
+    </p:bg>
+    <p:spTree>
+      <p:nvGrpSpPr>
+        <p:cNvPr id="1" name=""/>
+        <p:cNvGrpSpPr/>
+        <p:nvPr/>
+      </p:nvGrpSpPr>
+      <p:grpSpPr>
+        <a:xfrm>
+          <a:off x="0" y="0"/>
+          <a:ext cx="0" cy="0"/>
+          <a:chOff x="0" y="0"/>
+          <a:chExt cx="0" cy="0"/>
+        </a:xfrm>
+      </p:grpSpPr>
+      <p:pic>
+        <p:nvPicPr>
+          <p:cNvPr id="4" name="Graphic 3">
+            <a:extLst>
+              <a:ext uri="{FF2B5EF4-FFF2-40B4-BE49-F238E27FC236}">
+                <a16:creationId xmlns:a16="http://schemas.microsoft.com/office/drawing/2014/main" id="{3C1CA9C8-F26D-AC50-DFE1-764F86FC03F8}"/>
+              </a:ext>
+            </a:extLst>
+          </p:cNvPr>
+          <p:cNvPicPr>
+            <a:picLocks noChangeAspect="1"/>
+          </p:cNvPicPr>
+          <p:nvPr/>
+        </p:nvPicPr>
+        <p:blipFill>
+          <a:blip>
+            <a:extLst>
+              <a:ext uri="{96DAC541-7B7A-43D3-8B79-37D633B846F1}">
+                <asvg:svgBlip xmlns:asvg="http://schemas.microsoft.com/office/drawing/2016/SVG/main" r:embed="rId2"/>
+              </a:ext>
+            </a:extLst>
+          </a:blip>
+          <a:stretch>
+            <a:fillRect/>
+          </a:stretch>
+        </p:blipFill>
+        <p:spPr>
+          <a:xfrm>
+            <a:off x="681789" y="0"/>
+            <a:ext cx="10828421" cy="6858000"/>
+          </a:xfrm>
+          <a:prstGeom prst="rect">
+            <a:avLst/>
+          </a:prstGeom>
+        </p:spPr>
+      </p:pic>
+    </p:spTree>
+    <p:extLst>
+      <p:ext uri="{BB962C8B-B14F-4D97-AF65-F5344CB8AC3E}">
+        <p14:creationId xmlns:p14="http://schemas.microsoft.com/office/powerpoint/2010/main" val="3069205590"/>
+      </p:ext>
+    </p:extLst>
+  </p:cSld>
+  <p:clrMapOvr>
+    <a:masterClrMapping/>
+  </p:clrMapOvr>
+</p:sld>
+</file>
+
+<file path=ppt/slides/slide14.xml><?xml version="1.0" encoding="utf-8"?>
+<p:sld xmlns:a="http://schemas.openxmlformats.org/drawingml/2006/main" xmlns:r="http://schemas.openxmlformats.org/officeDocument/2006/relationships" xmlns:p="http://schemas.openxmlformats.org/presentationml/2006/main">
+  <p:cSld>
+    <p:bg>
+      <p:bgPr>
+        <a:solidFill>
+          <a:schemeClr val="tx1"/>
+        </a:solidFill>
+        <a:effectLst/>
+      </p:bgPr>
+    </p:bg>
+    <p:spTree>
+      <p:nvGrpSpPr>
+        <p:cNvPr id="1" name=""/>
+        <p:cNvGrpSpPr/>
+        <p:nvPr/>
+      </p:nvGrpSpPr>
+      <p:grpSpPr>
+        <a:xfrm>
+          <a:off x="0" y="0"/>
+          <a:ext cx="0" cy="0"/>
+          <a:chOff x="0" y="0"/>
+          <a:chExt cx="0" cy="0"/>
+        </a:xfrm>
+      </p:grpSpPr>
+      <p:pic>
+        <p:nvPicPr>
+          <p:cNvPr id="6" name="Graphic 5">
+            <a:extLst>
+              <a:ext uri="{FF2B5EF4-FFF2-40B4-BE49-F238E27FC236}">
+                <a16:creationId xmlns:a16="http://schemas.microsoft.com/office/drawing/2014/main" id="{957F5EC3-C126-09B7-8657-447C304DE688}"/>
+              </a:ext>
+            </a:extLst>
+          </p:cNvPr>
+          <p:cNvPicPr>
+            <a:picLocks noChangeAspect="1"/>
+          </p:cNvPicPr>
+          <p:nvPr/>
+        </p:nvPicPr>
+        <p:blipFill>
+          <a:blip>
+            <a:extLst>
+              <a:ext uri="{96DAC541-7B7A-43D3-8B79-37D633B846F1}">
+                <asvg:svgBlip xmlns:asvg="http://schemas.microsoft.com/office/drawing/2016/SVG/main" r:embed="rId2"/>
+              </a:ext>
+            </a:extLst>
+          </a:blip>
+          <a:stretch>
+            <a:fillRect/>
+          </a:stretch>
+        </p:blipFill>
+        <p:spPr>
+          <a:xfrm>
+            <a:off x="571500" y="0"/>
+            <a:ext cx="11049000" cy="6858000"/>
+          </a:xfrm>
+          <a:prstGeom prst="rect">
+            <a:avLst/>
+          </a:prstGeom>
+        </p:spPr>
+      </p:pic>
+    </p:spTree>
+    <p:extLst>
+      <p:ext uri="{BB962C8B-B14F-4D97-AF65-F5344CB8AC3E}">
+        <p14:creationId xmlns:p14="http://schemas.microsoft.com/office/powerpoint/2010/main" val="836185984"/>
+      </p:ext>
+    </p:extLst>
+  </p:cSld>
+  <p:clrMapOvr>
+    <a:masterClrMapping/>
+  </p:clrMapOvr>
+</p:sld>
+</file>
+
+<file path=ppt/slides/slide15.xml><?xml version="1.0" encoding="utf-8"?>
+<p:sld xmlns:a="http://schemas.openxmlformats.org/drawingml/2006/main" xmlns:r="http://schemas.openxmlformats.org/officeDocument/2006/relationships" xmlns:p="http://schemas.openxmlformats.org/presentationml/2006/main">
+  <p:cSld>
+    <p:bg>
+      <p:bgPr>
+        <a:solidFill>
+          <a:schemeClr val="tx1"/>
+        </a:solidFill>
+        <a:effectLst/>
+      </p:bgPr>
+    </p:bg>
+    <p:spTree>
+      <p:nvGrpSpPr>
+        <p:cNvPr id="1" name=""/>
+        <p:cNvGrpSpPr/>
+        <p:nvPr/>
+      </p:nvGrpSpPr>
+      <p:grpSpPr>
+        <a:xfrm>
+          <a:off x="0" y="0"/>
+          <a:ext cx="0" cy="0"/>
+          <a:chOff x="0" y="0"/>
+          <a:chExt cx="0" cy="0"/>
+        </a:xfrm>
+      </p:grpSpPr>
+      <p:pic>
+        <p:nvPicPr>
+          <p:cNvPr id="3" name="Graphic 2">
+            <a:extLst>
+              <a:ext uri="{FF2B5EF4-FFF2-40B4-BE49-F238E27FC236}">
+                <a16:creationId xmlns:a16="http://schemas.microsoft.com/office/drawing/2014/main" id="{E25BF99C-49C9-29BD-EF7A-35B19BA09794}"/>
+              </a:ext>
+            </a:extLst>
+          </p:cNvPr>
+          <p:cNvPicPr>
+            <a:picLocks noChangeAspect="1"/>
+          </p:cNvPicPr>
+          <p:nvPr/>
+        </p:nvPicPr>
+        <p:blipFill>
+          <a:blip>
+            <a:extLst>
+              <a:ext uri="{96DAC541-7B7A-43D3-8B79-37D633B846F1}">
+                <asvg:svgBlip xmlns:asvg="http://schemas.microsoft.com/office/drawing/2016/SVG/main" r:embed="rId2"/>
+              </a:ext>
+            </a:extLst>
+          </a:blip>
+          <a:stretch>
+            <a:fillRect/>
+          </a:stretch>
+        </p:blipFill>
+        <p:spPr>
+          <a:xfrm>
+            <a:off x="1391460" y="365598"/>
+            <a:ext cx="8572500" cy="1905000"/>
+          </a:xfrm>
+          <a:prstGeom prst="rect">
+            <a:avLst/>
+          </a:prstGeom>
+        </p:spPr>
+      </p:pic>
+    </p:spTree>
+    <p:extLst>
+      <p:ext uri="{BB962C8B-B14F-4D97-AF65-F5344CB8AC3E}">
+        <p14:creationId xmlns:p14="http://schemas.microsoft.com/office/powerpoint/2010/main" val="591707817"/>
+      </p:ext>
+    </p:extLst>
+  </p:cSld>
+  <p:clrMapOvr>
+    <a:masterClrMapping/>
+  </p:clrMapOvr>
+</p:sld>
+</file>
+
+<file path=ppt/slides/slide16.xml><?xml version="1.0" encoding="utf-8"?>
+<p:sld xmlns:a="http://schemas.openxmlformats.org/drawingml/2006/main" xmlns:r="http://schemas.openxmlformats.org/officeDocument/2006/relationships" xmlns:p="http://schemas.openxmlformats.org/presentationml/2006/main">
+  <p:cSld>
+    <p:spTree>
+      <p:nvGrpSpPr>
+        <p:cNvPr id="1" name=""/>
+        <p:cNvGrpSpPr/>
+        <p:nvPr/>
+      </p:nvGrpSpPr>
+      <p:grpSpPr>
+        <a:xfrm>
+          <a:off x="0" y="0"/>
+          <a:ext cx="0" cy="0"/>
+          <a:chOff x="0" y="0"/>
+          <a:chExt cx="0" cy="0"/>
+        </a:xfrm>
+      </p:grpSpPr>
+      <p:pic>
+        <p:nvPicPr>
+          <p:cNvPr id="3" name="Graphic 2">
+            <a:extLst>
+              <a:ext uri="{FF2B5EF4-FFF2-40B4-BE49-F238E27FC236}">
+                <a16:creationId xmlns:a16="http://schemas.microsoft.com/office/drawing/2014/main" id="{CB443F74-4D50-BC18-55E6-FD095FF7258D}"/>
+              </a:ext>
+            </a:extLst>
+          </p:cNvPr>
+          <p:cNvPicPr>
+            <a:picLocks noChangeAspect="1"/>
+          </p:cNvPicPr>
+          <p:nvPr/>
+        </p:nvPicPr>
+        <p:blipFill>
+          <a:blip>
+            <a:extLst>
+              <a:ext uri="{96DAC541-7B7A-43D3-8B79-37D633B846F1}">
+                <asvg:svgBlip xmlns:asvg="http://schemas.microsoft.com/office/drawing/2016/SVG/main" r:embed="rId2"/>
+              </a:ext>
+            </a:extLst>
+          </a:blip>
+          <a:stretch>
+            <a:fillRect/>
+          </a:stretch>
+        </p:blipFill>
+        <p:spPr>
+          <a:xfrm>
+            <a:off x="246529" y="0"/>
+            <a:ext cx="11698941" cy="6858000"/>
+          </a:xfrm>
+          <a:prstGeom prst="rect">
+            <a:avLst/>
+          </a:prstGeom>
+        </p:spPr>
+      </p:pic>
+    </p:spTree>
+    <p:extLst>
+      <p:ext uri="{BB962C8B-B14F-4D97-AF65-F5344CB8AC3E}">
         <p14:creationId xmlns:p14="http://schemas.microsoft.com/office/powerpoint/2010/main" val="2588242112"/>
       </p:ext>
     </p:extLst>
@@ -4333,8 +10140,8 @@
         </p:nvSpPr>
         <p:spPr>
           <a:xfrm>
-            <a:off x="7592953" y="2209800"/>
-            <a:ext cx="1937518" cy="1292662"/>
+            <a:off x="7497703" y="1740322"/>
+            <a:ext cx="3386761" cy="3231654"/>
           </a:xfrm>
           <a:prstGeom prst="rect">
             <a:avLst/>
@@ -4390,6 +10197,90 @@
               </a:rPr>
               <a:t>Administrators</a:t>
             </a:r>
+          </a:p>
+          <a:p>
+            <a:pPr marL="285750" indent="-285750">
+              <a:buFont typeface="Arial" panose="020B0604020202020204" pitchFamily="34" charset="0"/>
+              <a:buChar char="•"/>
+            </a:pPr>
+            <a:endParaRPr lang="en-US" dirty="0">
+              <a:solidFill>
+                <a:schemeClr val="bg1"/>
+              </a:solidFill>
+            </a:endParaRPr>
+          </a:p>
+          <a:p>
+            <a:r>
+              <a:rPr lang="en-US" dirty="0">
+                <a:solidFill>
+                  <a:schemeClr val="bg1"/>
+                </a:solidFill>
+              </a:rPr>
+              <a:t>Other Cognito Functions</a:t>
+            </a:r>
+          </a:p>
+          <a:p>
+            <a:pPr marL="285750" indent="-285750">
+              <a:buFont typeface="Arial" panose="020B0604020202020204" pitchFamily="34" charset="0"/>
+              <a:buChar char="•"/>
+            </a:pPr>
+            <a:r>
+              <a:rPr lang="en-US" dirty="0">
+                <a:solidFill>
+                  <a:schemeClr val="bg1"/>
+                </a:solidFill>
+              </a:rPr>
+              <a:t>User Signup</a:t>
+            </a:r>
+          </a:p>
+          <a:p>
+            <a:pPr marL="285750" indent="-285750">
+              <a:buFont typeface="Arial" panose="020B0604020202020204" pitchFamily="34" charset="0"/>
+              <a:buChar char="•"/>
+            </a:pPr>
+            <a:r>
+              <a:rPr lang="en-US" dirty="0">
+                <a:solidFill>
+                  <a:schemeClr val="bg1"/>
+                </a:solidFill>
+              </a:rPr>
+              <a:t>Password reset</a:t>
+            </a:r>
+          </a:p>
+          <a:p>
+            <a:pPr marL="285750" indent="-285750">
+              <a:buFont typeface="Arial" panose="020B0604020202020204" pitchFamily="34" charset="0"/>
+              <a:buChar char="•"/>
+            </a:pPr>
+            <a:r>
+              <a:rPr lang="en-US" dirty="0">
+                <a:solidFill>
+                  <a:schemeClr val="bg1"/>
+                </a:solidFill>
+              </a:rPr>
+              <a:t>Password recovery</a:t>
+            </a:r>
+          </a:p>
+          <a:p>
+            <a:pPr marL="285750" indent="-285750">
+              <a:buFont typeface="Arial" panose="020B0604020202020204" pitchFamily="34" charset="0"/>
+              <a:buChar char="•"/>
+            </a:pPr>
+            <a:r>
+              <a:rPr lang="en-US" dirty="0">
+                <a:solidFill>
+                  <a:schemeClr val="bg1"/>
+                </a:solidFill>
+              </a:rPr>
+              <a:t>MFA not implemented in MVP</a:t>
+            </a:r>
+          </a:p>
+          <a:p>
+            <a:endParaRPr lang="en-US" dirty="0">
+              <a:solidFill>
+                <a:schemeClr val="bg1"/>
+              </a:solidFill>
+            </a:endParaRPr>
           </a:p>
         </p:txBody>
       </p:sp>
@@ -4906,135 +10797,6 @@
           <a:chExt cx="0" cy="0"/>
         </a:xfrm>
       </p:grpSpPr>
-      <p:grpSp>
-        <p:nvGrpSpPr>
-          <p:cNvPr id="14" name="Group 13">
-            <a:extLst>
-              <a:ext uri="{FF2B5EF4-FFF2-40B4-BE49-F238E27FC236}">
-                <a16:creationId xmlns:a16="http://schemas.microsoft.com/office/drawing/2014/main" id="{6C5A5AC1-4D06-237B-8815-6236E59959AB}"/>
-              </a:ext>
-            </a:extLst>
-          </p:cNvPr>
-          <p:cNvGrpSpPr/>
-          <p:nvPr/>
-        </p:nvGrpSpPr>
-        <p:grpSpPr>
-          <a:xfrm>
-            <a:off x="-457200" y="819029"/>
-            <a:ext cx="10010775" cy="5562721"/>
-            <a:chOff x="-457200" y="819029"/>
-            <a:chExt cx="10010775" cy="5562721"/>
-          </a:xfrm>
-        </p:grpSpPr>
-        <p:cxnSp>
-          <p:nvCxnSpPr>
-            <p:cNvPr id="9" name="Straight Connector 8">
-              <a:extLst>
-                <a:ext uri="{FF2B5EF4-FFF2-40B4-BE49-F238E27FC236}">
-                  <a16:creationId xmlns:a16="http://schemas.microsoft.com/office/drawing/2014/main" id="{0FBCB803-CF5C-DA8B-90DB-BFECF914D019}"/>
-                </a:ext>
-              </a:extLst>
-            </p:cNvPr>
-            <p:cNvCxnSpPr/>
-            <p:nvPr/>
-          </p:nvCxnSpPr>
-          <p:spPr>
-            <a:xfrm>
-              <a:off x="-457200" y="1609725"/>
-              <a:ext cx="10010775" cy="0"/>
-            </a:xfrm>
-            <a:prstGeom prst="line">
-              <a:avLst/>
-            </a:prstGeom>
-          </p:spPr>
-          <p:style>
-            <a:lnRef idx="2">
-              <a:schemeClr val="accent1"/>
-            </a:lnRef>
-            <a:fillRef idx="0">
-              <a:schemeClr val="accent1"/>
-            </a:fillRef>
-            <a:effectRef idx="1">
-              <a:schemeClr val="accent1"/>
-            </a:effectRef>
-            <a:fontRef idx="minor">
-              <a:schemeClr val="tx1"/>
-            </a:fontRef>
-          </p:style>
-        </p:cxnSp>
-        <p:cxnSp>
-          <p:nvCxnSpPr>
-            <p:cNvPr id="11" name="Straight Connector 10">
-              <a:extLst>
-                <a:ext uri="{FF2B5EF4-FFF2-40B4-BE49-F238E27FC236}">
-                  <a16:creationId xmlns:a16="http://schemas.microsoft.com/office/drawing/2014/main" id="{92D890FE-6C41-B20E-C9A9-8C531F727A32}"/>
-                </a:ext>
-              </a:extLst>
-            </p:cNvPr>
-            <p:cNvCxnSpPr/>
-            <p:nvPr/>
-          </p:nvCxnSpPr>
-          <p:spPr>
-            <a:xfrm>
-              <a:off x="747252" y="952500"/>
-              <a:ext cx="0" cy="5229225"/>
-            </a:xfrm>
-            <a:prstGeom prst="line">
-              <a:avLst/>
-            </a:prstGeom>
-          </p:spPr>
-          <p:style>
-            <a:lnRef idx="2">
-              <a:schemeClr val="accent1"/>
-            </a:lnRef>
-            <a:fillRef idx="0">
-              <a:schemeClr val="accent1"/>
-            </a:fillRef>
-            <a:effectRef idx="1">
-              <a:schemeClr val="accent1"/>
-            </a:effectRef>
-            <a:fontRef idx="minor">
-              <a:schemeClr val="tx1"/>
-            </a:fontRef>
-          </p:style>
-        </p:cxnSp>
-        <p:cxnSp>
-          <p:nvCxnSpPr>
-            <p:cNvPr id="13" name="Straight Connector 12">
-              <a:extLst>
-                <a:ext uri="{FF2B5EF4-FFF2-40B4-BE49-F238E27FC236}">
-                  <a16:creationId xmlns:a16="http://schemas.microsoft.com/office/drawing/2014/main" id="{BC89B911-E280-6DE0-983C-F5CA21572EA3}"/>
-                </a:ext>
-              </a:extLst>
-            </p:cNvPr>
-            <p:cNvCxnSpPr/>
-            <p:nvPr/>
-          </p:nvCxnSpPr>
-          <p:spPr>
-            <a:xfrm>
-              <a:off x="8308258" y="819029"/>
-              <a:ext cx="0" cy="5562721"/>
-            </a:xfrm>
-            <a:prstGeom prst="line">
-              <a:avLst/>
-            </a:prstGeom>
-          </p:spPr>
-          <p:style>
-            <a:lnRef idx="2">
-              <a:schemeClr val="accent1"/>
-            </a:lnRef>
-            <a:fillRef idx="0">
-              <a:schemeClr val="accent1"/>
-            </a:fillRef>
-            <a:effectRef idx="1">
-              <a:schemeClr val="accent1"/>
-            </a:effectRef>
-            <a:fontRef idx="minor">
-              <a:schemeClr val="tx1"/>
-            </a:fontRef>
-          </p:style>
-        </p:cxnSp>
-      </p:grpSp>
       <p:pic>
         <p:nvPicPr>
           <p:cNvPr id="5" name="Picture 4">
@@ -5080,7 +10842,7 @@
         <p:spPr>
           <a:xfrm>
             <a:off x="8612128" y="2209800"/>
-            <a:ext cx="2139753" cy="1569660"/>
+            <a:ext cx="3568926" cy="2123658"/>
           </a:xfrm>
           <a:prstGeom prst="rect">
             <a:avLst/>
@@ -5120,7 +10882,7 @@
                   <a:schemeClr val="bg1"/>
                 </a:solidFill>
               </a:rPr>
-              <a:t>Download report</a:t>
+              <a:t>Current status of analysis</a:t>
             </a:r>
           </a:p>
           <a:p>
@@ -5134,7 +10896,35 @@
                   <a:schemeClr val="bg1"/>
                 </a:solidFill>
               </a:rPr>
-              <a:t>Delete </a:t>
+              <a:t>Data entered by User displayed</a:t>
+            </a:r>
+          </a:p>
+          <a:p>
+            <a:pPr marL="285750" indent="-285750">
+              <a:buFont typeface="Arial" panose="020B0604020202020204" pitchFamily="34" charset="0"/>
+              <a:buChar char="•"/>
+            </a:pPr>
+            <a:r>
+              <a:rPr lang="en-US" dirty="0">
+                <a:solidFill>
+                  <a:schemeClr val="bg1"/>
+                </a:solidFill>
+              </a:rPr>
+              <a:t>Download report link</a:t>
+            </a:r>
+          </a:p>
+          <a:p>
+            <a:pPr marL="285750" indent="-285750">
+              <a:buFont typeface="Arial" panose="020B0604020202020204" pitchFamily="34" charset="0"/>
+              <a:buChar char="•"/>
+            </a:pPr>
+            <a:r>
+              <a:rPr lang="en-US" dirty="0">
+                <a:solidFill>
+                  <a:schemeClr val="bg1"/>
+                </a:solidFill>
+              </a:rPr>
+              <a:t>Delete link</a:t>
             </a:r>
           </a:p>
           <a:p>
@@ -5265,7 +11055,7 @@
         <p:spPr>
           <a:xfrm>
             <a:off x="6602855" y="2209800"/>
-            <a:ext cx="4514324" cy="3785652"/>
+            <a:ext cx="4514324" cy="4062651"/>
           </a:xfrm>
           <a:prstGeom prst="rect">
             <a:avLst/>
@@ -5301,7 +11091,7 @@
                   <a:schemeClr val="bg1"/>
                 </a:solidFill>
               </a:rPr>
-              <a:t>Detailed feedback across 7 dimensions: </a:t>
+              <a:t>Detailed feedback (10 – 13 Pages) across 7 dimensions: </a:t>
             </a:r>
           </a:p>
           <a:p>
@@ -5491,6 +11281,253 @@
 </file>
 
 <file path=ppt/slides/slide8.xml><?xml version="1.0" encoding="utf-8"?>
+<p:sld xmlns:a="http://schemas.openxmlformats.org/drawingml/2006/main" xmlns:r="http://schemas.openxmlformats.org/officeDocument/2006/relationships" xmlns:p="http://schemas.openxmlformats.org/presentationml/2006/main">
+  <p:cSld>
+    <p:spTree>
+      <p:nvGrpSpPr>
+        <p:cNvPr id="1" name=""/>
+        <p:cNvGrpSpPr/>
+        <p:nvPr/>
+      </p:nvGrpSpPr>
+      <p:grpSpPr>
+        <a:xfrm>
+          <a:off x="0" y="0"/>
+          <a:ext cx="0" cy="0"/>
+          <a:chOff x="0" y="0"/>
+          <a:chExt cx="0" cy="0"/>
+        </a:xfrm>
+      </p:grpSpPr>
+      <p:pic>
+        <p:nvPicPr>
+          <p:cNvPr id="3" name="Picture 2">
+            <a:extLst>
+              <a:ext uri="{FF2B5EF4-FFF2-40B4-BE49-F238E27FC236}">
+                <a16:creationId xmlns:a16="http://schemas.microsoft.com/office/drawing/2014/main" id="{89B80552-7EAE-F319-FC08-D4AC7AF06323}"/>
+              </a:ext>
+            </a:extLst>
+          </p:cNvPr>
+          <p:cNvPicPr>
+            <a:picLocks noChangeAspect="1"/>
+          </p:cNvPicPr>
+          <p:nvPr/>
+        </p:nvPicPr>
+        <p:blipFill>
+          <a:blip r:embed="rId2"/>
+          <a:stretch>
+            <a:fillRect/>
+          </a:stretch>
+        </p:blipFill>
+        <p:spPr>
+          <a:xfrm>
+            <a:off x="747252" y="1609726"/>
+            <a:ext cx="7561007" cy="3770496"/>
+          </a:xfrm>
+          <a:prstGeom prst="rect">
+            <a:avLst/>
+          </a:prstGeom>
+          <a:ln>
+            <a:solidFill>
+              <a:schemeClr val="bg1"/>
+            </a:solidFill>
+          </a:ln>
+        </p:spPr>
+      </p:pic>
+      <p:sp>
+        <p:nvSpPr>
+          <p:cNvPr id="9" name="TextBox 8">
+            <a:extLst>
+              <a:ext uri="{FF2B5EF4-FFF2-40B4-BE49-F238E27FC236}">
+                <a16:creationId xmlns:a16="http://schemas.microsoft.com/office/drawing/2014/main" id="{57500E97-BD4D-EDEB-966D-411DFB207F07}"/>
+              </a:ext>
+            </a:extLst>
+          </p:cNvPr>
+          <p:cNvSpPr txBox="1"/>
+          <p:nvPr/>
+        </p:nvSpPr>
+        <p:spPr>
+          <a:xfrm>
+            <a:off x="8565005" y="2119074"/>
+            <a:ext cx="3255518" cy="2400657"/>
+          </a:xfrm>
+          <a:prstGeom prst="rect">
+            <a:avLst/>
+          </a:prstGeom>
+          <a:noFill/>
+        </p:spPr>
+        <p:txBody>
+          <a:bodyPr wrap="square" rtlCol="0">
+            <a:spAutoFit/>
+          </a:bodyPr>
+          <a:lstStyle/>
+          <a:p>
+            <a:r>
+              <a:rPr lang="en-US" sz="2400" b="1" dirty="0">
+                <a:solidFill>
+                  <a:schemeClr val="bg1"/>
+                </a:solidFill>
+              </a:rPr>
+              <a:t>Features</a:t>
+            </a:r>
+          </a:p>
+          <a:p>
+            <a:endParaRPr lang="en-US" dirty="0">
+              <a:solidFill>
+                <a:schemeClr val="bg1"/>
+              </a:solidFill>
+            </a:endParaRPr>
+          </a:p>
+          <a:p>
+            <a:r>
+              <a:rPr lang="en-US" dirty="0">
+                <a:solidFill>
+                  <a:schemeClr val="bg1"/>
+                </a:solidFill>
+              </a:rPr>
+              <a:t>Total costs of the development </a:t>
+            </a:r>
+          </a:p>
+          <a:p>
+            <a:pPr marL="285750" indent="-285750">
+              <a:buFont typeface="Arial" panose="020B0604020202020204" pitchFamily="34" charset="0"/>
+              <a:buChar char="•"/>
+            </a:pPr>
+            <a:r>
+              <a:rPr lang="en-US" dirty="0">
+                <a:solidFill>
+                  <a:schemeClr val="bg1"/>
+                </a:solidFill>
+              </a:rPr>
+              <a:t>AWS Account: $6.59</a:t>
+            </a:r>
+          </a:p>
+          <a:p>
+            <a:pPr marL="285750" indent="-285750">
+              <a:buFont typeface="Arial" panose="020B0604020202020204" pitchFamily="34" charset="0"/>
+              <a:buChar char="•"/>
+            </a:pPr>
+            <a:r>
+              <a:rPr lang="en-US" dirty="0">
+                <a:solidFill>
+                  <a:schemeClr val="bg1"/>
+                </a:solidFill>
+              </a:rPr>
+              <a:t>Kiro AI-DLC: 1355 Credits ($27.10)</a:t>
+            </a:r>
+          </a:p>
+          <a:p>
+            <a:pPr marL="285750" indent="-285750">
+              <a:buFont typeface="Arial" panose="020B0604020202020204" pitchFamily="34" charset="0"/>
+              <a:buChar char="•"/>
+            </a:pPr>
+            <a:endParaRPr lang="en-US" dirty="0">
+              <a:solidFill>
+                <a:schemeClr val="bg1"/>
+              </a:solidFill>
+            </a:endParaRPr>
+          </a:p>
+          <a:p>
+            <a:pPr marL="285750" indent="-285750">
+              <a:buFont typeface="Arial" panose="020B0604020202020204" pitchFamily="34" charset="0"/>
+              <a:buChar char="•"/>
+            </a:pPr>
+            <a:endParaRPr lang="en-US" dirty="0">
+              <a:solidFill>
+                <a:schemeClr val="bg1"/>
+              </a:solidFill>
+            </a:endParaRPr>
+          </a:p>
+        </p:txBody>
+      </p:sp>
+      <p:sp>
+        <p:nvSpPr>
+          <p:cNvPr id="11" name="TextBox 10">
+            <a:extLst>
+              <a:ext uri="{FF2B5EF4-FFF2-40B4-BE49-F238E27FC236}">
+                <a16:creationId xmlns:a16="http://schemas.microsoft.com/office/drawing/2014/main" id="{2C991F5C-0A1B-1274-87E3-29ED0BD79F2E}"/>
+              </a:ext>
+            </a:extLst>
+          </p:cNvPr>
+          <p:cNvSpPr txBox="1"/>
+          <p:nvPr/>
+        </p:nvSpPr>
+        <p:spPr>
+          <a:xfrm>
+            <a:off x="4470090" y="819029"/>
+            <a:ext cx="3251851" cy="523220"/>
+          </a:xfrm>
+          <a:prstGeom prst="rect">
+            <a:avLst/>
+          </a:prstGeom>
+          <a:noFill/>
+        </p:spPr>
+        <p:txBody>
+          <a:bodyPr wrap="none" rtlCol="0">
+            <a:spAutoFit/>
+          </a:bodyPr>
+          <a:lstStyle/>
+          <a:p>
+            <a:pPr algn="ctr"/>
+            <a:r>
+              <a:rPr lang="en-US" sz="2800" dirty="0">
+                <a:solidFill>
+                  <a:schemeClr val="bg1"/>
+                </a:solidFill>
+              </a:rPr>
+              <a:t>Development Costs</a:t>
+            </a:r>
+          </a:p>
+        </p:txBody>
+      </p:sp>
+      <p:pic>
+        <p:nvPicPr>
+          <p:cNvPr id="13" name="Picture 12">
+            <a:extLst>
+              <a:ext uri="{FF2B5EF4-FFF2-40B4-BE49-F238E27FC236}">
+                <a16:creationId xmlns:a16="http://schemas.microsoft.com/office/drawing/2014/main" id="{FCB81813-D671-9E9E-2E2C-739C07EACF68}"/>
+              </a:ext>
+            </a:extLst>
+          </p:cNvPr>
+          <p:cNvPicPr>
+            <a:picLocks noChangeAspect="1"/>
+          </p:cNvPicPr>
+          <p:nvPr/>
+        </p:nvPicPr>
+        <p:blipFill>
+          <a:blip r:embed="rId3"/>
+          <a:srcRect l="31001"/>
+          <a:stretch>
+            <a:fillRect/>
+          </a:stretch>
+        </p:blipFill>
+        <p:spPr>
+          <a:xfrm>
+            <a:off x="8565005" y="4243467"/>
+            <a:ext cx="3266816" cy="552527"/>
+          </a:xfrm>
+          <a:prstGeom prst="rect">
+            <a:avLst/>
+          </a:prstGeom>
+          <a:ln>
+            <a:solidFill>
+              <a:schemeClr val="bg1"/>
+            </a:solidFill>
+          </a:ln>
+        </p:spPr>
+      </p:pic>
+    </p:spTree>
+    <p:extLst>
+      <p:ext uri="{BB962C8B-B14F-4D97-AF65-F5344CB8AC3E}">
+        <p14:creationId xmlns:p14="http://schemas.microsoft.com/office/powerpoint/2010/main" val="1747668291"/>
+      </p:ext>
+    </p:extLst>
+  </p:cSld>
+  <p:clrMapOvr>
+    <a:masterClrMapping/>
+  </p:clrMapOvr>
+</p:sld>
+</file>
+
+<file path=ppt/slides/slide9.xml><?xml version="1.0" encoding="utf-8"?>
 <p:sld xmlns:a="http://schemas.openxmlformats.org/drawingml/2006/main" xmlns:r="http://schemas.openxmlformats.org/officeDocument/2006/relationships" xmlns:p="http://schemas.openxmlformats.org/presentationml/2006/main">
   <p:cSld>
     <p:spTree>
@@ -5640,36 +11677,6 @@
     <p:extLst>
       <p:ext uri="{BB962C8B-B14F-4D97-AF65-F5344CB8AC3E}">
         <p14:creationId xmlns:p14="http://schemas.microsoft.com/office/powerpoint/2010/main" val="492087632"/>
-      </p:ext>
-    </p:extLst>
-  </p:cSld>
-  <p:clrMapOvr>
-    <a:masterClrMapping/>
-  </p:clrMapOvr>
-</p:sld>
-</file>
-
-<file path=ppt/slides/slide9.xml><?xml version="1.0" encoding="utf-8"?>
-<p:sld xmlns:a="http://schemas.openxmlformats.org/drawingml/2006/main" xmlns:r="http://schemas.openxmlformats.org/officeDocument/2006/relationships" xmlns:p="http://schemas.openxmlformats.org/presentationml/2006/main">
-  <p:cSld>
-    <p:spTree>
-      <p:nvGrpSpPr>
-        <p:cNvPr id="1" name=""/>
-        <p:cNvGrpSpPr/>
-        <p:nvPr/>
-      </p:nvGrpSpPr>
-      <p:grpSpPr>
-        <a:xfrm>
-          <a:off x="0" y="0"/>
-          <a:ext cx="0" cy="0"/>
-          <a:chOff x="0" y="0"/>
-          <a:chExt cx="0" cy="0"/>
-        </a:xfrm>
-      </p:grpSpPr>
-    </p:spTree>
-    <p:extLst>
-      <p:ext uri="{BB962C8B-B14F-4D97-AF65-F5344CB8AC3E}">
-        <p14:creationId xmlns:p14="http://schemas.microsoft.com/office/powerpoint/2010/main" val="2904816320"/>
       </p:ext>
     </p:extLst>
   </p:cSld>
